--- a/앱 로그 데이터 분석.pptx
+++ b/앱 로그 데이터 분석.pptx
@@ -7,14 +7,22 @@
   <p:sldIdLst>
     <p:sldId id="257" r:id="rId2"/>
     <p:sldId id="258" r:id="rId3"/>
-    <p:sldId id="259" r:id="rId4"/>
-    <p:sldId id="260" r:id="rId5"/>
-    <p:sldId id="261" r:id="rId6"/>
-    <p:sldId id="262" r:id="rId7"/>
-    <p:sldId id="263" r:id="rId8"/>
-    <p:sldId id="264" r:id="rId9"/>
-    <p:sldId id="265" r:id="rId10"/>
-    <p:sldId id="266" r:id="rId11"/>
+    <p:sldId id="267" r:id="rId4"/>
+    <p:sldId id="259" r:id="rId5"/>
+    <p:sldId id="260" r:id="rId6"/>
+    <p:sldId id="261" r:id="rId7"/>
+    <p:sldId id="262" r:id="rId8"/>
+    <p:sldId id="268" r:id="rId9"/>
+    <p:sldId id="263" r:id="rId10"/>
+    <p:sldId id="264" r:id="rId11"/>
+    <p:sldId id="269" r:id="rId12"/>
+    <p:sldId id="265" r:id="rId13"/>
+    <p:sldId id="266" r:id="rId14"/>
+    <p:sldId id="270" r:id="rId15"/>
+    <p:sldId id="271" r:id="rId16"/>
+    <p:sldId id="272" r:id="rId17"/>
+    <p:sldId id="273" r:id="rId18"/>
+    <p:sldId id="274" r:id="rId19"/>
   </p:sldIdLst>
   <p:sldSz cx="12192000" cy="6858000"/>
   <p:notesSz cx="6858000" cy="9144000"/>
@@ -113,6 +121,11 @@
       </a:defRPr>
     </a:lvl9pPr>
   </p:defaultTextStyle>
+  <p:extLst>
+    <p:ext uri="{EFAFB233-063F-42B5-8137-9DF3F51BA10A}">
+      <p15:sldGuideLst xmlns:p15="http://schemas.microsoft.com/office/powerpoint/2012/main"/>
+    </p:ext>
+  </p:extLst>
 </p:presentation>
 </file>
 
@@ -263,7 +276,7 @@
           <a:p>
             <a:fld id="{5D7012CF-30D5-45E8-9C43-19A7D39C36A9}" type="datetimeFigureOut">
               <a:rPr lang="ko-KR" altLang="en-US" smtClean="0"/>
-              <a:t>2024-10-31</a:t>
+              <a:t>2024-11-12</a:t>
             </a:fld>
             <a:endParaRPr lang="ko-KR" altLang="en-US"/>
           </a:p>
@@ -461,7 +474,7 @@
           <a:p>
             <a:fld id="{5D7012CF-30D5-45E8-9C43-19A7D39C36A9}" type="datetimeFigureOut">
               <a:rPr lang="ko-KR" altLang="en-US" smtClean="0"/>
-              <a:t>2024-10-31</a:t>
+              <a:t>2024-11-12</a:t>
             </a:fld>
             <a:endParaRPr lang="ko-KR" altLang="en-US"/>
           </a:p>
@@ -669,7 +682,7 @@
           <a:p>
             <a:fld id="{5D7012CF-30D5-45E8-9C43-19A7D39C36A9}" type="datetimeFigureOut">
               <a:rPr lang="ko-KR" altLang="en-US" smtClean="0"/>
-              <a:t>2024-10-31</a:t>
+              <a:t>2024-11-12</a:t>
             </a:fld>
             <a:endParaRPr lang="ko-KR" altLang="en-US"/>
           </a:p>
@@ -867,7 +880,7 @@
           <a:p>
             <a:fld id="{5D7012CF-30D5-45E8-9C43-19A7D39C36A9}" type="datetimeFigureOut">
               <a:rPr lang="ko-KR" altLang="en-US" smtClean="0"/>
-              <a:t>2024-10-31</a:t>
+              <a:t>2024-11-12</a:t>
             </a:fld>
             <a:endParaRPr lang="ko-KR" altLang="en-US"/>
           </a:p>
@@ -1142,7 +1155,7 @@
           <a:p>
             <a:fld id="{5D7012CF-30D5-45E8-9C43-19A7D39C36A9}" type="datetimeFigureOut">
               <a:rPr lang="ko-KR" altLang="en-US" smtClean="0"/>
-              <a:t>2024-10-31</a:t>
+              <a:t>2024-11-12</a:t>
             </a:fld>
             <a:endParaRPr lang="ko-KR" altLang="en-US"/>
           </a:p>
@@ -1407,7 +1420,7 @@
           <a:p>
             <a:fld id="{5D7012CF-30D5-45E8-9C43-19A7D39C36A9}" type="datetimeFigureOut">
               <a:rPr lang="ko-KR" altLang="en-US" smtClean="0"/>
-              <a:t>2024-10-31</a:t>
+              <a:t>2024-11-12</a:t>
             </a:fld>
             <a:endParaRPr lang="ko-KR" altLang="en-US"/>
           </a:p>
@@ -1819,7 +1832,7 @@
           <a:p>
             <a:fld id="{5D7012CF-30D5-45E8-9C43-19A7D39C36A9}" type="datetimeFigureOut">
               <a:rPr lang="ko-KR" altLang="en-US" smtClean="0"/>
-              <a:t>2024-10-31</a:t>
+              <a:t>2024-11-12</a:t>
             </a:fld>
             <a:endParaRPr lang="ko-KR" altLang="en-US"/>
           </a:p>
@@ -1960,7 +1973,7 @@
           <a:p>
             <a:fld id="{5D7012CF-30D5-45E8-9C43-19A7D39C36A9}" type="datetimeFigureOut">
               <a:rPr lang="ko-KR" altLang="en-US" smtClean="0"/>
-              <a:t>2024-10-31</a:t>
+              <a:t>2024-11-12</a:t>
             </a:fld>
             <a:endParaRPr lang="ko-KR" altLang="en-US"/>
           </a:p>
@@ -2073,7 +2086,7 @@
           <a:p>
             <a:fld id="{5D7012CF-30D5-45E8-9C43-19A7D39C36A9}" type="datetimeFigureOut">
               <a:rPr lang="ko-KR" altLang="en-US" smtClean="0"/>
-              <a:t>2024-10-31</a:t>
+              <a:t>2024-11-12</a:t>
             </a:fld>
             <a:endParaRPr lang="ko-KR" altLang="en-US"/>
           </a:p>
@@ -2384,7 +2397,7 @@
           <a:p>
             <a:fld id="{5D7012CF-30D5-45E8-9C43-19A7D39C36A9}" type="datetimeFigureOut">
               <a:rPr lang="ko-KR" altLang="en-US" smtClean="0"/>
-              <a:t>2024-10-31</a:t>
+              <a:t>2024-11-12</a:t>
             </a:fld>
             <a:endParaRPr lang="ko-KR" altLang="en-US"/>
           </a:p>
@@ -2672,7 +2685,7 @@
           <a:p>
             <a:fld id="{5D7012CF-30D5-45E8-9C43-19A7D39C36A9}" type="datetimeFigureOut">
               <a:rPr lang="ko-KR" altLang="en-US" smtClean="0"/>
-              <a:t>2024-10-31</a:t>
+              <a:t>2024-11-12</a:t>
             </a:fld>
             <a:endParaRPr lang="ko-KR" altLang="en-US"/>
           </a:p>
@@ -2913,7 +2926,7 @@
           <a:p>
             <a:fld id="{5D7012CF-30D5-45E8-9C43-19A7D39C36A9}" type="datetimeFigureOut">
               <a:rPr lang="ko-KR" altLang="en-US" smtClean="0"/>
-              <a:t>2024-10-31</a:t>
+              <a:t>2024-11-12</a:t>
             </a:fld>
             <a:endParaRPr lang="ko-KR" altLang="en-US"/>
           </a:p>
@@ -3351,7 +3364,7 @@
         <p:spPr>
           <a:xfrm>
             <a:off x="166255" y="175491"/>
-            <a:ext cx="5568281" cy="2388346"/>
+            <a:ext cx="5568281" cy="4161139"/>
           </a:xfrm>
           <a:prstGeom prst="rect">
             <a:avLst/>
@@ -3376,7 +3389,7 @@
               </a:spcAft>
             </a:pPr>
             <a:r>
-              <a:rPr lang="en-US" altLang="ko-KR" sz="2800" kern="0" spc="0" dirty="0">
+              <a:rPr lang="en-US" altLang="ko-KR" sz="2800" b="1" kern="0" spc="0" dirty="0">
                 <a:solidFill>
                   <a:srgbClr val="000000"/>
                 </a:solidFill>
@@ -3388,7 +3401,7 @@
               <a:t>Firebase </a:t>
             </a:r>
             <a:r>
-              <a:rPr lang="ko-KR" altLang="en-US" sz="2800" kern="0" spc="0" dirty="0">
+              <a:rPr lang="ko-KR" altLang="en-US" sz="2800" b="1" kern="0" spc="0" dirty="0">
                 <a:solidFill>
                   <a:srgbClr val="000000"/>
                 </a:solidFill>
@@ -3399,7 +3412,7 @@
               </a:rPr>
               <a:t>앱 로그 기반 데이터 분석 </a:t>
             </a:r>
-            <a:endParaRPr lang="en-US" altLang="ko-KR" sz="2800" kern="0" spc="0" dirty="0">
+            <a:endParaRPr lang="en-US" altLang="ko-KR" sz="2800" b="1" kern="0" spc="0" dirty="0">
               <a:solidFill>
                 <a:srgbClr val="000000"/>
               </a:solidFill>
@@ -3452,7 +3465,7 @@
                 <a:ea typeface="함초롬바탕" panose="02030604000101010101" pitchFamily="18" charset="-127"/>
                 <a:cs typeface="ADLaM Display" panose="02010000000000000000" pitchFamily="2" charset="0"/>
               </a:rPr>
-              <a:t>다룰 데이터는 음식 앱의 데이터이다</a:t>
+              <a:t>다룰 데이터는 음식 앱의 데이터입니다</a:t>
             </a:r>
             <a:r>
               <a:rPr lang="en-US" altLang="ko-KR" sz="1800" kern="0" spc="0" dirty="0">
@@ -3464,7 +3477,7 @@
                 <a:ea typeface="ADLaM Display" panose="02010000000000000000" pitchFamily="2" charset="0"/>
                 <a:cs typeface="ADLaM Display" panose="02010000000000000000" pitchFamily="2" charset="0"/>
               </a:rPr>
-              <a:t>.</a:t>
+              <a:t>. </a:t>
             </a:r>
           </a:p>
           <a:p>
@@ -3479,6 +3492,156 @@
                 <a:spcPts val="0"/>
               </a:spcAft>
             </a:pPr>
+            <a:r>
+              <a:rPr lang="en-US" altLang="ko-KR" sz="1800" kern="0" spc="0" dirty="0">
+                <a:solidFill>
+                  <a:srgbClr val="000000"/>
+                </a:solidFill>
+                <a:effectLst/>
+                <a:latin typeface="ADLaM Display" panose="02010000000000000000" pitchFamily="2" charset="0"/>
+                <a:ea typeface="ADLaM Display" panose="02010000000000000000" pitchFamily="2" charset="0"/>
+                <a:cs typeface="ADLaM Display" panose="02010000000000000000" pitchFamily="2" charset="0"/>
+              </a:rPr>
+              <a:t>Google </a:t>
+            </a:r>
+            <a:r>
+              <a:rPr lang="en-US" altLang="ko-KR" sz="1800" kern="0" spc="0" dirty="0" err="1">
+                <a:solidFill>
+                  <a:srgbClr val="000000"/>
+                </a:solidFill>
+                <a:effectLst/>
+                <a:latin typeface="ADLaM Display" panose="02010000000000000000" pitchFamily="2" charset="0"/>
+                <a:ea typeface="ADLaM Display" panose="02010000000000000000" pitchFamily="2" charset="0"/>
+                <a:cs typeface="ADLaM Display" panose="02010000000000000000" pitchFamily="2" charset="0"/>
+              </a:rPr>
+              <a:t>BigQuery</a:t>
+            </a:r>
+            <a:r>
+              <a:rPr lang="ko-KR" altLang="en-US" sz="1800" kern="0" spc="0" dirty="0">
+                <a:solidFill>
+                  <a:srgbClr val="000000"/>
+                </a:solidFill>
+                <a:effectLst/>
+                <a:latin typeface="ADLaM Display" panose="02010000000000000000" pitchFamily="2" charset="0"/>
+                <a:ea typeface="함초롬바탕" panose="02030604000101010101" pitchFamily="18" charset="-127"/>
+                <a:cs typeface="ADLaM Display" panose="02010000000000000000" pitchFamily="2" charset="0"/>
+              </a:rPr>
+              <a:t>를 사용해 유저 로그 데이터에서 여러가지 시각화를 추출</a:t>
+            </a:r>
+            <a:r>
+              <a:rPr lang="en-US" altLang="ko-KR" kern="0" dirty="0">
+                <a:solidFill>
+                  <a:srgbClr val="000000"/>
+                </a:solidFill>
+                <a:latin typeface="ADLaM Display" panose="02010000000000000000" pitchFamily="2" charset="0"/>
+                <a:ea typeface="ADLaM Display" panose="02010000000000000000" pitchFamily="2" charset="0"/>
+                <a:cs typeface="ADLaM Display" panose="02010000000000000000" pitchFamily="2" charset="0"/>
+              </a:rPr>
+              <a:t>,</a:t>
+            </a:r>
+            <a:r>
+              <a:rPr lang="ko-KR" altLang="en-US" sz="1800" kern="0" spc="0" dirty="0">
+                <a:solidFill>
+                  <a:srgbClr val="000000"/>
+                </a:solidFill>
+                <a:effectLst/>
+                <a:latin typeface="ADLaM Display" panose="02010000000000000000" pitchFamily="2" charset="0"/>
+                <a:ea typeface="함초롬바탕" panose="02030604000101010101" pitchFamily="18" charset="-127"/>
+                <a:cs typeface="ADLaM Display" panose="02010000000000000000" pitchFamily="2" charset="0"/>
+              </a:rPr>
+              <a:t> 분석해 보았습니다</a:t>
+            </a:r>
+            <a:r>
+              <a:rPr lang="en-US" altLang="ko-KR" sz="1800" kern="0" spc="0" dirty="0">
+                <a:solidFill>
+                  <a:srgbClr val="000000"/>
+                </a:solidFill>
+                <a:effectLst/>
+                <a:latin typeface="ADLaM Display" panose="02010000000000000000" pitchFamily="2" charset="0"/>
+                <a:ea typeface="ADLaM Display" panose="02010000000000000000" pitchFamily="2" charset="0"/>
+                <a:cs typeface="ADLaM Display" panose="02010000000000000000" pitchFamily="2" charset="0"/>
+              </a:rPr>
+              <a:t>.</a:t>
+            </a:r>
+          </a:p>
+          <a:p>
+            <a:pPr marL="0" marR="0" indent="0" algn="just" fontAlgn="base" latinLnBrk="1">
+              <a:lnSpc>
+                <a:spcPct val="160000"/>
+              </a:lnSpc>
+              <a:spcBef>
+                <a:spcPts val="0"/>
+              </a:spcBef>
+              <a:spcAft>
+                <a:spcPts val="0"/>
+              </a:spcAft>
+            </a:pPr>
+            <a:endParaRPr lang="en-US" altLang="ko-KR" sz="1800" kern="0" spc="0" dirty="0">
+              <a:solidFill>
+                <a:srgbClr val="000000"/>
+              </a:solidFill>
+              <a:effectLst/>
+              <a:latin typeface="ADLaM Display" panose="02010000000000000000" pitchFamily="2" charset="0"/>
+              <a:ea typeface="ADLaM Display" panose="02010000000000000000" pitchFamily="2" charset="0"/>
+              <a:cs typeface="ADLaM Display" panose="02010000000000000000" pitchFamily="2" charset="0"/>
+            </a:endParaRPr>
+          </a:p>
+          <a:p>
+            <a:pPr marL="0" marR="0" indent="0" algn="just" fontAlgn="base" latinLnBrk="1">
+              <a:lnSpc>
+                <a:spcPct val="160000"/>
+              </a:lnSpc>
+              <a:spcBef>
+                <a:spcPts val="0"/>
+              </a:spcBef>
+              <a:spcAft>
+                <a:spcPts val="0"/>
+              </a:spcAft>
+            </a:pPr>
+            <a:endParaRPr lang="en-US" altLang="ko-KR" kern="0" dirty="0">
+              <a:solidFill>
+                <a:srgbClr val="000000"/>
+              </a:solidFill>
+              <a:latin typeface="ADLaM Display" panose="02010000000000000000" pitchFamily="2" charset="0"/>
+              <a:ea typeface="ADLaM Display" panose="02010000000000000000" pitchFamily="2" charset="0"/>
+              <a:cs typeface="ADLaM Display" panose="02010000000000000000" pitchFamily="2" charset="0"/>
+            </a:endParaRPr>
+          </a:p>
+          <a:p>
+            <a:pPr marL="0" marR="0" indent="0" algn="just" fontAlgn="base" latinLnBrk="1">
+              <a:lnSpc>
+                <a:spcPct val="160000"/>
+              </a:lnSpc>
+              <a:spcBef>
+                <a:spcPts val="0"/>
+              </a:spcBef>
+              <a:spcAft>
+                <a:spcPts val="0"/>
+              </a:spcAft>
+            </a:pPr>
+            <a:r>
+              <a:rPr lang="ko-KR" altLang="en-US" sz="1800" kern="0" spc="0" dirty="0">
+                <a:solidFill>
+                  <a:srgbClr val="000000"/>
+                </a:solidFill>
+                <a:effectLst/>
+                <a:latin typeface="ADLaM Display" panose="02010000000000000000" pitchFamily="2" charset="0"/>
+                <a:cs typeface="ADLaM Display" panose="02010000000000000000" pitchFamily="2" charset="0"/>
+              </a:rPr>
+              <a:t>데이터 원본 </a:t>
+            </a:r>
+            <a:r>
+              <a:rPr lang="en-US" altLang="ko-KR" sz="1800" kern="0" spc="0" dirty="0">
+                <a:solidFill>
+                  <a:srgbClr val="000000"/>
+                </a:solidFill>
+                <a:effectLst/>
+                <a:latin typeface="ADLaM Display" panose="02010000000000000000" pitchFamily="2" charset="0"/>
+                <a:ea typeface="ADLaM Display" panose="02010000000000000000" pitchFamily="2" charset="0"/>
+                <a:cs typeface="ADLaM Display" panose="02010000000000000000" pitchFamily="2" charset="0"/>
+              </a:rPr>
+              <a:t>: </a:t>
+            </a:r>
             <a:endParaRPr lang="ko-KR" altLang="en-US" sz="1800" kern="0" spc="0" dirty="0">
               <a:solidFill>
                 <a:srgbClr val="000000"/>
@@ -3560,7 +3723,7 @@
         </p:blipFill>
         <p:spPr>
           <a:xfrm>
-            <a:off x="4390350" y="3196380"/>
+            <a:off x="2014097" y="3196380"/>
             <a:ext cx="7600390" cy="3486129"/>
           </a:xfrm>
           <a:prstGeom prst="rect">
@@ -3589,7 +3752,7 @@
         <p:cNvPr id="1" name="">
           <a:extLst>
             <a:ext uri="{FF2B5EF4-FFF2-40B4-BE49-F238E27FC236}">
-              <a16:creationId xmlns:a16="http://schemas.microsoft.com/office/drawing/2014/main" id="{A8739178-6B4E-11D7-4FB9-94F0D0381FF2}"/>
+              <a16:creationId xmlns:a16="http://schemas.microsoft.com/office/drawing/2014/main" id="{FCA092B6-5D42-FB3F-587B-204AEE9C9C9C}"/>
             </a:ext>
           </a:extLst>
         </p:cNvPr>
@@ -3609,7 +3772,556 @@
           <p:cNvPr id="4" name="TextBox 3">
             <a:extLst>
               <a:ext uri="{FF2B5EF4-FFF2-40B4-BE49-F238E27FC236}">
-                <a16:creationId xmlns:a16="http://schemas.microsoft.com/office/drawing/2014/main" id="{12CF8579-930F-094C-004F-0F350073AF7B}"/>
+                <a16:creationId xmlns:a16="http://schemas.microsoft.com/office/drawing/2014/main" id="{1B9229E8-DBA0-E35F-274A-F9060DB3889D}"/>
+              </a:ext>
+            </a:extLst>
+          </p:cNvPr>
+          <p:cNvSpPr txBox="1"/>
+          <p:nvPr/>
+        </p:nvSpPr>
+        <p:spPr>
+          <a:xfrm>
+            <a:off x="166255" y="175491"/>
+            <a:ext cx="10603345" cy="2937279"/>
+          </a:xfrm>
+          <a:prstGeom prst="rect">
+            <a:avLst/>
+          </a:prstGeom>
+          <a:noFill/>
+        </p:spPr>
+        <p:txBody>
+          <a:bodyPr wrap="square" rtlCol="0">
+            <a:spAutoFit/>
+          </a:bodyPr>
+          <a:lstStyle/>
+          <a:p>
+            <a:pPr marL="0" marR="0" indent="0" algn="just" fontAlgn="base" latinLnBrk="1">
+              <a:lnSpc>
+                <a:spcPct val="160000"/>
+              </a:lnSpc>
+              <a:spcBef>
+                <a:spcPts val="0"/>
+              </a:spcBef>
+              <a:spcAft>
+                <a:spcPts val="0"/>
+              </a:spcAft>
+            </a:pPr>
+            <a:r>
+              <a:rPr lang="en-US" altLang="ko-KR" sz="2800" b="1" kern="0" spc="0" dirty="0">
+                <a:solidFill>
+                  <a:srgbClr val="000000"/>
+                </a:solidFill>
+                <a:effectLst/>
+                <a:latin typeface="ADLaM Display" panose="02010000000000000000" pitchFamily="2" charset="0"/>
+                <a:ea typeface="ADLaM Display" panose="02010000000000000000" pitchFamily="2" charset="0"/>
+                <a:cs typeface="ADLaM Display" panose="02010000000000000000" pitchFamily="2" charset="0"/>
+              </a:rPr>
+              <a:t>Firebase </a:t>
+            </a:r>
+            <a:r>
+              <a:rPr lang="ko-KR" altLang="en-US" sz="2800" b="1" kern="0" spc="0" dirty="0">
+                <a:solidFill>
+                  <a:srgbClr val="000000"/>
+                </a:solidFill>
+                <a:effectLst/>
+                <a:latin typeface="ADLaM Display" panose="02010000000000000000" pitchFamily="2" charset="0"/>
+                <a:ea typeface="함초롬바탕" panose="02030604000101010101" pitchFamily="18" charset="-127"/>
+                <a:cs typeface="ADLaM Display" panose="02010000000000000000" pitchFamily="2" charset="0"/>
+              </a:rPr>
+              <a:t>앱 로그 기반 데이터 분석 </a:t>
+            </a:r>
+            <a:endParaRPr lang="en-US" altLang="ko-KR" sz="2800" b="1" kern="0" spc="0" dirty="0">
+              <a:solidFill>
+                <a:srgbClr val="000000"/>
+              </a:solidFill>
+              <a:effectLst/>
+              <a:latin typeface="ADLaM Display" panose="02010000000000000000" pitchFamily="2" charset="0"/>
+              <a:ea typeface="ADLaM Display" panose="02010000000000000000" pitchFamily="2" charset="0"/>
+              <a:cs typeface="ADLaM Display" panose="02010000000000000000" pitchFamily="2" charset="0"/>
+            </a:endParaRPr>
+          </a:p>
+          <a:p>
+            <a:pPr algn="just" fontAlgn="base">
+              <a:lnSpc>
+                <a:spcPct val="160000"/>
+              </a:lnSpc>
+            </a:pPr>
+            <a:r>
+              <a:rPr lang="en-US" altLang="ko-KR" sz="1800" kern="0" spc="0" dirty="0">
+                <a:solidFill>
+                  <a:srgbClr val="000000"/>
+                </a:solidFill>
+                <a:effectLst/>
+                <a:latin typeface="ADLaM Display" panose="02010000000000000000" pitchFamily="2" charset="0"/>
+                <a:ea typeface="ADLaM Display" panose="02010000000000000000" pitchFamily="2" charset="0"/>
+                <a:cs typeface="ADLaM Display" panose="02010000000000000000" pitchFamily="2" charset="0"/>
+              </a:rPr>
+              <a:t>&lt;3. </a:t>
+            </a:r>
+            <a:r>
+              <a:rPr lang="ko-KR" altLang="en-US" sz="1800" kern="0" spc="0" dirty="0">
+                <a:solidFill>
+                  <a:srgbClr val="000000"/>
+                </a:solidFill>
+                <a:effectLst/>
+                <a:latin typeface="ADLaM Display" panose="02010000000000000000" pitchFamily="2" charset="0"/>
+                <a:cs typeface="ADLaM Display" panose="02010000000000000000" pitchFamily="2" charset="0"/>
+              </a:rPr>
+              <a:t>코호트 </a:t>
+            </a:r>
+            <a:r>
+              <a:rPr lang="ko-KR" altLang="en-US" sz="1800" kern="0" spc="0" dirty="0" err="1">
+                <a:solidFill>
+                  <a:srgbClr val="000000"/>
+                </a:solidFill>
+                <a:effectLst/>
+                <a:latin typeface="ADLaM Display" panose="02010000000000000000" pitchFamily="2" charset="0"/>
+                <a:cs typeface="ADLaM Display" panose="02010000000000000000" pitchFamily="2" charset="0"/>
+              </a:rPr>
+              <a:t>리텐션</a:t>
+            </a:r>
+            <a:r>
+              <a:rPr lang="en-US" altLang="ko-KR" kern="0" dirty="0">
+                <a:solidFill>
+                  <a:srgbClr val="000000"/>
+                </a:solidFill>
+                <a:latin typeface="ADLaM Display" panose="02010000000000000000" pitchFamily="2" charset="0"/>
+                <a:ea typeface="ADLaM Display" panose="02010000000000000000" pitchFamily="2" charset="0"/>
+                <a:cs typeface="ADLaM Display" panose="02010000000000000000" pitchFamily="2" charset="0"/>
+              </a:rPr>
+              <a:t>&gt;</a:t>
+            </a:r>
+            <a:endParaRPr lang="ko-KR" altLang="en-US" sz="1800" kern="0" spc="0" dirty="0">
+              <a:solidFill>
+                <a:srgbClr val="000000"/>
+              </a:solidFill>
+              <a:effectLst/>
+              <a:latin typeface="ADLaM Display" panose="02010000000000000000" pitchFamily="2" charset="0"/>
+              <a:cs typeface="ADLaM Display" panose="02010000000000000000" pitchFamily="2" charset="0"/>
+            </a:endParaRPr>
+          </a:p>
+          <a:p>
+            <a:pPr algn="just" fontAlgn="base">
+              <a:lnSpc>
+                <a:spcPct val="160000"/>
+              </a:lnSpc>
+            </a:pPr>
+            <a:r>
+              <a:rPr lang="en-US" altLang="ko-KR" kern="0" dirty="0">
+                <a:solidFill>
+                  <a:srgbClr val="000000"/>
+                </a:solidFill>
+                <a:latin typeface="ADLaM Display" panose="02010000000000000000" pitchFamily="2" charset="0"/>
+                <a:ea typeface="ADLaM Display" panose="02010000000000000000" pitchFamily="2" charset="0"/>
+                <a:cs typeface="ADLaM Display" panose="02010000000000000000" pitchFamily="2" charset="0"/>
+              </a:rPr>
+              <a:t>SQL </a:t>
+            </a:r>
+            <a:r>
+              <a:rPr lang="ko-KR" altLang="en-US" kern="0" dirty="0">
+                <a:solidFill>
+                  <a:srgbClr val="000000"/>
+                </a:solidFill>
+                <a:latin typeface="ADLaM Display" panose="02010000000000000000" pitchFamily="2" charset="0"/>
+                <a:cs typeface="ADLaM Display" panose="02010000000000000000" pitchFamily="2" charset="0"/>
+              </a:rPr>
+              <a:t>쿼리를 통해 코호트 </a:t>
+            </a:r>
+            <a:r>
+              <a:rPr lang="ko-KR" altLang="en-US" kern="0" dirty="0" err="1">
+                <a:solidFill>
+                  <a:srgbClr val="000000"/>
+                </a:solidFill>
+                <a:latin typeface="ADLaM Display" panose="02010000000000000000" pitchFamily="2" charset="0"/>
+                <a:cs typeface="ADLaM Display" panose="02010000000000000000" pitchFamily="2" charset="0"/>
+              </a:rPr>
+              <a:t>리텐션</a:t>
+            </a:r>
+            <a:r>
+              <a:rPr lang="ko-KR" altLang="en-US" kern="0" dirty="0">
+                <a:solidFill>
+                  <a:srgbClr val="000000"/>
+                </a:solidFill>
+                <a:latin typeface="ADLaM Display" panose="02010000000000000000" pitchFamily="2" charset="0"/>
+                <a:cs typeface="ADLaM Display" panose="02010000000000000000" pitchFamily="2" charset="0"/>
+              </a:rPr>
+              <a:t> 시각화 추출</a:t>
+            </a:r>
+            <a:endParaRPr lang="en-US" altLang="ko-KR" kern="0" dirty="0">
+              <a:solidFill>
+                <a:srgbClr val="000000"/>
+              </a:solidFill>
+              <a:latin typeface="ADLaM Display" panose="02010000000000000000" pitchFamily="2" charset="0"/>
+              <a:ea typeface="ADLaM Display" panose="02010000000000000000" pitchFamily="2" charset="0"/>
+              <a:cs typeface="ADLaM Display" panose="02010000000000000000" pitchFamily="2" charset="0"/>
+            </a:endParaRPr>
+          </a:p>
+          <a:p>
+            <a:pPr algn="just" fontAlgn="base">
+              <a:lnSpc>
+                <a:spcPct val="160000"/>
+              </a:lnSpc>
+            </a:pPr>
+            <a:endParaRPr lang="en-US" altLang="ko-KR" dirty="0">
+              <a:latin typeface="ADLaM Display" panose="02010000000000000000" pitchFamily="2" charset="0"/>
+              <a:ea typeface="ADLaM Display" panose="02010000000000000000" pitchFamily="2" charset="0"/>
+              <a:cs typeface="ADLaM Display" panose="02010000000000000000" pitchFamily="2" charset="0"/>
+            </a:endParaRPr>
+          </a:p>
+          <a:p>
+            <a:pPr algn="just" fontAlgn="base">
+              <a:lnSpc>
+                <a:spcPct val="160000"/>
+              </a:lnSpc>
+            </a:pPr>
+            <a:r>
+              <a:rPr lang="ko-KR" altLang="en-US" kern="0" dirty="0">
+                <a:solidFill>
+                  <a:srgbClr val="000000"/>
+                </a:solidFill>
+                <a:latin typeface="ADLaM Display" panose="02010000000000000000" pitchFamily="2" charset="0"/>
+                <a:ea typeface="함초롬바탕" panose="02030604000101010101" pitchFamily="18" charset="-127"/>
+                <a:cs typeface="ADLaM Display" panose="02010000000000000000" pitchFamily="2" charset="0"/>
+              </a:rPr>
+              <a:t>데이터 </a:t>
+            </a:r>
+            <a:r>
+              <a:rPr lang="en-US" altLang="ko-KR" kern="0" dirty="0">
+                <a:solidFill>
+                  <a:srgbClr val="000000"/>
+                </a:solidFill>
+                <a:latin typeface="ADLaM Display" panose="02010000000000000000" pitchFamily="2" charset="0"/>
+                <a:ea typeface="ADLaM Display" panose="02010000000000000000" pitchFamily="2" charset="0"/>
+                <a:cs typeface="ADLaM Display" panose="02010000000000000000" pitchFamily="2" charset="0"/>
+              </a:rPr>
+              <a:t>: 2022-08-01 ~ 2022-12-31</a:t>
+            </a:r>
+            <a:endParaRPr lang="en-US" altLang="ko-KR" sz="1800" kern="0" spc="0" dirty="0">
+              <a:solidFill>
+                <a:srgbClr val="000000"/>
+              </a:solidFill>
+              <a:effectLst/>
+              <a:latin typeface="ADLaM Display" panose="02010000000000000000" pitchFamily="2" charset="0"/>
+              <a:ea typeface="ADLaM Display" panose="02010000000000000000" pitchFamily="2" charset="0"/>
+              <a:cs typeface="ADLaM Display" panose="02010000000000000000" pitchFamily="2" charset="0"/>
+            </a:endParaRPr>
+          </a:p>
+          <a:p>
+            <a:pPr algn="just" fontAlgn="base">
+              <a:lnSpc>
+                <a:spcPct val="160000"/>
+              </a:lnSpc>
+            </a:pPr>
+            <a:endParaRPr lang="ko-KR" altLang="en-US" dirty="0">
+              <a:latin typeface="ADLaM Display" panose="02010000000000000000" pitchFamily="2" charset="0"/>
+              <a:cs typeface="ADLaM Display" panose="02010000000000000000" pitchFamily="2" charset="0"/>
+            </a:endParaRPr>
+          </a:p>
+        </p:txBody>
+      </p:sp>
+      <p:pic>
+        <p:nvPicPr>
+          <p:cNvPr id="5" name="그림 4" descr="텍스트, 번호, 스크린샷, 폰트이(가) 표시된 사진&#10;&#10;자동 생성된 설명">
+            <a:extLst>
+              <a:ext uri="{FF2B5EF4-FFF2-40B4-BE49-F238E27FC236}">
+                <a16:creationId xmlns:a16="http://schemas.microsoft.com/office/drawing/2014/main" id="{C3D899A6-BF7D-51D1-DB2E-B5EA03CC3B4F}"/>
+              </a:ext>
+            </a:extLst>
+          </p:cNvPr>
+          <p:cNvPicPr>
+            <a:picLocks noChangeAspect="1"/>
+          </p:cNvPicPr>
+          <p:nvPr/>
+        </p:nvPicPr>
+        <p:blipFill>
+          <a:blip r:embed="rId2">
+            <a:extLst>
+              <a:ext uri="{28A0092B-C50C-407E-A947-70E740481C1C}">
+                <a14:useLocalDpi xmlns:a14="http://schemas.microsoft.com/office/drawing/2010/main" val="0"/>
+              </a:ext>
+            </a:extLst>
+          </a:blip>
+          <a:stretch>
+            <a:fillRect/>
+          </a:stretch>
+        </p:blipFill>
+        <p:spPr>
+          <a:xfrm>
+            <a:off x="5496717" y="2299010"/>
+            <a:ext cx="6083998" cy="3409064"/>
+          </a:xfrm>
+          <a:prstGeom prst="rect">
+            <a:avLst/>
+          </a:prstGeom>
+        </p:spPr>
+      </p:pic>
+    </p:spTree>
+    <p:extLst>
+      <p:ext uri="{BB962C8B-B14F-4D97-AF65-F5344CB8AC3E}">
+        <p14:creationId xmlns:p14="http://schemas.microsoft.com/office/powerpoint/2010/main" val="955460939"/>
+      </p:ext>
+    </p:extLst>
+  </p:cSld>
+  <p:clrMapOvr>
+    <a:masterClrMapping/>
+  </p:clrMapOvr>
+</p:sld>
+</file>
+
+<file path=ppt/slides/slide11.xml><?xml version="1.0" encoding="utf-8"?>
+<p:sld xmlns:a="http://schemas.openxmlformats.org/drawingml/2006/main" xmlns:r="http://schemas.openxmlformats.org/officeDocument/2006/relationships" xmlns:p="http://schemas.openxmlformats.org/presentationml/2006/main">
+  <p:cSld>
+    <p:spTree>
+      <p:nvGrpSpPr>
+        <p:cNvPr id="1" name="">
+          <a:extLst>
+            <a:ext uri="{FF2B5EF4-FFF2-40B4-BE49-F238E27FC236}">
+              <a16:creationId xmlns:a16="http://schemas.microsoft.com/office/drawing/2014/main" id="{FDD00765-D532-05FD-8BF8-ADC8247AF434}"/>
+            </a:ext>
+          </a:extLst>
+        </p:cNvPr>
+        <p:cNvGrpSpPr/>
+        <p:nvPr/>
+      </p:nvGrpSpPr>
+      <p:grpSpPr>
+        <a:xfrm>
+          <a:off x="0" y="0"/>
+          <a:ext cx="0" cy="0"/>
+          <a:chOff x="0" y="0"/>
+          <a:chExt cx="0" cy="0"/>
+        </a:xfrm>
+      </p:grpSpPr>
+      <p:sp>
+        <p:nvSpPr>
+          <p:cNvPr id="4" name="TextBox 3">
+            <a:extLst>
+              <a:ext uri="{FF2B5EF4-FFF2-40B4-BE49-F238E27FC236}">
+                <a16:creationId xmlns:a16="http://schemas.microsoft.com/office/drawing/2014/main" id="{9A6BE9B0-8BF5-A97B-411A-22169EE6B275}"/>
+              </a:ext>
+            </a:extLst>
+          </p:cNvPr>
+          <p:cNvSpPr txBox="1"/>
+          <p:nvPr/>
+        </p:nvSpPr>
+        <p:spPr>
+          <a:xfrm>
+            <a:off x="166255" y="175491"/>
+            <a:ext cx="11859490" cy="1501950"/>
+          </a:xfrm>
+          <a:prstGeom prst="rect">
+            <a:avLst/>
+          </a:prstGeom>
+          <a:noFill/>
+        </p:spPr>
+        <p:txBody>
+          <a:bodyPr wrap="square" rtlCol="0">
+            <a:spAutoFit/>
+          </a:bodyPr>
+          <a:lstStyle/>
+          <a:p>
+            <a:pPr marL="0" marR="0" indent="0" algn="just" fontAlgn="base" latinLnBrk="1">
+              <a:lnSpc>
+                <a:spcPct val="160000"/>
+              </a:lnSpc>
+              <a:spcBef>
+                <a:spcPts val="0"/>
+              </a:spcBef>
+              <a:spcAft>
+                <a:spcPts val="0"/>
+              </a:spcAft>
+            </a:pPr>
+            <a:r>
+              <a:rPr lang="en-US" altLang="ko-KR" sz="2800" b="1" kern="0" spc="0" dirty="0">
+                <a:solidFill>
+                  <a:srgbClr val="000000"/>
+                </a:solidFill>
+                <a:effectLst/>
+                <a:latin typeface="ADLaM Display" panose="02010000000000000000" pitchFamily="2" charset="0"/>
+                <a:ea typeface="ADLaM Display" panose="02010000000000000000" pitchFamily="2" charset="0"/>
+                <a:cs typeface="ADLaM Display" panose="02010000000000000000" pitchFamily="2" charset="0"/>
+              </a:rPr>
+              <a:t>Firebase </a:t>
+            </a:r>
+            <a:r>
+              <a:rPr lang="ko-KR" altLang="en-US" sz="2800" b="1" kern="0" spc="0" dirty="0">
+                <a:solidFill>
+                  <a:srgbClr val="000000"/>
+                </a:solidFill>
+                <a:effectLst/>
+                <a:latin typeface="ADLaM Display" panose="02010000000000000000" pitchFamily="2" charset="0"/>
+                <a:ea typeface="함초롬바탕" panose="02030604000101010101" pitchFamily="18" charset="-127"/>
+                <a:cs typeface="ADLaM Display" panose="02010000000000000000" pitchFamily="2" charset="0"/>
+              </a:rPr>
+              <a:t>앱 로그 기반 데이터 분석 </a:t>
+            </a:r>
+            <a:endParaRPr lang="en-US" altLang="ko-KR" sz="2800" b="1" kern="0" spc="0" dirty="0">
+              <a:solidFill>
+                <a:srgbClr val="000000"/>
+              </a:solidFill>
+              <a:effectLst/>
+              <a:latin typeface="ADLaM Display" panose="02010000000000000000" pitchFamily="2" charset="0"/>
+              <a:ea typeface="ADLaM Display" panose="02010000000000000000" pitchFamily="2" charset="0"/>
+              <a:cs typeface="ADLaM Display" panose="02010000000000000000" pitchFamily="2" charset="0"/>
+            </a:endParaRPr>
+          </a:p>
+          <a:p>
+            <a:pPr algn="just" fontAlgn="base">
+              <a:lnSpc>
+                <a:spcPct val="160000"/>
+              </a:lnSpc>
+            </a:pPr>
+            <a:r>
+              <a:rPr lang="en-US" altLang="ko-KR" sz="1800" kern="0" spc="0" dirty="0">
+                <a:solidFill>
+                  <a:srgbClr val="000000"/>
+                </a:solidFill>
+                <a:effectLst/>
+                <a:latin typeface="ADLaM Display" panose="02010000000000000000" pitchFamily="2" charset="0"/>
+                <a:ea typeface="ADLaM Display" panose="02010000000000000000" pitchFamily="2" charset="0"/>
+                <a:cs typeface="ADLaM Display" panose="02010000000000000000" pitchFamily="2" charset="0"/>
+              </a:rPr>
+              <a:t>&lt;3. </a:t>
+            </a:r>
+            <a:r>
+              <a:rPr lang="ko-KR" altLang="en-US" sz="1800" kern="0" spc="0" dirty="0">
+                <a:solidFill>
+                  <a:srgbClr val="000000"/>
+                </a:solidFill>
+                <a:effectLst/>
+                <a:latin typeface="ADLaM Display" panose="02010000000000000000" pitchFamily="2" charset="0"/>
+                <a:cs typeface="ADLaM Display" panose="02010000000000000000" pitchFamily="2" charset="0"/>
+              </a:rPr>
+              <a:t>코호트 </a:t>
+            </a:r>
+            <a:r>
+              <a:rPr lang="ko-KR" altLang="en-US" sz="1800" kern="0" spc="0" dirty="0" err="1">
+                <a:solidFill>
+                  <a:srgbClr val="000000"/>
+                </a:solidFill>
+                <a:effectLst/>
+                <a:latin typeface="ADLaM Display" panose="02010000000000000000" pitchFamily="2" charset="0"/>
+                <a:cs typeface="ADLaM Display" panose="02010000000000000000" pitchFamily="2" charset="0"/>
+              </a:rPr>
+              <a:t>리텐션</a:t>
+            </a:r>
+            <a:r>
+              <a:rPr lang="ko-KR" altLang="en-US" sz="1800" kern="0" spc="0" dirty="0">
+                <a:solidFill>
+                  <a:srgbClr val="000000"/>
+                </a:solidFill>
+                <a:effectLst/>
+                <a:latin typeface="ADLaM Display" panose="02010000000000000000" pitchFamily="2" charset="0"/>
+                <a:cs typeface="ADLaM Display" panose="02010000000000000000" pitchFamily="2" charset="0"/>
+              </a:rPr>
+              <a:t> 쿼리</a:t>
+            </a:r>
+            <a:r>
+              <a:rPr lang="en-US" altLang="ko-KR" kern="0" dirty="0">
+                <a:solidFill>
+                  <a:srgbClr val="000000"/>
+                </a:solidFill>
+                <a:latin typeface="ADLaM Display" panose="02010000000000000000" pitchFamily="2" charset="0"/>
+                <a:ea typeface="ADLaM Display" panose="02010000000000000000" pitchFamily="2" charset="0"/>
+                <a:cs typeface="ADLaM Display" panose="02010000000000000000" pitchFamily="2" charset="0"/>
+              </a:rPr>
+              <a:t>&gt;</a:t>
+            </a:r>
+            <a:endParaRPr lang="en-US" altLang="ko-KR" sz="1800" kern="0" spc="0" dirty="0">
+              <a:solidFill>
+                <a:srgbClr val="000000"/>
+              </a:solidFill>
+              <a:effectLst/>
+              <a:latin typeface="ADLaM Display" panose="02010000000000000000" pitchFamily="2" charset="0"/>
+              <a:ea typeface="ADLaM Display" panose="02010000000000000000" pitchFamily="2" charset="0"/>
+              <a:cs typeface="ADLaM Display" panose="02010000000000000000" pitchFamily="2" charset="0"/>
+            </a:endParaRPr>
+          </a:p>
+          <a:p>
+            <a:endParaRPr lang="ko-KR" altLang="en-US" dirty="0">
+              <a:latin typeface="ADLaM Display" panose="02010000000000000000" pitchFamily="2" charset="0"/>
+              <a:cs typeface="ADLaM Display" panose="02010000000000000000" pitchFamily="2" charset="0"/>
+            </a:endParaRPr>
+          </a:p>
+        </p:txBody>
+      </p:sp>
+      <p:pic>
+        <p:nvPicPr>
+          <p:cNvPr id="3" name="그림 2" descr="텍스트, 스크린샷, 폰트이(가) 표시된 사진&#10;&#10;자동 생성된 설명">
+            <a:extLst>
+              <a:ext uri="{FF2B5EF4-FFF2-40B4-BE49-F238E27FC236}">
+                <a16:creationId xmlns:a16="http://schemas.microsoft.com/office/drawing/2014/main" id="{BA868961-E75F-09E6-C328-E0FDEB347FE3}"/>
+              </a:ext>
+            </a:extLst>
+          </p:cNvPr>
+          <p:cNvPicPr>
+            <a:picLocks noChangeAspect="1"/>
+          </p:cNvPicPr>
+          <p:nvPr/>
+        </p:nvPicPr>
+        <p:blipFill>
+          <a:blip r:embed="rId2">
+            <a:extLst>
+              <a:ext uri="{28A0092B-C50C-407E-A947-70E740481C1C}">
+                <a14:useLocalDpi xmlns:a14="http://schemas.microsoft.com/office/drawing/2010/main" val="0"/>
+              </a:ext>
+            </a:extLst>
+          </a:blip>
+          <a:stretch>
+            <a:fillRect/>
+          </a:stretch>
+        </p:blipFill>
+        <p:spPr>
+          <a:xfrm>
+            <a:off x="5834551" y="635000"/>
+            <a:ext cx="5673019" cy="5588000"/>
+          </a:xfrm>
+          <a:prstGeom prst="rect">
+            <a:avLst/>
+          </a:prstGeom>
+        </p:spPr>
+      </p:pic>
+    </p:spTree>
+    <p:extLst>
+      <p:ext uri="{BB962C8B-B14F-4D97-AF65-F5344CB8AC3E}">
+        <p14:creationId xmlns:p14="http://schemas.microsoft.com/office/powerpoint/2010/main" val="4242580843"/>
+      </p:ext>
+    </p:extLst>
+  </p:cSld>
+  <p:clrMapOvr>
+    <a:masterClrMapping/>
+  </p:clrMapOvr>
+</p:sld>
+</file>
+
+<file path=ppt/slides/slide12.xml><?xml version="1.0" encoding="utf-8"?>
+<p:sld xmlns:a="http://schemas.openxmlformats.org/drawingml/2006/main" xmlns:r="http://schemas.openxmlformats.org/officeDocument/2006/relationships" xmlns:p="http://schemas.openxmlformats.org/presentationml/2006/main">
+  <p:cSld>
+    <p:spTree>
+      <p:nvGrpSpPr>
+        <p:cNvPr id="1" name="">
+          <a:extLst>
+            <a:ext uri="{FF2B5EF4-FFF2-40B4-BE49-F238E27FC236}">
+              <a16:creationId xmlns:a16="http://schemas.microsoft.com/office/drawing/2014/main" id="{E78FDB4B-450B-B7DC-C630-9D45BCC71981}"/>
+            </a:ext>
+          </a:extLst>
+        </p:cNvPr>
+        <p:cNvGrpSpPr/>
+        <p:nvPr/>
+      </p:nvGrpSpPr>
+      <p:grpSpPr>
+        <a:xfrm>
+          <a:off x="0" y="0"/>
+          <a:ext cx="0" cy="0"/>
+          <a:chOff x="0" y="0"/>
+          <a:chExt cx="0" cy="0"/>
+        </a:xfrm>
+      </p:grpSpPr>
+      <p:sp>
+        <p:nvSpPr>
+          <p:cNvPr id="4" name="TextBox 3">
+            <a:extLst>
+              <a:ext uri="{FF2B5EF4-FFF2-40B4-BE49-F238E27FC236}">
+                <a16:creationId xmlns:a16="http://schemas.microsoft.com/office/drawing/2014/main" id="{5F82A067-3513-7D7A-B70B-A8877DA9BCDF}"/>
               </a:ext>
             </a:extLst>
           </p:cNvPr>
@@ -3693,7 +4405,7 @@
                 <a:ea typeface="ADLaM Display" panose="02010000000000000000" pitchFamily="2" charset="0"/>
                 <a:cs typeface="ADLaM Display" panose="02010000000000000000" pitchFamily="2" charset="0"/>
               </a:rPr>
-              <a:t>&lt;</a:t>
+              <a:t>&lt;3. </a:t>
             </a:r>
             <a:r>
               <a:rPr lang="ko-KR" altLang="en-US" sz="1800" kern="0" spc="0" dirty="0">
@@ -3716,6 +4428,17 @@
                 <a:cs typeface="ADLaM Display" panose="02010000000000000000" pitchFamily="2" charset="0"/>
               </a:rPr>
               <a:t>리텐션</a:t>
+            </a:r>
+            <a:r>
+              <a:rPr lang="ko-KR" altLang="en-US" sz="1800" kern="0" spc="0" dirty="0">
+                <a:solidFill>
+                  <a:srgbClr val="000000"/>
+                </a:solidFill>
+                <a:effectLst/>
+                <a:latin typeface="ADLaM Display" panose="02010000000000000000" pitchFamily="2" charset="0"/>
+                <a:cs typeface="ADLaM Display" panose="02010000000000000000" pitchFamily="2" charset="0"/>
+              </a:rPr>
+              <a:t> 시각화</a:t>
             </a:r>
             <a:r>
               <a:rPr lang="en-US" altLang="ko-KR" kern="0" dirty="0">
@@ -3743,7 +4466,351 @@
                 <a:spcPct val="160000"/>
               </a:lnSpc>
             </a:pPr>
-            <a:endParaRPr lang="en-US" altLang="ko-KR" dirty="0"/>
+            <a:endParaRPr lang="en-US" altLang="ko-KR" dirty="0">
+              <a:latin typeface="ADLaM Display" panose="02010000000000000000" pitchFamily="2" charset="0"/>
+              <a:ea typeface="ADLaM Display" panose="02010000000000000000" pitchFamily="2" charset="0"/>
+              <a:cs typeface="ADLaM Display" panose="02010000000000000000" pitchFamily="2" charset="0"/>
+            </a:endParaRPr>
+          </a:p>
+        </p:txBody>
+      </p:sp>
+      <p:pic>
+        <p:nvPicPr>
+          <p:cNvPr id="3" name="그림 2" descr="텍스트, 도표, 라인, 그래프이(가) 표시된 사진&#10;&#10;자동 생성된 설명">
+            <a:extLst>
+              <a:ext uri="{FF2B5EF4-FFF2-40B4-BE49-F238E27FC236}">
+                <a16:creationId xmlns:a16="http://schemas.microsoft.com/office/drawing/2014/main" id="{F85D2529-DBFE-89D0-DD7A-A9C131C91504}"/>
+              </a:ext>
+            </a:extLst>
+          </p:cNvPr>
+          <p:cNvPicPr>
+            <a:picLocks noChangeAspect="1"/>
+          </p:cNvPicPr>
+          <p:nvPr/>
+        </p:nvPicPr>
+        <p:blipFill>
+          <a:blip r:embed="rId2">
+            <a:extLst>
+              <a:ext uri="{28A0092B-C50C-407E-A947-70E740481C1C}">
+                <a14:useLocalDpi xmlns:a14="http://schemas.microsoft.com/office/drawing/2010/main" val="0"/>
+              </a:ext>
+            </a:extLst>
+          </a:blip>
+          <a:stretch>
+            <a:fillRect/>
+          </a:stretch>
+        </p:blipFill>
+        <p:spPr>
+          <a:xfrm>
+            <a:off x="241878" y="1869143"/>
+            <a:ext cx="10027482" cy="2915293"/>
+          </a:xfrm>
+          <a:prstGeom prst="rect">
+            <a:avLst/>
+          </a:prstGeom>
+        </p:spPr>
+      </p:pic>
+      <p:sp>
+        <p:nvSpPr>
+          <p:cNvPr id="6" name="TextBox 5">
+            <a:extLst>
+              <a:ext uri="{FF2B5EF4-FFF2-40B4-BE49-F238E27FC236}">
+                <a16:creationId xmlns:a16="http://schemas.microsoft.com/office/drawing/2014/main" id="{ED6AFD43-3649-A3E9-9C7E-78221197F73E}"/>
+              </a:ext>
+            </a:extLst>
+          </p:cNvPr>
+          <p:cNvSpPr txBox="1"/>
+          <p:nvPr/>
+        </p:nvSpPr>
+        <p:spPr>
+          <a:xfrm>
+            <a:off x="7914088" y="2921168"/>
+            <a:ext cx="3980872" cy="1015663"/>
+          </a:xfrm>
+          <a:prstGeom prst="rect">
+            <a:avLst/>
+          </a:prstGeom>
+          <a:noFill/>
+        </p:spPr>
+        <p:txBody>
+          <a:bodyPr wrap="square" rtlCol="0">
+            <a:spAutoFit/>
+          </a:bodyPr>
+          <a:lstStyle/>
+          <a:p>
+            <a:r>
+              <a:rPr lang="ko-KR" altLang="en-US" sz="1200" dirty="0">
+                <a:latin typeface="ADLaM Display" panose="02010000000000000000" pitchFamily="2" charset="0"/>
+                <a:cs typeface="ADLaM Display" panose="02010000000000000000" pitchFamily="2" charset="0"/>
+              </a:rPr>
+              <a:t>비율 지표 특성상 분자와 분모의 수가 얼마나 되는지도 참고 가능</a:t>
+            </a:r>
+            <a:endParaRPr lang="en-US" altLang="ko-KR" sz="1200" dirty="0">
+              <a:latin typeface="ADLaM Display" panose="02010000000000000000" pitchFamily="2" charset="0"/>
+              <a:ea typeface="ADLaM Display" panose="02010000000000000000" pitchFamily="2" charset="0"/>
+              <a:cs typeface="ADLaM Display" panose="02010000000000000000" pitchFamily="2" charset="0"/>
+            </a:endParaRPr>
+          </a:p>
+          <a:p>
+            <a:endParaRPr lang="en-US" altLang="ko-KR" sz="1200" dirty="0">
+              <a:latin typeface="ADLaM Display" panose="02010000000000000000" pitchFamily="2" charset="0"/>
+              <a:ea typeface="ADLaM Display" panose="02010000000000000000" pitchFamily="2" charset="0"/>
+              <a:cs typeface="ADLaM Display" panose="02010000000000000000" pitchFamily="2" charset="0"/>
+            </a:endParaRPr>
+          </a:p>
+          <a:p>
+            <a:r>
+              <a:rPr lang="ko-KR" altLang="en-US" sz="1200" dirty="0">
+                <a:latin typeface="ADLaM Display" panose="02010000000000000000" pitchFamily="2" charset="0"/>
+                <a:cs typeface="ADLaM Display" panose="02010000000000000000" pitchFamily="2" charset="0"/>
+              </a:rPr>
+              <a:t>비율과 숫자를 모두 보며 파악하기 </a:t>
+            </a:r>
+            <a:r>
+              <a:rPr lang="en-US" altLang="ko-KR" sz="1200" dirty="0">
+                <a:latin typeface="ADLaM Display" panose="02010000000000000000" pitchFamily="2" charset="0"/>
+                <a:ea typeface="ADLaM Display" panose="02010000000000000000" pitchFamily="2" charset="0"/>
+                <a:cs typeface="ADLaM Display" panose="02010000000000000000" pitchFamily="2" charset="0"/>
+              </a:rPr>
+              <a:t>=&gt; </a:t>
+            </a:r>
+            <a:r>
+              <a:rPr lang="ko-KR" altLang="en-US" sz="1200" dirty="0">
+                <a:latin typeface="ADLaM Display" panose="02010000000000000000" pitchFamily="2" charset="0"/>
+                <a:cs typeface="ADLaM Display" panose="02010000000000000000" pitchFamily="2" charset="0"/>
+              </a:rPr>
+              <a:t>너무 작은 데이터인 경우 비율이 높게 나올 수 있음 주의</a:t>
+            </a:r>
+          </a:p>
+        </p:txBody>
+      </p:sp>
+      <p:pic>
+        <p:nvPicPr>
+          <p:cNvPr id="8" name="그림 7" descr="텍스트, 도표, 그래프, 라인이(가) 표시된 사진&#10;&#10;자동 생성된 설명">
+            <a:extLst>
+              <a:ext uri="{FF2B5EF4-FFF2-40B4-BE49-F238E27FC236}">
+                <a16:creationId xmlns:a16="http://schemas.microsoft.com/office/drawing/2014/main" id="{078DFDDF-28D1-FEDE-DE3C-4662E5B293FF}"/>
+              </a:ext>
+            </a:extLst>
+          </p:cNvPr>
+          <p:cNvPicPr>
+            <a:picLocks noChangeAspect="1"/>
+          </p:cNvPicPr>
+          <p:nvPr/>
+        </p:nvPicPr>
+        <p:blipFill>
+          <a:blip r:embed="rId3">
+            <a:extLst>
+              <a:ext uri="{28A0092B-C50C-407E-A947-70E740481C1C}">
+                <a14:useLocalDpi xmlns:a14="http://schemas.microsoft.com/office/drawing/2010/main" val="0"/>
+              </a:ext>
+            </a:extLst>
+          </a:blip>
+          <a:stretch>
+            <a:fillRect/>
+          </a:stretch>
+        </p:blipFill>
+        <p:spPr>
+          <a:xfrm>
+            <a:off x="3352801" y="4187196"/>
+            <a:ext cx="8746836" cy="2521943"/>
+          </a:xfrm>
+          <a:prstGeom prst="rect">
+            <a:avLst/>
+          </a:prstGeom>
+        </p:spPr>
+      </p:pic>
+    </p:spTree>
+    <p:extLst>
+      <p:ext uri="{BB962C8B-B14F-4D97-AF65-F5344CB8AC3E}">
+        <p14:creationId xmlns:p14="http://schemas.microsoft.com/office/powerpoint/2010/main" val="3351374284"/>
+      </p:ext>
+    </p:extLst>
+  </p:cSld>
+  <p:clrMapOvr>
+    <a:masterClrMapping/>
+  </p:clrMapOvr>
+</p:sld>
+</file>
+
+<file path=ppt/slides/slide13.xml><?xml version="1.0" encoding="utf-8"?>
+<p:sld xmlns:a="http://schemas.openxmlformats.org/drawingml/2006/main" xmlns:r="http://schemas.openxmlformats.org/officeDocument/2006/relationships" xmlns:p="http://schemas.openxmlformats.org/presentationml/2006/main">
+  <p:cSld>
+    <p:spTree>
+      <p:nvGrpSpPr>
+        <p:cNvPr id="1" name="">
+          <a:extLst>
+            <a:ext uri="{FF2B5EF4-FFF2-40B4-BE49-F238E27FC236}">
+              <a16:creationId xmlns:a16="http://schemas.microsoft.com/office/drawing/2014/main" id="{A8739178-6B4E-11D7-4FB9-94F0D0381FF2}"/>
+            </a:ext>
+          </a:extLst>
+        </p:cNvPr>
+        <p:cNvGrpSpPr/>
+        <p:nvPr/>
+      </p:nvGrpSpPr>
+      <p:grpSpPr>
+        <a:xfrm>
+          <a:off x="0" y="0"/>
+          <a:ext cx="0" cy="0"/>
+          <a:chOff x="0" y="0"/>
+          <a:chExt cx="0" cy="0"/>
+        </a:xfrm>
+      </p:grpSpPr>
+      <p:sp>
+        <p:nvSpPr>
+          <p:cNvPr id="4" name="TextBox 3">
+            <a:extLst>
+              <a:ext uri="{FF2B5EF4-FFF2-40B4-BE49-F238E27FC236}">
+                <a16:creationId xmlns:a16="http://schemas.microsoft.com/office/drawing/2014/main" id="{12CF8579-930F-094C-004F-0F350073AF7B}"/>
+              </a:ext>
+            </a:extLst>
+          </p:cNvPr>
+          <p:cNvSpPr txBox="1"/>
+          <p:nvPr/>
+        </p:nvSpPr>
+        <p:spPr>
+          <a:xfrm>
+            <a:off x="166255" y="175491"/>
+            <a:ext cx="10603345" cy="1607684"/>
+          </a:xfrm>
+          <a:prstGeom prst="rect">
+            <a:avLst/>
+          </a:prstGeom>
+          <a:noFill/>
+        </p:spPr>
+        <p:txBody>
+          <a:bodyPr wrap="square" rtlCol="0">
+            <a:spAutoFit/>
+          </a:bodyPr>
+          <a:lstStyle/>
+          <a:p>
+            <a:pPr marL="0" marR="0" indent="0" algn="just" fontAlgn="base" latinLnBrk="1">
+              <a:lnSpc>
+                <a:spcPct val="160000"/>
+              </a:lnSpc>
+              <a:spcBef>
+                <a:spcPts val="0"/>
+              </a:spcBef>
+              <a:spcAft>
+                <a:spcPts val="0"/>
+              </a:spcAft>
+            </a:pPr>
+            <a:r>
+              <a:rPr lang="en-US" altLang="ko-KR" sz="2800" b="1" kern="0" spc="0" dirty="0">
+                <a:solidFill>
+                  <a:srgbClr val="000000"/>
+                </a:solidFill>
+                <a:effectLst/>
+                <a:latin typeface="ADLaM Display" panose="02010000000000000000" pitchFamily="2" charset="0"/>
+                <a:ea typeface="ADLaM Display" panose="02010000000000000000" pitchFamily="2" charset="0"/>
+                <a:cs typeface="ADLaM Display" panose="02010000000000000000" pitchFamily="2" charset="0"/>
+              </a:rPr>
+              <a:t>Firebase </a:t>
+            </a:r>
+            <a:r>
+              <a:rPr lang="ko-KR" altLang="en-US" sz="2800" b="1" kern="0" spc="0" dirty="0">
+                <a:solidFill>
+                  <a:srgbClr val="000000"/>
+                </a:solidFill>
+                <a:effectLst/>
+                <a:latin typeface="ADLaM Display" panose="02010000000000000000" pitchFamily="2" charset="0"/>
+                <a:ea typeface="함초롬바탕" panose="02030604000101010101" pitchFamily="18" charset="-127"/>
+                <a:cs typeface="ADLaM Display" panose="02010000000000000000" pitchFamily="2" charset="0"/>
+              </a:rPr>
+              <a:t>앱 로그 기반 데이터 분석 </a:t>
+            </a:r>
+            <a:endParaRPr lang="en-US" altLang="ko-KR" sz="2800" b="1" kern="0" spc="0" dirty="0">
+              <a:solidFill>
+                <a:srgbClr val="000000"/>
+              </a:solidFill>
+              <a:effectLst/>
+              <a:latin typeface="ADLaM Display" panose="02010000000000000000" pitchFamily="2" charset="0"/>
+              <a:ea typeface="ADLaM Display" panose="02010000000000000000" pitchFamily="2" charset="0"/>
+              <a:cs typeface="ADLaM Display" panose="02010000000000000000" pitchFamily="2" charset="0"/>
+            </a:endParaRPr>
+          </a:p>
+          <a:p>
+            <a:pPr algn="just" fontAlgn="base">
+              <a:lnSpc>
+                <a:spcPct val="160000"/>
+              </a:lnSpc>
+            </a:pPr>
+            <a:r>
+              <a:rPr lang="en-US" altLang="ko-KR" sz="1800" kern="0" spc="0" dirty="0">
+                <a:solidFill>
+                  <a:srgbClr val="000000"/>
+                </a:solidFill>
+                <a:effectLst/>
+                <a:latin typeface="ADLaM Display" panose="02010000000000000000" pitchFamily="2" charset="0"/>
+                <a:ea typeface="ADLaM Display" panose="02010000000000000000" pitchFamily="2" charset="0"/>
+                <a:cs typeface="ADLaM Display" panose="02010000000000000000" pitchFamily="2" charset="0"/>
+              </a:rPr>
+              <a:t>&lt;3. </a:t>
+            </a:r>
+            <a:r>
+              <a:rPr lang="ko-KR" altLang="en-US" sz="1800" kern="0" spc="0" dirty="0">
+                <a:solidFill>
+                  <a:srgbClr val="000000"/>
+                </a:solidFill>
+                <a:effectLst/>
+                <a:latin typeface="ADLaM Display" panose="02010000000000000000" pitchFamily="2" charset="0"/>
+                <a:cs typeface="ADLaM Display" panose="02010000000000000000" pitchFamily="2" charset="0"/>
+              </a:rPr>
+              <a:t>코호트 </a:t>
+            </a:r>
+            <a:r>
+              <a:rPr lang="ko-KR" altLang="en-US" sz="1800" kern="0" spc="0" dirty="0" err="1">
+                <a:solidFill>
+                  <a:srgbClr val="000000"/>
+                </a:solidFill>
+                <a:effectLst/>
+                <a:latin typeface="ADLaM Display" panose="02010000000000000000" pitchFamily="2" charset="0"/>
+                <a:cs typeface="ADLaM Display" panose="02010000000000000000" pitchFamily="2" charset="0"/>
+              </a:rPr>
+              <a:t>리텐션</a:t>
+            </a:r>
+            <a:r>
+              <a:rPr lang="ko-KR" altLang="en-US" sz="1800" kern="0" spc="0" dirty="0">
+                <a:solidFill>
+                  <a:srgbClr val="000000"/>
+                </a:solidFill>
+                <a:effectLst/>
+                <a:latin typeface="ADLaM Display" panose="02010000000000000000" pitchFamily="2" charset="0"/>
+                <a:cs typeface="ADLaM Display" panose="02010000000000000000" pitchFamily="2" charset="0"/>
+              </a:rPr>
+              <a:t> 해석</a:t>
+            </a:r>
+            <a:r>
+              <a:rPr lang="en-US" altLang="ko-KR" kern="0" dirty="0">
+                <a:solidFill>
+                  <a:srgbClr val="000000"/>
+                </a:solidFill>
+                <a:latin typeface="ADLaM Display" panose="02010000000000000000" pitchFamily="2" charset="0"/>
+                <a:ea typeface="ADLaM Display" panose="02010000000000000000" pitchFamily="2" charset="0"/>
+                <a:cs typeface="ADLaM Display" panose="02010000000000000000" pitchFamily="2" charset="0"/>
+              </a:rPr>
+              <a:t>&gt;</a:t>
+            </a:r>
+            <a:endParaRPr lang="ko-KR" altLang="en-US" sz="1800" kern="0" spc="0" dirty="0">
+              <a:solidFill>
+                <a:srgbClr val="000000"/>
+              </a:solidFill>
+              <a:effectLst/>
+              <a:latin typeface="ADLaM Display" panose="02010000000000000000" pitchFamily="2" charset="0"/>
+              <a:cs typeface="ADLaM Display" panose="02010000000000000000" pitchFamily="2" charset="0"/>
+            </a:endParaRPr>
+          </a:p>
+          <a:p>
+            <a:pPr algn="just" fontAlgn="base">
+              <a:lnSpc>
+                <a:spcPct val="160000"/>
+              </a:lnSpc>
+            </a:pPr>
+            <a:endParaRPr lang="en-US" altLang="ko-KR" dirty="0">
+              <a:latin typeface="ADLaM Display" panose="02010000000000000000" pitchFamily="2" charset="0"/>
+              <a:ea typeface="ADLaM Display" panose="02010000000000000000" pitchFamily="2" charset="0"/>
+              <a:cs typeface="ADLaM Display" panose="02010000000000000000" pitchFamily="2" charset="0"/>
+            </a:endParaRPr>
           </a:p>
         </p:txBody>
       </p:sp>
@@ -3841,6 +4908,7 @@
           <a:p>
             <a:endParaRPr lang="en-US" altLang="ko-KR" sz="1400" dirty="0">
               <a:latin typeface="ADLaM Display" panose="02010000000000000000" pitchFamily="2" charset="0"/>
+              <a:ea typeface="ADLaM Display" panose="02010000000000000000" pitchFamily="2" charset="0"/>
               <a:cs typeface="ADLaM Display" panose="02010000000000000000" pitchFamily="2" charset="0"/>
             </a:endParaRPr>
           </a:p>
@@ -3848,6 +4916,7 @@
             <a:r>
               <a:rPr lang="en-US" altLang="ko-KR" sz="1400" dirty="0">
                 <a:latin typeface="ADLaM Display" panose="02010000000000000000" pitchFamily="2" charset="0"/>
+                <a:ea typeface="ADLaM Display" panose="02010000000000000000" pitchFamily="2" charset="0"/>
                 <a:cs typeface="ADLaM Display" panose="02010000000000000000" pitchFamily="2" charset="0"/>
               </a:rPr>
               <a:t>- </a:t>
@@ -3902,6 +4971,7 @@
             <a:r>
               <a:rPr lang="en-US" altLang="ko-KR" sz="1400" dirty="0">
                 <a:latin typeface="ADLaM Display" panose="02010000000000000000" pitchFamily="2" charset="0"/>
+                <a:ea typeface="ADLaM Display" panose="02010000000000000000" pitchFamily="2" charset="0"/>
                 <a:cs typeface="ADLaM Display" panose="02010000000000000000" pitchFamily="2" charset="0"/>
               </a:rPr>
               <a:t>- </a:t>
@@ -4012,6 +5082,7 @@
           <a:p>
             <a:endParaRPr lang="en-US" altLang="ko-KR" sz="1400" dirty="0">
               <a:latin typeface="ADLaM Display" panose="02010000000000000000" pitchFamily="2" charset="0"/>
+              <a:ea typeface="ADLaM Display" panose="02010000000000000000" pitchFamily="2" charset="0"/>
               <a:cs typeface="ADLaM Display" panose="02010000000000000000" pitchFamily="2" charset="0"/>
             </a:endParaRPr>
           </a:p>
@@ -4019,6 +5090,7 @@
             <a:r>
               <a:rPr lang="en-US" altLang="ko-KR" sz="1400" dirty="0">
                 <a:latin typeface="ADLaM Display" panose="02010000000000000000" pitchFamily="2" charset="0"/>
+                <a:ea typeface="ADLaM Display" panose="02010000000000000000" pitchFamily="2" charset="0"/>
                 <a:cs typeface="ADLaM Display" panose="02010000000000000000" pitchFamily="2" charset="0"/>
               </a:rPr>
               <a:t>-</a:t>
@@ -4096,6 +5168,3714 @@
     <p:extLst>
       <p:ext uri="{BB962C8B-B14F-4D97-AF65-F5344CB8AC3E}">
         <p14:creationId xmlns:p14="http://schemas.microsoft.com/office/powerpoint/2010/main" val="2403742413"/>
+      </p:ext>
+    </p:extLst>
+  </p:cSld>
+  <p:clrMapOvr>
+    <a:masterClrMapping/>
+  </p:clrMapOvr>
+</p:sld>
+</file>
+
+<file path=ppt/slides/slide14.xml><?xml version="1.0" encoding="utf-8"?>
+<p:sld xmlns:a="http://schemas.openxmlformats.org/drawingml/2006/main" xmlns:r="http://schemas.openxmlformats.org/officeDocument/2006/relationships" xmlns:p="http://schemas.openxmlformats.org/presentationml/2006/main">
+  <p:cSld>
+    <p:spTree>
+      <p:nvGrpSpPr>
+        <p:cNvPr id="1" name="">
+          <a:extLst>
+            <a:ext uri="{FF2B5EF4-FFF2-40B4-BE49-F238E27FC236}">
+              <a16:creationId xmlns:a16="http://schemas.microsoft.com/office/drawing/2014/main" id="{2DAB6ED5-B94E-C1A4-E28D-C3AC4485AC56}"/>
+            </a:ext>
+          </a:extLst>
+        </p:cNvPr>
+        <p:cNvGrpSpPr/>
+        <p:nvPr/>
+      </p:nvGrpSpPr>
+      <p:grpSpPr>
+        <a:xfrm>
+          <a:off x="0" y="0"/>
+          <a:ext cx="0" cy="0"/>
+          <a:chOff x="0" y="0"/>
+          <a:chExt cx="0" cy="0"/>
+        </a:xfrm>
+      </p:grpSpPr>
+      <p:sp>
+        <p:nvSpPr>
+          <p:cNvPr id="4" name="TextBox 3">
+            <a:extLst>
+              <a:ext uri="{FF2B5EF4-FFF2-40B4-BE49-F238E27FC236}">
+                <a16:creationId xmlns:a16="http://schemas.microsoft.com/office/drawing/2014/main" id="{F0B76B8F-7075-6FEC-513F-5F2C0F06F48C}"/>
+              </a:ext>
+            </a:extLst>
+          </p:cNvPr>
+          <p:cNvSpPr txBox="1"/>
+          <p:nvPr/>
+        </p:nvSpPr>
+        <p:spPr>
+          <a:xfrm>
+            <a:off x="166255" y="175491"/>
+            <a:ext cx="10603345" cy="5005537"/>
+          </a:xfrm>
+          <a:prstGeom prst="rect">
+            <a:avLst/>
+          </a:prstGeom>
+          <a:noFill/>
+        </p:spPr>
+        <p:txBody>
+          <a:bodyPr wrap="square" rtlCol="0">
+            <a:spAutoFit/>
+          </a:bodyPr>
+          <a:lstStyle/>
+          <a:p>
+            <a:pPr marL="0" marR="0" indent="0" algn="just" fontAlgn="base" latinLnBrk="1">
+              <a:lnSpc>
+                <a:spcPct val="160000"/>
+              </a:lnSpc>
+              <a:spcBef>
+                <a:spcPts val="0"/>
+              </a:spcBef>
+              <a:spcAft>
+                <a:spcPts val="0"/>
+              </a:spcAft>
+            </a:pPr>
+            <a:r>
+              <a:rPr lang="en-US" altLang="ko-KR" sz="2800" b="1" kern="0" spc="0" dirty="0">
+                <a:solidFill>
+                  <a:srgbClr val="000000"/>
+                </a:solidFill>
+                <a:effectLst/>
+                <a:latin typeface="ADLaM Display" panose="02010000000000000000" pitchFamily="2" charset="0"/>
+                <a:ea typeface="ADLaM Display" panose="02010000000000000000" pitchFamily="2" charset="0"/>
+                <a:cs typeface="ADLaM Display" panose="02010000000000000000" pitchFamily="2" charset="0"/>
+              </a:rPr>
+              <a:t>Firebase </a:t>
+            </a:r>
+            <a:r>
+              <a:rPr lang="ko-KR" altLang="en-US" sz="2800" b="1" kern="0" spc="0" dirty="0">
+                <a:solidFill>
+                  <a:srgbClr val="000000"/>
+                </a:solidFill>
+                <a:effectLst/>
+                <a:latin typeface="ADLaM Display" panose="02010000000000000000" pitchFamily="2" charset="0"/>
+                <a:ea typeface="함초롬바탕" panose="02030604000101010101" pitchFamily="18" charset="-127"/>
+                <a:cs typeface="ADLaM Display" panose="02010000000000000000" pitchFamily="2" charset="0"/>
+              </a:rPr>
+              <a:t>앱 로그 기반 데이터 분석 </a:t>
+            </a:r>
+            <a:endParaRPr lang="en-US" altLang="ko-KR" sz="2800" b="1" kern="0" spc="0" dirty="0">
+              <a:solidFill>
+                <a:srgbClr val="000000"/>
+              </a:solidFill>
+              <a:effectLst/>
+              <a:latin typeface="ADLaM Display" panose="02010000000000000000" pitchFamily="2" charset="0"/>
+              <a:ea typeface="ADLaM Display" panose="02010000000000000000" pitchFamily="2" charset="0"/>
+              <a:cs typeface="ADLaM Display" panose="02010000000000000000" pitchFamily="2" charset="0"/>
+            </a:endParaRPr>
+          </a:p>
+          <a:p>
+            <a:pPr algn="just" fontAlgn="base">
+              <a:lnSpc>
+                <a:spcPct val="160000"/>
+              </a:lnSpc>
+            </a:pPr>
+            <a:r>
+              <a:rPr lang="en-US" altLang="ko-KR" sz="1800" kern="0" spc="0" dirty="0">
+                <a:solidFill>
+                  <a:srgbClr val="000000"/>
+                </a:solidFill>
+                <a:effectLst/>
+                <a:latin typeface="ADLaM Display" panose="02010000000000000000" pitchFamily="2" charset="0"/>
+                <a:ea typeface="ADLaM Display" panose="02010000000000000000" pitchFamily="2" charset="0"/>
+                <a:cs typeface="ADLaM Display" panose="02010000000000000000" pitchFamily="2" charset="0"/>
+              </a:rPr>
+              <a:t>&lt;</a:t>
+            </a:r>
+            <a:r>
+              <a:rPr lang="en-US" altLang="ko-KR" kern="0" dirty="0">
+                <a:solidFill>
+                  <a:srgbClr val="000000"/>
+                </a:solidFill>
+                <a:latin typeface="ADLaM Display" panose="02010000000000000000" pitchFamily="2" charset="0"/>
+                <a:ea typeface="ADLaM Display" panose="02010000000000000000" pitchFamily="2" charset="0"/>
+                <a:cs typeface="ADLaM Display" panose="02010000000000000000" pitchFamily="2" charset="0"/>
+              </a:rPr>
+              <a:t>4</a:t>
+            </a:r>
+            <a:r>
+              <a:rPr lang="en-US" altLang="ko-KR" sz="1800" kern="0" spc="0" dirty="0">
+                <a:solidFill>
+                  <a:srgbClr val="000000"/>
+                </a:solidFill>
+                <a:effectLst/>
+                <a:latin typeface="ADLaM Display" panose="02010000000000000000" pitchFamily="2" charset="0"/>
+                <a:ea typeface="ADLaM Display" panose="02010000000000000000" pitchFamily="2" charset="0"/>
+                <a:cs typeface="ADLaM Display" panose="02010000000000000000" pitchFamily="2" charset="0"/>
+              </a:rPr>
+              <a:t>. Retain</a:t>
+            </a:r>
+            <a:r>
+              <a:rPr lang="ko-KR" altLang="en-US" sz="1800" kern="0" spc="0" dirty="0">
+                <a:solidFill>
+                  <a:srgbClr val="000000"/>
+                </a:solidFill>
+                <a:effectLst/>
+                <a:latin typeface="ADLaM Display" panose="02010000000000000000" pitchFamily="2" charset="0"/>
+                <a:ea typeface="ADLaM Display" panose="02010000000000000000" pitchFamily="2" charset="0"/>
+                <a:cs typeface="ADLaM Display" panose="02010000000000000000" pitchFamily="2" charset="0"/>
+              </a:rPr>
+              <a:t>유저 분류 분석</a:t>
+            </a:r>
+            <a:r>
+              <a:rPr lang="en-US" altLang="ko-KR" kern="0" dirty="0">
+                <a:solidFill>
+                  <a:srgbClr val="000000"/>
+                </a:solidFill>
+                <a:latin typeface="ADLaM Display" panose="02010000000000000000" pitchFamily="2" charset="0"/>
+                <a:ea typeface="ADLaM Display" panose="02010000000000000000" pitchFamily="2" charset="0"/>
+                <a:cs typeface="ADLaM Display" panose="02010000000000000000" pitchFamily="2" charset="0"/>
+              </a:rPr>
+              <a:t>&gt;</a:t>
+            </a:r>
+            <a:endParaRPr lang="ko-KR" altLang="en-US" sz="1800" kern="0" spc="0" dirty="0">
+              <a:solidFill>
+                <a:srgbClr val="000000"/>
+              </a:solidFill>
+              <a:effectLst/>
+              <a:latin typeface="ADLaM Display" panose="02010000000000000000" pitchFamily="2" charset="0"/>
+              <a:cs typeface="ADLaM Display" panose="02010000000000000000" pitchFamily="2" charset="0"/>
+            </a:endParaRPr>
+          </a:p>
+          <a:p>
+            <a:pPr algn="just" fontAlgn="base">
+              <a:lnSpc>
+                <a:spcPct val="160000"/>
+              </a:lnSpc>
+            </a:pPr>
+            <a:endParaRPr lang="en-US" altLang="ko-KR" sz="1200" dirty="0">
+              <a:latin typeface="ADLaM Display" panose="02010000000000000000" pitchFamily="2" charset="0"/>
+              <a:ea typeface="ADLaM Display" panose="02010000000000000000" pitchFamily="2" charset="0"/>
+              <a:cs typeface="ADLaM Display" panose="02010000000000000000" pitchFamily="2" charset="0"/>
+            </a:endParaRPr>
+          </a:p>
+          <a:p>
+            <a:pPr algn="just" fontAlgn="base">
+              <a:lnSpc>
+                <a:spcPct val="160000"/>
+              </a:lnSpc>
+            </a:pPr>
+            <a:r>
+              <a:rPr lang="ko-KR" altLang="en-US" sz="1200" dirty="0">
+                <a:latin typeface="ADLaM Display" panose="02010000000000000000" pitchFamily="2" charset="0"/>
+                <a:ea typeface="ADLaM Display" panose="02010000000000000000" pitchFamily="2" charset="0"/>
+                <a:cs typeface="ADLaM Display" panose="02010000000000000000" pitchFamily="2" charset="0"/>
+              </a:rPr>
+              <a:t>유저를</a:t>
+            </a:r>
+            <a:endParaRPr lang="en-US" altLang="ko-KR" sz="1200" dirty="0">
+              <a:latin typeface="ADLaM Display" panose="02010000000000000000" pitchFamily="2" charset="0"/>
+              <a:ea typeface="ADLaM Display" panose="02010000000000000000" pitchFamily="2" charset="0"/>
+              <a:cs typeface="ADLaM Display" panose="02010000000000000000" pitchFamily="2" charset="0"/>
+            </a:endParaRPr>
+          </a:p>
+          <a:p>
+            <a:pPr algn="just" fontAlgn="base">
+              <a:lnSpc>
+                <a:spcPct val="160000"/>
+              </a:lnSpc>
+            </a:pPr>
+            <a:r>
+              <a:rPr lang="ko-KR" altLang="en-US" sz="1200" dirty="0">
+                <a:latin typeface="ADLaM Display" panose="02010000000000000000" pitchFamily="2" charset="0"/>
+                <a:ea typeface="ADLaM Display" panose="02010000000000000000" pitchFamily="2" charset="0"/>
+                <a:cs typeface="ADLaM Display" panose="02010000000000000000" pitchFamily="2" charset="0"/>
+              </a:rPr>
+              <a:t>신규유저</a:t>
+            </a:r>
+            <a:r>
+              <a:rPr lang="en-US" altLang="ko-KR" sz="1200" dirty="0">
+                <a:latin typeface="ADLaM Display" panose="02010000000000000000" pitchFamily="2" charset="0"/>
+                <a:ea typeface="ADLaM Display" panose="02010000000000000000" pitchFamily="2" charset="0"/>
+                <a:cs typeface="ADLaM Display" panose="02010000000000000000" pitchFamily="2" charset="0"/>
+              </a:rPr>
+              <a:t>(New) : </a:t>
+            </a:r>
+            <a:r>
+              <a:rPr lang="ko-KR" altLang="en-US" sz="1200" dirty="0">
+                <a:latin typeface="ADLaM Display" panose="02010000000000000000" pitchFamily="2" charset="0"/>
+                <a:ea typeface="ADLaM Display" panose="02010000000000000000" pitchFamily="2" charset="0"/>
+                <a:cs typeface="ADLaM Display" panose="02010000000000000000" pitchFamily="2" charset="0"/>
+              </a:rPr>
+              <a:t>제품을 처음 사용하는 유저</a:t>
+            </a:r>
+            <a:endParaRPr lang="en-US" altLang="ko-KR" sz="1200" dirty="0">
+              <a:latin typeface="ADLaM Display" panose="02010000000000000000" pitchFamily="2" charset="0"/>
+              <a:ea typeface="ADLaM Display" panose="02010000000000000000" pitchFamily="2" charset="0"/>
+              <a:cs typeface="ADLaM Display" panose="02010000000000000000" pitchFamily="2" charset="0"/>
+            </a:endParaRPr>
+          </a:p>
+          <a:p>
+            <a:pPr algn="just" fontAlgn="base">
+              <a:lnSpc>
+                <a:spcPct val="160000"/>
+              </a:lnSpc>
+            </a:pPr>
+            <a:r>
+              <a:rPr lang="ko-KR" altLang="en-US" sz="1200" dirty="0">
+                <a:latin typeface="ADLaM Display" panose="02010000000000000000" pitchFamily="2" charset="0"/>
+                <a:ea typeface="ADLaM Display" panose="02010000000000000000" pitchFamily="2" charset="0"/>
+                <a:cs typeface="ADLaM Display" panose="02010000000000000000" pitchFamily="2" charset="0"/>
+              </a:rPr>
+              <a:t>기존유저</a:t>
+            </a:r>
+            <a:r>
+              <a:rPr lang="en-US" altLang="ko-KR" sz="1200" dirty="0">
+                <a:latin typeface="ADLaM Display" panose="02010000000000000000" pitchFamily="2" charset="0"/>
+                <a:ea typeface="ADLaM Display" panose="02010000000000000000" pitchFamily="2" charset="0"/>
+                <a:cs typeface="ADLaM Display" panose="02010000000000000000" pitchFamily="2" charset="0"/>
+              </a:rPr>
+              <a:t>(Current) : </a:t>
+            </a:r>
+            <a:r>
+              <a:rPr lang="ko-KR" altLang="en-US" sz="1200" dirty="0">
+                <a:latin typeface="ADLaM Display" panose="02010000000000000000" pitchFamily="2" charset="0"/>
+                <a:ea typeface="ADLaM Display" panose="02010000000000000000" pitchFamily="2" charset="0"/>
+                <a:cs typeface="ADLaM Display" panose="02010000000000000000" pitchFamily="2" charset="0"/>
+              </a:rPr>
+              <a:t>제품을</a:t>
+            </a:r>
+            <a:r>
+              <a:rPr lang="en-US" altLang="ko-KR" sz="1200" dirty="0">
+                <a:latin typeface="ADLaM Display" panose="02010000000000000000" pitchFamily="2" charset="0"/>
+                <a:ea typeface="ADLaM Display" panose="02010000000000000000" pitchFamily="2" charset="0"/>
+                <a:cs typeface="ADLaM Display" panose="02010000000000000000" pitchFamily="2" charset="0"/>
+              </a:rPr>
+              <a:t> </a:t>
+            </a:r>
+            <a:r>
+              <a:rPr lang="ko-KR" altLang="en-US" sz="1200" dirty="0">
+                <a:latin typeface="ADLaM Display" panose="02010000000000000000" pitchFamily="2" charset="0"/>
+                <a:ea typeface="ADLaM Display" panose="02010000000000000000" pitchFamily="2" charset="0"/>
+                <a:cs typeface="ADLaM Display" panose="02010000000000000000" pitchFamily="2" charset="0"/>
+              </a:rPr>
+              <a:t>지속적으로 사용하는 유저</a:t>
+            </a:r>
+            <a:endParaRPr lang="en-US" altLang="ko-KR" sz="1200" dirty="0">
+              <a:latin typeface="ADLaM Display" panose="02010000000000000000" pitchFamily="2" charset="0"/>
+              <a:ea typeface="ADLaM Display" panose="02010000000000000000" pitchFamily="2" charset="0"/>
+              <a:cs typeface="ADLaM Display" panose="02010000000000000000" pitchFamily="2" charset="0"/>
+            </a:endParaRPr>
+          </a:p>
+          <a:p>
+            <a:pPr algn="just" fontAlgn="base">
+              <a:lnSpc>
+                <a:spcPct val="160000"/>
+              </a:lnSpc>
+            </a:pPr>
+            <a:r>
+              <a:rPr lang="ko-KR" altLang="en-US" sz="1200" dirty="0">
+                <a:latin typeface="ADLaM Display" panose="02010000000000000000" pitchFamily="2" charset="0"/>
+                <a:ea typeface="ADLaM Display" panose="02010000000000000000" pitchFamily="2" charset="0"/>
+                <a:cs typeface="ADLaM Display" panose="02010000000000000000" pitchFamily="2" charset="0"/>
+              </a:rPr>
+              <a:t>복귀유저</a:t>
+            </a:r>
+            <a:r>
+              <a:rPr lang="en-US" altLang="ko-KR" sz="1200" dirty="0">
+                <a:latin typeface="ADLaM Display" panose="02010000000000000000" pitchFamily="2" charset="0"/>
+                <a:ea typeface="ADLaM Display" panose="02010000000000000000" pitchFamily="2" charset="0"/>
+                <a:cs typeface="ADLaM Display" panose="02010000000000000000" pitchFamily="2" charset="0"/>
+              </a:rPr>
+              <a:t>(Resurrected) : </a:t>
+            </a:r>
+            <a:r>
+              <a:rPr lang="ko-KR" altLang="en-US" sz="1200" dirty="0">
+                <a:latin typeface="ADLaM Display" panose="02010000000000000000" pitchFamily="2" charset="0"/>
+                <a:ea typeface="ADLaM Display" panose="02010000000000000000" pitchFamily="2" charset="0"/>
+                <a:cs typeface="ADLaM Display" panose="02010000000000000000" pitchFamily="2" charset="0"/>
+              </a:rPr>
+              <a:t>과거에 사용 </a:t>
+            </a:r>
+            <a:r>
+              <a:rPr lang="en-US" altLang="ko-KR" sz="1200" dirty="0">
+                <a:latin typeface="ADLaM Display" panose="02010000000000000000" pitchFamily="2" charset="0"/>
+                <a:ea typeface="ADLaM Display" panose="02010000000000000000" pitchFamily="2" charset="0"/>
+                <a:cs typeface="ADLaM Display" panose="02010000000000000000" pitchFamily="2" charset="0"/>
+              </a:rPr>
+              <a:t>-&gt; </a:t>
+            </a:r>
+            <a:r>
+              <a:rPr lang="ko-KR" altLang="en-US" sz="1200" dirty="0">
+                <a:latin typeface="ADLaM Display" panose="02010000000000000000" pitchFamily="2" charset="0"/>
+                <a:ea typeface="ADLaM Display" panose="02010000000000000000" pitchFamily="2" charset="0"/>
+                <a:cs typeface="ADLaM Display" panose="02010000000000000000" pitchFamily="2" charset="0"/>
+              </a:rPr>
+              <a:t>비활성 </a:t>
+            </a:r>
+            <a:r>
+              <a:rPr lang="en-US" altLang="ko-KR" sz="1200" dirty="0">
+                <a:latin typeface="ADLaM Display" panose="02010000000000000000" pitchFamily="2" charset="0"/>
+                <a:ea typeface="ADLaM Display" panose="02010000000000000000" pitchFamily="2" charset="0"/>
+                <a:cs typeface="ADLaM Display" panose="02010000000000000000" pitchFamily="2" charset="0"/>
+              </a:rPr>
+              <a:t>-&gt; </a:t>
+            </a:r>
+            <a:r>
+              <a:rPr lang="ko-KR" altLang="en-US" sz="1200" dirty="0">
+                <a:latin typeface="ADLaM Display" panose="02010000000000000000" pitchFamily="2" charset="0"/>
+                <a:ea typeface="ADLaM Display" panose="02010000000000000000" pitchFamily="2" charset="0"/>
+                <a:cs typeface="ADLaM Display" panose="02010000000000000000" pitchFamily="2" charset="0"/>
+              </a:rPr>
+              <a:t>다시 제품을 사용한 유저</a:t>
+            </a:r>
+            <a:endParaRPr lang="en-US" altLang="ko-KR" sz="1200" dirty="0">
+              <a:latin typeface="ADLaM Display" panose="02010000000000000000" pitchFamily="2" charset="0"/>
+              <a:ea typeface="ADLaM Display" panose="02010000000000000000" pitchFamily="2" charset="0"/>
+              <a:cs typeface="ADLaM Display" panose="02010000000000000000" pitchFamily="2" charset="0"/>
+            </a:endParaRPr>
+          </a:p>
+          <a:p>
+            <a:pPr algn="just" fontAlgn="base">
+              <a:lnSpc>
+                <a:spcPct val="160000"/>
+              </a:lnSpc>
+            </a:pPr>
+            <a:r>
+              <a:rPr lang="ko-KR" altLang="en-US" sz="1200" dirty="0">
+                <a:latin typeface="ADLaM Display" panose="02010000000000000000" pitchFamily="2" charset="0"/>
+                <a:ea typeface="ADLaM Display" panose="02010000000000000000" pitchFamily="2" charset="0"/>
+                <a:cs typeface="ADLaM Display" panose="02010000000000000000" pitchFamily="2" charset="0"/>
+              </a:rPr>
+              <a:t>휴면유저</a:t>
+            </a:r>
+            <a:r>
+              <a:rPr lang="en-US" altLang="ko-KR" sz="1200" dirty="0">
+                <a:latin typeface="ADLaM Display" panose="02010000000000000000" pitchFamily="2" charset="0"/>
+                <a:ea typeface="ADLaM Display" panose="02010000000000000000" pitchFamily="2" charset="0"/>
+                <a:cs typeface="ADLaM Display" panose="02010000000000000000" pitchFamily="2" charset="0"/>
+              </a:rPr>
+              <a:t>(Dormant) : </a:t>
+            </a:r>
+            <a:r>
+              <a:rPr lang="ko-KR" altLang="en-US" sz="1200" dirty="0">
+                <a:latin typeface="ADLaM Display" panose="02010000000000000000" pitchFamily="2" charset="0"/>
+                <a:ea typeface="ADLaM Display" panose="02010000000000000000" pitchFamily="2" charset="0"/>
+                <a:cs typeface="ADLaM Display" panose="02010000000000000000" pitchFamily="2" charset="0"/>
+              </a:rPr>
+              <a:t>일정 기간 제품을 사용하지 않은 비활성화 사용자</a:t>
+            </a:r>
+            <a:endParaRPr lang="en-US" altLang="ko-KR" sz="1200" dirty="0">
+              <a:latin typeface="ADLaM Display" panose="02010000000000000000" pitchFamily="2" charset="0"/>
+              <a:ea typeface="ADLaM Display" panose="02010000000000000000" pitchFamily="2" charset="0"/>
+              <a:cs typeface="ADLaM Display" panose="02010000000000000000" pitchFamily="2" charset="0"/>
+            </a:endParaRPr>
+          </a:p>
+          <a:p>
+            <a:pPr algn="just" fontAlgn="base">
+              <a:lnSpc>
+                <a:spcPct val="160000"/>
+              </a:lnSpc>
+            </a:pPr>
+            <a:r>
+              <a:rPr lang="en-US" altLang="ko-KR" sz="1200" dirty="0">
+                <a:latin typeface="ADLaM Display" panose="02010000000000000000" pitchFamily="2" charset="0"/>
+                <a:ea typeface="ADLaM Display" panose="02010000000000000000" pitchFamily="2" charset="0"/>
+                <a:cs typeface="ADLaM Display" panose="02010000000000000000" pitchFamily="2" charset="0"/>
+              </a:rPr>
+              <a:t>4</a:t>
+            </a:r>
+            <a:r>
+              <a:rPr lang="ko-KR" altLang="en-US" sz="1200" dirty="0">
+                <a:latin typeface="ADLaM Display" panose="02010000000000000000" pitchFamily="2" charset="0"/>
+                <a:ea typeface="ADLaM Display" panose="02010000000000000000" pitchFamily="2" charset="0"/>
+                <a:cs typeface="ADLaM Display" panose="02010000000000000000" pitchFamily="2" charset="0"/>
+              </a:rPr>
+              <a:t>가지 분류로 </a:t>
+            </a:r>
+            <a:r>
+              <a:rPr lang="en-US" altLang="ko-KR" sz="1200" dirty="0">
+                <a:latin typeface="ADLaM Display" panose="02010000000000000000" pitchFamily="2" charset="0"/>
+                <a:ea typeface="ADLaM Display" panose="02010000000000000000" pitchFamily="2" charset="0"/>
+                <a:cs typeface="ADLaM Display" panose="02010000000000000000" pitchFamily="2" charset="0"/>
+              </a:rPr>
+              <a:t>type</a:t>
+            </a:r>
+            <a:r>
+              <a:rPr lang="ko-KR" altLang="en-US" sz="1200" dirty="0">
+                <a:latin typeface="ADLaM Display" panose="02010000000000000000" pitchFamily="2" charset="0"/>
+                <a:ea typeface="ADLaM Display" panose="02010000000000000000" pitchFamily="2" charset="0"/>
+                <a:cs typeface="ADLaM Display" panose="02010000000000000000" pitchFamily="2" charset="0"/>
+              </a:rPr>
+              <a:t>을 설정해 보았습니다</a:t>
+            </a:r>
+            <a:r>
+              <a:rPr lang="en-US" altLang="ko-KR" sz="1200" dirty="0">
+                <a:latin typeface="ADLaM Display" panose="02010000000000000000" pitchFamily="2" charset="0"/>
+                <a:ea typeface="ADLaM Display" panose="02010000000000000000" pitchFamily="2" charset="0"/>
+                <a:cs typeface="ADLaM Display" panose="02010000000000000000" pitchFamily="2" charset="0"/>
+              </a:rPr>
+              <a:t>.</a:t>
+            </a:r>
+          </a:p>
+          <a:p>
+            <a:pPr algn="just" fontAlgn="base">
+              <a:lnSpc>
+                <a:spcPct val="160000"/>
+              </a:lnSpc>
+            </a:pPr>
+            <a:endParaRPr lang="en-US" altLang="ko-KR" kern="0" dirty="0">
+              <a:solidFill>
+                <a:srgbClr val="000000"/>
+              </a:solidFill>
+              <a:latin typeface="ADLaM Display" panose="02010000000000000000" pitchFamily="2" charset="0"/>
+              <a:ea typeface="ADLaM Display" panose="02010000000000000000" pitchFamily="2" charset="0"/>
+              <a:cs typeface="ADLaM Display" panose="02010000000000000000" pitchFamily="2" charset="0"/>
+            </a:endParaRPr>
+          </a:p>
+          <a:p>
+            <a:pPr algn="just" fontAlgn="base">
+              <a:lnSpc>
+                <a:spcPct val="160000"/>
+              </a:lnSpc>
+            </a:pPr>
+            <a:endParaRPr lang="en-US" altLang="ko-KR" kern="0" dirty="0">
+              <a:solidFill>
+                <a:srgbClr val="000000"/>
+              </a:solidFill>
+              <a:latin typeface="ADLaM Display" panose="02010000000000000000" pitchFamily="2" charset="0"/>
+              <a:ea typeface="ADLaM Display" panose="02010000000000000000" pitchFamily="2" charset="0"/>
+              <a:cs typeface="ADLaM Display" panose="02010000000000000000" pitchFamily="2" charset="0"/>
+            </a:endParaRPr>
+          </a:p>
+          <a:p>
+            <a:pPr algn="just" fontAlgn="base">
+              <a:lnSpc>
+                <a:spcPct val="160000"/>
+              </a:lnSpc>
+            </a:pPr>
+            <a:r>
+              <a:rPr lang="ko-KR" altLang="en-US" kern="0" dirty="0">
+                <a:solidFill>
+                  <a:srgbClr val="000000"/>
+                </a:solidFill>
+                <a:latin typeface="ADLaM Display" panose="02010000000000000000" pitchFamily="2" charset="0"/>
+                <a:ea typeface="함초롬바탕" panose="02030604000101010101" pitchFamily="18" charset="-127"/>
+                <a:cs typeface="ADLaM Display" panose="02010000000000000000" pitchFamily="2" charset="0"/>
+              </a:rPr>
+              <a:t>데이터 </a:t>
+            </a:r>
+            <a:r>
+              <a:rPr lang="en-US" altLang="ko-KR" kern="0" dirty="0">
+                <a:solidFill>
+                  <a:srgbClr val="000000"/>
+                </a:solidFill>
+                <a:latin typeface="ADLaM Display" panose="02010000000000000000" pitchFamily="2" charset="0"/>
+                <a:ea typeface="ADLaM Display" panose="02010000000000000000" pitchFamily="2" charset="0"/>
+                <a:cs typeface="ADLaM Display" panose="02010000000000000000" pitchFamily="2" charset="0"/>
+              </a:rPr>
+              <a:t>: 2022-08-01 ~ 2023-08-03</a:t>
+            </a:r>
+            <a:endParaRPr lang="en-US" altLang="ko-KR" sz="1800" kern="0" spc="0" dirty="0">
+              <a:solidFill>
+                <a:srgbClr val="000000"/>
+              </a:solidFill>
+              <a:effectLst/>
+              <a:latin typeface="ADLaM Display" panose="02010000000000000000" pitchFamily="2" charset="0"/>
+              <a:ea typeface="ADLaM Display" panose="02010000000000000000" pitchFamily="2" charset="0"/>
+              <a:cs typeface="ADLaM Display" panose="02010000000000000000" pitchFamily="2" charset="0"/>
+            </a:endParaRPr>
+          </a:p>
+          <a:p>
+            <a:pPr algn="just" fontAlgn="base">
+              <a:lnSpc>
+                <a:spcPct val="160000"/>
+              </a:lnSpc>
+            </a:pPr>
+            <a:endParaRPr lang="ko-KR" altLang="en-US" dirty="0">
+              <a:latin typeface="ADLaM Display" panose="02010000000000000000" pitchFamily="2" charset="0"/>
+              <a:cs typeface="ADLaM Display" panose="02010000000000000000" pitchFamily="2" charset="0"/>
+            </a:endParaRPr>
+          </a:p>
+        </p:txBody>
+      </p:sp>
+      <p:pic>
+        <p:nvPicPr>
+          <p:cNvPr id="3" name="그림 2" descr="텍스트, 번호, 스크린샷, 폰트이(가) 표시된 사진&#10;&#10;자동 생성된 설명">
+            <a:extLst>
+              <a:ext uri="{FF2B5EF4-FFF2-40B4-BE49-F238E27FC236}">
+                <a16:creationId xmlns:a16="http://schemas.microsoft.com/office/drawing/2014/main" id="{E8441A2A-1981-D56D-E17D-FCF662F2AA0B}"/>
+              </a:ext>
+            </a:extLst>
+          </p:cNvPr>
+          <p:cNvPicPr>
+            <a:picLocks noChangeAspect="1"/>
+          </p:cNvPicPr>
+          <p:nvPr/>
+        </p:nvPicPr>
+        <p:blipFill>
+          <a:blip r:embed="rId2">
+            <a:extLst>
+              <a:ext uri="{28A0092B-C50C-407E-A947-70E740481C1C}">
+                <a14:useLocalDpi xmlns:a14="http://schemas.microsoft.com/office/drawing/2010/main" val="0"/>
+              </a:ext>
+            </a:extLst>
+          </a:blip>
+          <a:stretch>
+            <a:fillRect/>
+          </a:stretch>
+        </p:blipFill>
+        <p:spPr>
+          <a:xfrm>
+            <a:off x="5926291" y="1487498"/>
+            <a:ext cx="6099454" cy="2659303"/>
+          </a:xfrm>
+          <a:prstGeom prst="rect">
+            <a:avLst/>
+          </a:prstGeom>
+        </p:spPr>
+      </p:pic>
+      <p:pic>
+        <p:nvPicPr>
+          <p:cNvPr id="7" name="그림 6" descr="텍스트, 번호, 폰트, 영수증이(가) 표시된 사진&#10;&#10;자동 생성된 설명">
+            <a:extLst>
+              <a:ext uri="{FF2B5EF4-FFF2-40B4-BE49-F238E27FC236}">
+                <a16:creationId xmlns:a16="http://schemas.microsoft.com/office/drawing/2014/main" id="{AA725442-DAB3-0D52-44C7-71B6307D4E49}"/>
+              </a:ext>
+            </a:extLst>
+          </p:cNvPr>
+          <p:cNvPicPr>
+            <a:picLocks noChangeAspect="1"/>
+          </p:cNvPicPr>
+          <p:nvPr/>
+        </p:nvPicPr>
+        <p:blipFill>
+          <a:blip r:embed="rId3">
+            <a:extLst>
+              <a:ext uri="{28A0092B-C50C-407E-A947-70E740481C1C}">
+                <a14:useLocalDpi xmlns:a14="http://schemas.microsoft.com/office/drawing/2010/main" val="0"/>
+              </a:ext>
+            </a:extLst>
+          </a:blip>
+          <a:stretch>
+            <a:fillRect/>
+          </a:stretch>
+        </p:blipFill>
+        <p:spPr>
+          <a:xfrm>
+            <a:off x="5910201" y="4229984"/>
+            <a:ext cx="6131634" cy="1863536"/>
+          </a:xfrm>
+          <a:prstGeom prst="rect">
+            <a:avLst/>
+          </a:prstGeom>
+        </p:spPr>
+      </p:pic>
+    </p:spTree>
+    <p:extLst>
+      <p:ext uri="{BB962C8B-B14F-4D97-AF65-F5344CB8AC3E}">
+        <p14:creationId xmlns:p14="http://schemas.microsoft.com/office/powerpoint/2010/main" val="3690869884"/>
+      </p:ext>
+    </p:extLst>
+  </p:cSld>
+  <p:clrMapOvr>
+    <a:masterClrMapping/>
+  </p:clrMapOvr>
+</p:sld>
+</file>
+
+<file path=ppt/slides/slide15.xml><?xml version="1.0" encoding="utf-8"?>
+<p:sld xmlns:a="http://schemas.openxmlformats.org/drawingml/2006/main" xmlns:r="http://schemas.openxmlformats.org/officeDocument/2006/relationships" xmlns:p="http://schemas.openxmlformats.org/presentationml/2006/main">
+  <p:cSld>
+    <p:spTree>
+      <p:nvGrpSpPr>
+        <p:cNvPr id="1" name="">
+          <a:extLst>
+            <a:ext uri="{FF2B5EF4-FFF2-40B4-BE49-F238E27FC236}">
+              <a16:creationId xmlns:a16="http://schemas.microsoft.com/office/drawing/2014/main" id="{DB6958D2-DF52-1843-4D05-C5CC13A2C6BD}"/>
+            </a:ext>
+          </a:extLst>
+        </p:cNvPr>
+        <p:cNvGrpSpPr/>
+        <p:nvPr/>
+      </p:nvGrpSpPr>
+      <p:grpSpPr>
+        <a:xfrm>
+          <a:off x="0" y="0"/>
+          <a:ext cx="0" cy="0"/>
+          <a:chOff x="0" y="0"/>
+          <a:chExt cx="0" cy="0"/>
+        </a:xfrm>
+      </p:grpSpPr>
+      <p:sp>
+        <p:nvSpPr>
+          <p:cNvPr id="4" name="TextBox 3">
+            <a:extLst>
+              <a:ext uri="{FF2B5EF4-FFF2-40B4-BE49-F238E27FC236}">
+                <a16:creationId xmlns:a16="http://schemas.microsoft.com/office/drawing/2014/main" id="{72AA6B57-0DDC-4D65-935A-B697C805AFB3}"/>
+              </a:ext>
+            </a:extLst>
+          </p:cNvPr>
+          <p:cNvSpPr txBox="1"/>
+          <p:nvPr/>
+        </p:nvSpPr>
+        <p:spPr>
+          <a:xfrm>
+            <a:off x="166255" y="175491"/>
+            <a:ext cx="11859490" cy="1501950"/>
+          </a:xfrm>
+          <a:prstGeom prst="rect">
+            <a:avLst/>
+          </a:prstGeom>
+          <a:noFill/>
+        </p:spPr>
+        <p:txBody>
+          <a:bodyPr wrap="square" rtlCol="0">
+            <a:spAutoFit/>
+          </a:bodyPr>
+          <a:lstStyle/>
+          <a:p>
+            <a:pPr marL="0" marR="0" indent="0" algn="just" fontAlgn="base" latinLnBrk="1">
+              <a:lnSpc>
+                <a:spcPct val="160000"/>
+              </a:lnSpc>
+              <a:spcBef>
+                <a:spcPts val="0"/>
+              </a:spcBef>
+              <a:spcAft>
+                <a:spcPts val="0"/>
+              </a:spcAft>
+            </a:pPr>
+            <a:r>
+              <a:rPr lang="en-US" altLang="ko-KR" sz="2800" b="1" kern="0" spc="0" dirty="0">
+                <a:solidFill>
+                  <a:srgbClr val="000000"/>
+                </a:solidFill>
+                <a:effectLst/>
+                <a:latin typeface="ADLaM Display" panose="02010000000000000000" pitchFamily="2" charset="0"/>
+                <a:ea typeface="ADLaM Display" panose="02010000000000000000" pitchFamily="2" charset="0"/>
+                <a:cs typeface="ADLaM Display" panose="02010000000000000000" pitchFamily="2" charset="0"/>
+              </a:rPr>
+              <a:t>Firebase </a:t>
+            </a:r>
+            <a:r>
+              <a:rPr lang="ko-KR" altLang="en-US" sz="2800" b="1" kern="0" spc="0" dirty="0">
+                <a:solidFill>
+                  <a:srgbClr val="000000"/>
+                </a:solidFill>
+                <a:effectLst/>
+                <a:latin typeface="ADLaM Display" panose="02010000000000000000" pitchFamily="2" charset="0"/>
+                <a:ea typeface="함초롬바탕" panose="02030604000101010101" pitchFamily="18" charset="-127"/>
+                <a:cs typeface="ADLaM Display" panose="02010000000000000000" pitchFamily="2" charset="0"/>
+              </a:rPr>
+              <a:t>앱 로그 기반 데이터 분석 </a:t>
+            </a:r>
+            <a:endParaRPr lang="en-US" altLang="ko-KR" sz="2800" b="1" kern="0" spc="0" dirty="0">
+              <a:solidFill>
+                <a:srgbClr val="000000"/>
+              </a:solidFill>
+              <a:effectLst/>
+              <a:latin typeface="ADLaM Display" panose="02010000000000000000" pitchFamily="2" charset="0"/>
+              <a:ea typeface="ADLaM Display" panose="02010000000000000000" pitchFamily="2" charset="0"/>
+              <a:cs typeface="ADLaM Display" panose="02010000000000000000" pitchFamily="2" charset="0"/>
+            </a:endParaRPr>
+          </a:p>
+          <a:p>
+            <a:pPr algn="just" fontAlgn="base">
+              <a:lnSpc>
+                <a:spcPct val="160000"/>
+              </a:lnSpc>
+            </a:pPr>
+            <a:r>
+              <a:rPr lang="en-US" altLang="ko-KR" sz="1800" kern="0" spc="0" dirty="0">
+                <a:solidFill>
+                  <a:srgbClr val="000000"/>
+                </a:solidFill>
+                <a:effectLst/>
+                <a:latin typeface="ADLaM Display" panose="02010000000000000000" pitchFamily="2" charset="0"/>
+                <a:ea typeface="ADLaM Display" panose="02010000000000000000" pitchFamily="2" charset="0"/>
+                <a:cs typeface="ADLaM Display" panose="02010000000000000000" pitchFamily="2" charset="0"/>
+              </a:rPr>
+              <a:t>&lt;</a:t>
+            </a:r>
+            <a:r>
+              <a:rPr lang="en-US" altLang="ko-KR" kern="0" dirty="0">
+                <a:solidFill>
+                  <a:srgbClr val="000000"/>
+                </a:solidFill>
+                <a:latin typeface="ADLaM Display" panose="02010000000000000000" pitchFamily="2" charset="0"/>
+                <a:ea typeface="ADLaM Display" panose="02010000000000000000" pitchFamily="2" charset="0"/>
+                <a:cs typeface="ADLaM Display" panose="02010000000000000000" pitchFamily="2" charset="0"/>
+              </a:rPr>
+              <a:t>4</a:t>
+            </a:r>
+            <a:r>
+              <a:rPr lang="en-US" altLang="ko-KR" sz="1800" kern="0" spc="0" dirty="0">
+                <a:solidFill>
+                  <a:srgbClr val="000000"/>
+                </a:solidFill>
+                <a:effectLst/>
+                <a:latin typeface="ADLaM Display" panose="02010000000000000000" pitchFamily="2" charset="0"/>
+                <a:ea typeface="ADLaM Display" panose="02010000000000000000" pitchFamily="2" charset="0"/>
+                <a:cs typeface="ADLaM Display" panose="02010000000000000000" pitchFamily="2" charset="0"/>
+              </a:rPr>
+              <a:t>. Retain</a:t>
+            </a:r>
+            <a:r>
+              <a:rPr lang="ko-KR" altLang="en-US" sz="1800" kern="0" spc="0" dirty="0">
+                <a:solidFill>
+                  <a:srgbClr val="000000"/>
+                </a:solidFill>
+                <a:effectLst/>
+                <a:latin typeface="ADLaM Display" panose="02010000000000000000" pitchFamily="2" charset="0"/>
+                <a:ea typeface="ADLaM Display" panose="02010000000000000000" pitchFamily="2" charset="0"/>
+                <a:cs typeface="ADLaM Display" panose="02010000000000000000" pitchFamily="2" charset="0"/>
+              </a:rPr>
+              <a:t>유저 분류 </a:t>
+            </a:r>
+            <a:r>
+              <a:rPr lang="ko-KR" altLang="en-US" sz="1800" kern="0" spc="0" dirty="0">
+                <a:solidFill>
+                  <a:srgbClr val="000000"/>
+                </a:solidFill>
+                <a:effectLst/>
+                <a:latin typeface="ADLaM Display" panose="02010000000000000000" pitchFamily="2" charset="0"/>
+                <a:cs typeface="ADLaM Display" panose="02010000000000000000" pitchFamily="2" charset="0"/>
+              </a:rPr>
+              <a:t>쿼리</a:t>
+            </a:r>
+            <a:r>
+              <a:rPr lang="en-US" altLang="ko-KR" kern="0" dirty="0">
+                <a:solidFill>
+                  <a:srgbClr val="000000"/>
+                </a:solidFill>
+                <a:latin typeface="ADLaM Display" panose="02010000000000000000" pitchFamily="2" charset="0"/>
+                <a:ea typeface="ADLaM Display" panose="02010000000000000000" pitchFamily="2" charset="0"/>
+                <a:cs typeface="ADLaM Display" panose="02010000000000000000" pitchFamily="2" charset="0"/>
+              </a:rPr>
+              <a:t>&gt;</a:t>
+            </a:r>
+            <a:endParaRPr lang="en-US" altLang="ko-KR" sz="1800" kern="0" spc="0" dirty="0">
+              <a:solidFill>
+                <a:srgbClr val="000000"/>
+              </a:solidFill>
+              <a:effectLst/>
+              <a:latin typeface="ADLaM Display" panose="02010000000000000000" pitchFamily="2" charset="0"/>
+              <a:ea typeface="ADLaM Display" panose="02010000000000000000" pitchFamily="2" charset="0"/>
+              <a:cs typeface="ADLaM Display" panose="02010000000000000000" pitchFamily="2" charset="0"/>
+            </a:endParaRPr>
+          </a:p>
+          <a:p>
+            <a:endParaRPr lang="ko-KR" altLang="en-US" dirty="0">
+              <a:latin typeface="ADLaM Display" panose="02010000000000000000" pitchFamily="2" charset="0"/>
+              <a:cs typeface="ADLaM Display" panose="02010000000000000000" pitchFamily="2" charset="0"/>
+            </a:endParaRPr>
+          </a:p>
+        </p:txBody>
+      </p:sp>
+      <p:pic>
+        <p:nvPicPr>
+          <p:cNvPr id="5" name="그림 4" descr="텍스트, 스크린샷, 폰트, 번호이(가) 표시된 사진&#10;&#10;자동 생성된 설명">
+            <a:extLst>
+              <a:ext uri="{FF2B5EF4-FFF2-40B4-BE49-F238E27FC236}">
+                <a16:creationId xmlns:a16="http://schemas.microsoft.com/office/drawing/2014/main" id="{651391BE-0A35-41E2-3952-18E251632635}"/>
+              </a:ext>
+            </a:extLst>
+          </p:cNvPr>
+          <p:cNvPicPr>
+            <a:picLocks noChangeAspect="1"/>
+          </p:cNvPicPr>
+          <p:nvPr/>
+        </p:nvPicPr>
+        <p:blipFill>
+          <a:blip r:embed="rId2">
+            <a:extLst>
+              <a:ext uri="{28A0092B-C50C-407E-A947-70E740481C1C}">
+                <a14:useLocalDpi xmlns:a14="http://schemas.microsoft.com/office/drawing/2010/main" val="0"/>
+              </a:ext>
+            </a:extLst>
+          </a:blip>
+          <a:stretch>
+            <a:fillRect/>
+          </a:stretch>
+        </p:blipFill>
+        <p:spPr>
+          <a:xfrm>
+            <a:off x="6096000" y="175491"/>
+            <a:ext cx="5643801" cy="4664364"/>
+          </a:xfrm>
+          <a:prstGeom prst="rect">
+            <a:avLst/>
+          </a:prstGeom>
+        </p:spPr>
+      </p:pic>
+      <p:pic>
+        <p:nvPicPr>
+          <p:cNvPr id="7" name="그림 6" descr="텍스트, 스크린샷, 폰트이(가) 표시된 사진&#10;&#10;자동 생성된 설명">
+            <a:extLst>
+              <a:ext uri="{FF2B5EF4-FFF2-40B4-BE49-F238E27FC236}">
+                <a16:creationId xmlns:a16="http://schemas.microsoft.com/office/drawing/2014/main" id="{93E341D6-1555-9C00-3593-6FC719E35A1E}"/>
+              </a:ext>
+            </a:extLst>
+          </p:cNvPr>
+          <p:cNvPicPr>
+            <a:picLocks noChangeAspect="1"/>
+          </p:cNvPicPr>
+          <p:nvPr/>
+        </p:nvPicPr>
+        <p:blipFill>
+          <a:blip r:embed="rId3">
+            <a:extLst>
+              <a:ext uri="{28A0092B-C50C-407E-A947-70E740481C1C}">
+                <a14:useLocalDpi xmlns:a14="http://schemas.microsoft.com/office/drawing/2010/main" val="0"/>
+              </a:ext>
+            </a:extLst>
+          </a:blip>
+          <a:stretch>
+            <a:fillRect/>
+          </a:stretch>
+        </p:blipFill>
+        <p:spPr>
+          <a:xfrm>
+            <a:off x="452199" y="3763649"/>
+            <a:ext cx="5596038" cy="2771078"/>
+          </a:xfrm>
+          <a:prstGeom prst="rect">
+            <a:avLst/>
+          </a:prstGeom>
+        </p:spPr>
+      </p:pic>
+    </p:spTree>
+    <p:extLst>
+      <p:ext uri="{BB962C8B-B14F-4D97-AF65-F5344CB8AC3E}">
+        <p14:creationId xmlns:p14="http://schemas.microsoft.com/office/powerpoint/2010/main" val="328520229"/>
+      </p:ext>
+    </p:extLst>
+  </p:cSld>
+  <p:clrMapOvr>
+    <a:masterClrMapping/>
+  </p:clrMapOvr>
+</p:sld>
+</file>
+
+<file path=ppt/slides/slide16.xml><?xml version="1.0" encoding="utf-8"?>
+<p:sld xmlns:a="http://schemas.openxmlformats.org/drawingml/2006/main" xmlns:r="http://schemas.openxmlformats.org/officeDocument/2006/relationships" xmlns:p="http://schemas.openxmlformats.org/presentationml/2006/main">
+  <p:cSld>
+    <p:spTree>
+      <p:nvGrpSpPr>
+        <p:cNvPr id="1" name="">
+          <a:extLst>
+            <a:ext uri="{FF2B5EF4-FFF2-40B4-BE49-F238E27FC236}">
+              <a16:creationId xmlns:a16="http://schemas.microsoft.com/office/drawing/2014/main" id="{279C65C8-9225-88EC-8A38-A6DE61288DB2}"/>
+            </a:ext>
+          </a:extLst>
+        </p:cNvPr>
+        <p:cNvGrpSpPr/>
+        <p:nvPr/>
+      </p:nvGrpSpPr>
+      <p:grpSpPr>
+        <a:xfrm>
+          <a:off x="0" y="0"/>
+          <a:ext cx="0" cy="0"/>
+          <a:chOff x="0" y="0"/>
+          <a:chExt cx="0" cy="0"/>
+        </a:xfrm>
+      </p:grpSpPr>
+      <p:sp>
+        <p:nvSpPr>
+          <p:cNvPr id="4" name="TextBox 3">
+            <a:extLst>
+              <a:ext uri="{FF2B5EF4-FFF2-40B4-BE49-F238E27FC236}">
+                <a16:creationId xmlns:a16="http://schemas.microsoft.com/office/drawing/2014/main" id="{6221C7C9-3C8A-498E-14D3-34AD595C8BB9}"/>
+              </a:ext>
+            </a:extLst>
+          </p:cNvPr>
+          <p:cNvSpPr txBox="1"/>
+          <p:nvPr/>
+        </p:nvSpPr>
+        <p:spPr>
+          <a:xfrm>
+            <a:off x="166255" y="175491"/>
+            <a:ext cx="11859490" cy="1501950"/>
+          </a:xfrm>
+          <a:prstGeom prst="rect">
+            <a:avLst/>
+          </a:prstGeom>
+          <a:noFill/>
+        </p:spPr>
+        <p:txBody>
+          <a:bodyPr wrap="square" rtlCol="0">
+            <a:spAutoFit/>
+          </a:bodyPr>
+          <a:lstStyle/>
+          <a:p>
+            <a:pPr marL="0" marR="0" indent="0" algn="just" fontAlgn="base" latinLnBrk="1">
+              <a:lnSpc>
+                <a:spcPct val="160000"/>
+              </a:lnSpc>
+              <a:spcBef>
+                <a:spcPts val="0"/>
+              </a:spcBef>
+              <a:spcAft>
+                <a:spcPts val="0"/>
+              </a:spcAft>
+            </a:pPr>
+            <a:r>
+              <a:rPr lang="en-US" altLang="ko-KR" sz="2800" b="1" kern="0" spc="0" dirty="0">
+                <a:solidFill>
+                  <a:srgbClr val="000000"/>
+                </a:solidFill>
+                <a:effectLst/>
+                <a:latin typeface="ADLaM Display" panose="02010000000000000000" pitchFamily="2" charset="0"/>
+                <a:ea typeface="ADLaM Display" panose="02010000000000000000" pitchFamily="2" charset="0"/>
+                <a:cs typeface="ADLaM Display" panose="02010000000000000000" pitchFamily="2" charset="0"/>
+              </a:rPr>
+              <a:t>Firebase </a:t>
+            </a:r>
+            <a:r>
+              <a:rPr lang="ko-KR" altLang="en-US" sz="2800" b="1" kern="0" spc="0" dirty="0">
+                <a:solidFill>
+                  <a:srgbClr val="000000"/>
+                </a:solidFill>
+                <a:effectLst/>
+                <a:latin typeface="ADLaM Display" panose="02010000000000000000" pitchFamily="2" charset="0"/>
+                <a:ea typeface="함초롬바탕" panose="02030604000101010101" pitchFamily="18" charset="-127"/>
+                <a:cs typeface="ADLaM Display" panose="02010000000000000000" pitchFamily="2" charset="0"/>
+              </a:rPr>
+              <a:t>앱 로그 기반 데이터 분석 </a:t>
+            </a:r>
+            <a:endParaRPr lang="en-US" altLang="ko-KR" sz="2800" b="1" kern="0" spc="0" dirty="0">
+              <a:solidFill>
+                <a:srgbClr val="000000"/>
+              </a:solidFill>
+              <a:effectLst/>
+              <a:latin typeface="ADLaM Display" panose="02010000000000000000" pitchFamily="2" charset="0"/>
+              <a:ea typeface="ADLaM Display" panose="02010000000000000000" pitchFamily="2" charset="0"/>
+              <a:cs typeface="ADLaM Display" panose="02010000000000000000" pitchFamily="2" charset="0"/>
+            </a:endParaRPr>
+          </a:p>
+          <a:p>
+            <a:pPr algn="just" fontAlgn="base">
+              <a:lnSpc>
+                <a:spcPct val="160000"/>
+              </a:lnSpc>
+            </a:pPr>
+            <a:r>
+              <a:rPr lang="en-US" altLang="ko-KR" sz="1800" kern="0" spc="0" dirty="0">
+                <a:solidFill>
+                  <a:srgbClr val="000000"/>
+                </a:solidFill>
+                <a:effectLst/>
+                <a:latin typeface="ADLaM Display" panose="02010000000000000000" pitchFamily="2" charset="0"/>
+                <a:ea typeface="ADLaM Display" panose="02010000000000000000" pitchFamily="2" charset="0"/>
+                <a:cs typeface="ADLaM Display" panose="02010000000000000000" pitchFamily="2" charset="0"/>
+              </a:rPr>
+              <a:t>&lt;</a:t>
+            </a:r>
+            <a:r>
+              <a:rPr lang="en-US" altLang="ko-KR" kern="0" dirty="0">
+                <a:solidFill>
+                  <a:srgbClr val="000000"/>
+                </a:solidFill>
+                <a:latin typeface="ADLaM Display" panose="02010000000000000000" pitchFamily="2" charset="0"/>
+                <a:ea typeface="ADLaM Display" panose="02010000000000000000" pitchFamily="2" charset="0"/>
+                <a:cs typeface="ADLaM Display" panose="02010000000000000000" pitchFamily="2" charset="0"/>
+              </a:rPr>
+              <a:t>4</a:t>
+            </a:r>
+            <a:r>
+              <a:rPr lang="en-US" altLang="ko-KR" sz="1800" kern="0" spc="0" dirty="0">
+                <a:solidFill>
+                  <a:srgbClr val="000000"/>
+                </a:solidFill>
+                <a:effectLst/>
+                <a:latin typeface="ADLaM Display" panose="02010000000000000000" pitchFamily="2" charset="0"/>
+                <a:ea typeface="ADLaM Display" panose="02010000000000000000" pitchFamily="2" charset="0"/>
+                <a:cs typeface="ADLaM Display" panose="02010000000000000000" pitchFamily="2" charset="0"/>
+              </a:rPr>
+              <a:t>. Retain</a:t>
+            </a:r>
+            <a:r>
+              <a:rPr lang="ko-KR" altLang="en-US" sz="1800" kern="0" spc="0" dirty="0">
+                <a:solidFill>
+                  <a:srgbClr val="000000"/>
+                </a:solidFill>
+                <a:effectLst/>
+                <a:latin typeface="ADLaM Display" panose="02010000000000000000" pitchFamily="2" charset="0"/>
+                <a:ea typeface="ADLaM Display" panose="02010000000000000000" pitchFamily="2" charset="0"/>
+                <a:cs typeface="ADLaM Display" panose="02010000000000000000" pitchFamily="2" charset="0"/>
+              </a:rPr>
+              <a:t>유저 분류 </a:t>
+            </a:r>
+            <a:r>
+              <a:rPr lang="ko-KR" altLang="en-US" kern="0" dirty="0">
+                <a:solidFill>
+                  <a:srgbClr val="000000"/>
+                </a:solidFill>
+                <a:latin typeface="ADLaM Display" panose="02010000000000000000" pitchFamily="2" charset="0"/>
+                <a:ea typeface="ADLaM Display" panose="02010000000000000000" pitchFamily="2" charset="0"/>
+                <a:cs typeface="ADLaM Display" panose="02010000000000000000" pitchFamily="2" charset="0"/>
+              </a:rPr>
+              <a:t>코호트 시각화 </a:t>
+            </a:r>
+            <a:r>
+              <a:rPr lang="en-US" altLang="ko-KR" kern="0" dirty="0">
+                <a:solidFill>
+                  <a:srgbClr val="000000"/>
+                </a:solidFill>
+                <a:latin typeface="ADLaM Display" panose="02010000000000000000" pitchFamily="2" charset="0"/>
+                <a:ea typeface="ADLaM Display" panose="02010000000000000000" pitchFamily="2" charset="0"/>
+                <a:cs typeface="ADLaM Display" panose="02010000000000000000" pitchFamily="2" charset="0"/>
+              </a:rPr>
+              <a:t>&amp; </a:t>
+            </a:r>
+            <a:r>
+              <a:rPr lang="ko-KR" altLang="en-US" kern="0" dirty="0">
+                <a:solidFill>
+                  <a:srgbClr val="000000"/>
+                </a:solidFill>
+                <a:latin typeface="ADLaM Display" panose="02010000000000000000" pitchFamily="2" charset="0"/>
+                <a:ea typeface="ADLaM Display" panose="02010000000000000000" pitchFamily="2" charset="0"/>
+                <a:cs typeface="ADLaM Display" panose="02010000000000000000" pitchFamily="2" charset="0"/>
+              </a:rPr>
+              <a:t>해석</a:t>
+            </a:r>
+            <a:r>
+              <a:rPr lang="en-US" altLang="ko-KR" kern="0" dirty="0">
+                <a:solidFill>
+                  <a:srgbClr val="000000"/>
+                </a:solidFill>
+                <a:latin typeface="ADLaM Display" panose="02010000000000000000" pitchFamily="2" charset="0"/>
+                <a:ea typeface="ADLaM Display" panose="02010000000000000000" pitchFamily="2" charset="0"/>
+                <a:cs typeface="ADLaM Display" panose="02010000000000000000" pitchFamily="2" charset="0"/>
+              </a:rPr>
+              <a:t>&gt;</a:t>
+            </a:r>
+            <a:endParaRPr lang="en-US" altLang="ko-KR" sz="1800" kern="0" spc="0" dirty="0">
+              <a:solidFill>
+                <a:srgbClr val="000000"/>
+              </a:solidFill>
+              <a:effectLst/>
+              <a:latin typeface="ADLaM Display" panose="02010000000000000000" pitchFamily="2" charset="0"/>
+              <a:ea typeface="ADLaM Display" panose="02010000000000000000" pitchFamily="2" charset="0"/>
+              <a:cs typeface="ADLaM Display" panose="02010000000000000000" pitchFamily="2" charset="0"/>
+            </a:endParaRPr>
+          </a:p>
+          <a:p>
+            <a:endParaRPr lang="ko-KR" altLang="en-US" dirty="0">
+              <a:latin typeface="ADLaM Display" panose="02010000000000000000" pitchFamily="2" charset="0"/>
+              <a:cs typeface="ADLaM Display" panose="02010000000000000000" pitchFamily="2" charset="0"/>
+            </a:endParaRPr>
+          </a:p>
+        </p:txBody>
+      </p:sp>
+      <p:pic>
+        <p:nvPicPr>
+          <p:cNvPr id="3" name="그림 2">
+            <a:extLst>
+              <a:ext uri="{FF2B5EF4-FFF2-40B4-BE49-F238E27FC236}">
+                <a16:creationId xmlns:a16="http://schemas.microsoft.com/office/drawing/2014/main" id="{BC3080FB-9C6B-D495-EF83-4904BE7DA857}"/>
+              </a:ext>
+            </a:extLst>
+          </p:cNvPr>
+          <p:cNvPicPr>
+            <a:picLocks noChangeAspect="1"/>
+          </p:cNvPicPr>
+          <p:nvPr/>
+        </p:nvPicPr>
+        <p:blipFill>
+          <a:blip r:embed="rId2">
+            <a:extLst>
+              <a:ext uri="{28A0092B-C50C-407E-A947-70E740481C1C}">
+                <a14:useLocalDpi xmlns:a14="http://schemas.microsoft.com/office/drawing/2010/main" val="0"/>
+              </a:ext>
+            </a:extLst>
+          </a:blip>
+          <a:stretch>
+            <a:fillRect/>
+          </a:stretch>
+        </p:blipFill>
+        <p:spPr>
+          <a:xfrm>
+            <a:off x="332508" y="1482661"/>
+            <a:ext cx="11240655" cy="795798"/>
+          </a:xfrm>
+          <a:prstGeom prst="rect">
+            <a:avLst/>
+          </a:prstGeom>
+        </p:spPr>
+      </p:pic>
+      <p:sp>
+        <p:nvSpPr>
+          <p:cNvPr id="6" name="TextBox 5">
+            <a:extLst>
+              <a:ext uri="{FF2B5EF4-FFF2-40B4-BE49-F238E27FC236}">
+                <a16:creationId xmlns:a16="http://schemas.microsoft.com/office/drawing/2014/main" id="{017CD8FB-C8E3-1974-2D3A-B9E42314DE68}"/>
+              </a:ext>
+            </a:extLst>
+          </p:cNvPr>
+          <p:cNvSpPr txBox="1"/>
+          <p:nvPr/>
+        </p:nvSpPr>
+        <p:spPr>
+          <a:xfrm>
+            <a:off x="332508" y="2523831"/>
+            <a:ext cx="10244604" cy="2308324"/>
+          </a:xfrm>
+          <a:prstGeom prst="rect">
+            <a:avLst/>
+          </a:prstGeom>
+          <a:noFill/>
+        </p:spPr>
+        <p:txBody>
+          <a:bodyPr wrap="square" rtlCol="0">
+            <a:spAutoFit/>
+          </a:bodyPr>
+          <a:lstStyle/>
+          <a:p>
+            <a:pPr algn="l" fontAlgn="base">
+              <a:spcBef>
+                <a:spcPts val="600"/>
+              </a:spcBef>
+              <a:spcAft>
+                <a:spcPts val="600"/>
+              </a:spcAft>
+            </a:pPr>
+            <a:r>
+              <a:rPr lang="en-US" altLang="ko-KR" sz="1200" b="0" i="0" dirty="0">
+                <a:solidFill>
+                  <a:srgbClr val="24292F"/>
+                </a:solidFill>
+                <a:effectLst/>
+                <a:latin typeface="ADLaM Display" panose="02010000000000000000" pitchFamily="2" charset="0"/>
+                <a:ea typeface="ADLaM Display" panose="02010000000000000000" pitchFamily="2" charset="0"/>
+                <a:cs typeface="ADLaM Display" panose="02010000000000000000" pitchFamily="2" charset="0"/>
+              </a:rPr>
+              <a:t>2022-08-01 ~ 2023-08-03 </a:t>
+            </a:r>
+            <a:r>
+              <a:rPr lang="ko-KR" altLang="en-US" sz="1200" b="0" i="0" dirty="0">
+                <a:solidFill>
+                  <a:srgbClr val="24292F"/>
+                </a:solidFill>
+                <a:effectLst/>
+                <a:latin typeface="ADLaM Display" panose="02010000000000000000" pitchFamily="2" charset="0"/>
+                <a:cs typeface="ADLaM Display" panose="02010000000000000000" pitchFamily="2" charset="0"/>
+              </a:rPr>
+              <a:t>기간으로 설정하여</a:t>
+            </a:r>
+            <a:r>
+              <a:rPr lang="en-US" altLang="ko-KR" sz="1200" b="0" i="0" dirty="0">
+                <a:solidFill>
+                  <a:srgbClr val="24292F"/>
+                </a:solidFill>
+                <a:effectLst/>
+                <a:latin typeface="ADLaM Display" panose="02010000000000000000" pitchFamily="2" charset="0"/>
+                <a:ea typeface="ADLaM Display" panose="02010000000000000000" pitchFamily="2" charset="0"/>
+                <a:cs typeface="ADLaM Display" panose="02010000000000000000" pitchFamily="2" charset="0"/>
+              </a:rPr>
+              <a:t>, </a:t>
+            </a:r>
+            <a:r>
+              <a:rPr lang="ko-KR" altLang="en-US" sz="1200" b="0" i="0" dirty="0">
+                <a:solidFill>
+                  <a:srgbClr val="24292F"/>
+                </a:solidFill>
+                <a:effectLst/>
+                <a:latin typeface="ADLaM Display" panose="02010000000000000000" pitchFamily="2" charset="0"/>
+                <a:cs typeface="ADLaM Display" panose="02010000000000000000" pitchFamily="2" charset="0"/>
+              </a:rPr>
+              <a:t>개인적인 의견으로 </a:t>
+            </a:r>
+            <a:r>
+              <a:rPr lang="en-US" altLang="ko-KR" sz="1200" b="0" i="0" dirty="0">
+                <a:solidFill>
+                  <a:srgbClr val="24292F"/>
+                </a:solidFill>
+                <a:effectLst/>
+                <a:latin typeface="ADLaM Display" panose="02010000000000000000" pitchFamily="2" charset="0"/>
+                <a:ea typeface="ADLaM Display" panose="02010000000000000000" pitchFamily="2" charset="0"/>
+                <a:cs typeface="ADLaM Display" panose="02010000000000000000" pitchFamily="2" charset="0"/>
+              </a:rPr>
+              <a:t>Retain User</a:t>
+            </a:r>
+            <a:r>
+              <a:rPr lang="ko-KR" altLang="en-US" sz="1200" b="0" i="0" dirty="0">
+                <a:solidFill>
+                  <a:srgbClr val="24292F"/>
+                </a:solidFill>
+                <a:effectLst/>
+                <a:latin typeface="ADLaM Display" panose="02010000000000000000" pitchFamily="2" charset="0"/>
+                <a:cs typeface="ADLaM Display" panose="02010000000000000000" pitchFamily="2" charset="0"/>
+              </a:rPr>
+              <a:t>를 쪼개 보았습니다</a:t>
+            </a:r>
+            <a:r>
+              <a:rPr lang="en-US" altLang="ko-KR" sz="1200" b="0" i="0" dirty="0">
+                <a:solidFill>
+                  <a:srgbClr val="24292F"/>
+                </a:solidFill>
+                <a:effectLst/>
+                <a:latin typeface="ADLaM Display" panose="02010000000000000000" pitchFamily="2" charset="0"/>
+                <a:ea typeface="ADLaM Display" panose="02010000000000000000" pitchFamily="2" charset="0"/>
+                <a:cs typeface="ADLaM Display" panose="02010000000000000000" pitchFamily="2" charset="0"/>
+              </a:rPr>
+              <a:t>.</a:t>
+            </a:r>
+          </a:p>
+          <a:p>
+            <a:pPr algn="l" fontAlgn="base">
+              <a:spcBef>
+                <a:spcPts val="600"/>
+              </a:spcBef>
+              <a:spcAft>
+                <a:spcPts val="600"/>
+              </a:spcAft>
+            </a:pPr>
+            <a:r>
+              <a:rPr lang="ko-KR" altLang="en-US" sz="1200" b="0" i="0" dirty="0" err="1">
+                <a:solidFill>
+                  <a:srgbClr val="24292F"/>
+                </a:solidFill>
+                <a:effectLst/>
+                <a:latin typeface="ADLaM Display" panose="02010000000000000000" pitchFamily="2" charset="0"/>
+                <a:cs typeface="ADLaM Display" panose="02010000000000000000" pitchFamily="2" charset="0"/>
+              </a:rPr>
+              <a:t>배달어플은</a:t>
+            </a:r>
+            <a:r>
+              <a:rPr lang="ko-KR" altLang="en-US" sz="1200" b="0" i="0" dirty="0">
+                <a:solidFill>
+                  <a:srgbClr val="24292F"/>
+                </a:solidFill>
+                <a:effectLst/>
+                <a:latin typeface="ADLaM Display" panose="02010000000000000000" pitchFamily="2" charset="0"/>
+                <a:cs typeface="ADLaM Display" panose="02010000000000000000" pitchFamily="2" charset="0"/>
+              </a:rPr>
+              <a:t> 유저들의 사용 간격이 짧다고 생각하기 때문에</a:t>
+            </a:r>
+            <a:r>
+              <a:rPr lang="en-US" altLang="ko-KR" sz="1200" b="0" i="0" dirty="0">
+                <a:solidFill>
+                  <a:srgbClr val="24292F"/>
+                </a:solidFill>
+                <a:effectLst/>
+                <a:latin typeface="ADLaM Display" panose="02010000000000000000" pitchFamily="2" charset="0"/>
+                <a:ea typeface="ADLaM Display" panose="02010000000000000000" pitchFamily="2" charset="0"/>
+                <a:cs typeface="ADLaM Display" panose="02010000000000000000" pitchFamily="2" charset="0"/>
+              </a:rPr>
+              <a:t>, </a:t>
+            </a:r>
+            <a:r>
+              <a:rPr lang="ko-KR" altLang="en-US" sz="1200" b="0" i="0" dirty="0">
+                <a:solidFill>
+                  <a:srgbClr val="24292F"/>
+                </a:solidFill>
+                <a:effectLst/>
+                <a:latin typeface="ADLaM Display" panose="02010000000000000000" pitchFamily="2" charset="0"/>
+                <a:cs typeface="ADLaM Display" panose="02010000000000000000" pitchFamily="2" charset="0"/>
+              </a:rPr>
+              <a:t>주의 주기로 </a:t>
+            </a:r>
+            <a:r>
+              <a:rPr lang="ko-KR" altLang="en-US" sz="1200" b="0" i="0" dirty="0" err="1">
+                <a:solidFill>
+                  <a:srgbClr val="24292F"/>
+                </a:solidFill>
+                <a:effectLst/>
+                <a:latin typeface="ADLaM Display" panose="02010000000000000000" pitchFamily="2" charset="0"/>
+                <a:cs typeface="ADLaM Display" panose="02010000000000000000" pitchFamily="2" charset="0"/>
+              </a:rPr>
+              <a:t>리텐션으로</a:t>
+            </a:r>
+            <a:r>
+              <a:rPr lang="ko-KR" altLang="en-US" sz="1200" b="0" i="0" dirty="0">
+                <a:solidFill>
+                  <a:srgbClr val="24292F"/>
+                </a:solidFill>
+                <a:effectLst/>
+                <a:latin typeface="ADLaM Display" panose="02010000000000000000" pitchFamily="2" charset="0"/>
+                <a:cs typeface="ADLaM Display" panose="02010000000000000000" pitchFamily="2" charset="0"/>
+              </a:rPr>
+              <a:t> 설정했습니다</a:t>
+            </a:r>
+            <a:r>
+              <a:rPr lang="en-US" altLang="ko-KR" sz="1200" b="0" i="0" dirty="0">
+                <a:solidFill>
+                  <a:srgbClr val="24292F"/>
+                </a:solidFill>
+                <a:effectLst/>
+                <a:latin typeface="ADLaM Display" panose="02010000000000000000" pitchFamily="2" charset="0"/>
+                <a:ea typeface="ADLaM Display" panose="02010000000000000000" pitchFamily="2" charset="0"/>
+                <a:cs typeface="ADLaM Display" panose="02010000000000000000" pitchFamily="2" charset="0"/>
+              </a:rPr>
+              <a:t>. </a:t>
+            </a:r>
+            <a:r>
+              <a:rPr lang="ko-KR" altLang="en-US" sz="1200" b="0" i="0" dirty="0">
+                <a:solidFill>
+                  <a:srgbClr val="24292F"/>
+                </a:solidFill>
+                <a:effectLst/>
+                <a:latin typeface="ADLaM Display" panose="02010000000000000000" pitchFamily="2" charset="0"/>
+                <a:cs typeface="ADLaM Display" panose="02010000000000000000" pitchFamily="2" charset="0"/>
+              </a:rPr>
+              <a:t>저는</a:t>
+            </a:r>
+          </a:p>
+          <a:p>
+            <a:pPr algn="l" fontAlgn="base">
+              <a:spcBef>
+                <a:spcPts val="600"/>
+              </a:spcBef>
+              <a:spcAft>
+                <a:spcPts val="600"/>
+              </a:spcAft>
+            </a:pPr>
+            <a:r>
+              <a:rPr lang="ko-KR" altLang="en-US" sz="1200" b="0" i="0" dirty="0">
+                <a:solidFill>
+                  <a:srgbClr val="24292F"/>
+                </a:solidFill>
+                <a:effectLst/>
+                <a:latin typeface="ADLaM Display" panose="02010000000000000000" pitchFamily="2" charset="0"/>
+                <a:cs typeface="ADLaM Display" panose="02010000000000000000" pitchFamily="2" charset="0"/>
+              </a:rPr>
+              <a:t>바로 전 주에 사용했고</a:t>
+            </a:r>
+            <a:r>
+              <a:rPr lang="en-US" altLang="ko-KR" sz="1200" b="0" i="0" dirty="0">
+                <a:solidFill>
+                  <a:srgbClr val="24292F"/>
+                </a:solidFill>
+                <a:effectLst/>
+                <a:latin typeface="ADLaM Display" panose="02010000000000000000" pitchFamily="2" charset="0"/>
+                <a:ea typeface="ADLaM Display" panose="02010000000000000000" pitchFamily="2" charset="0"/>
+                <a:cs typeface="ADLaM Display" panose="02010000000000000000" pitchFamily="2" charset="0"/>
+              </a:rPr>
+              <a:t>, </a:t>
+            </a:r>
+            <a:r>
+              <a:rPr lang="ko-KR" altLang="en-US" sz="1200" b="0" i="0" dirty="0">
+                <a:solidFill>
+                  <a:srgbClr val="24292F"/>
+                </a:solidFill>
+                <a:effectLst/>
+                <a:latin typeface="ADLaM Display" panose="02010000000000000000" pitchFamily="2" charset="0"/>
+                <a:cs typeface="ADLaM Display" panose="02010000000000000000" pitchFamily="2" charset="0"/>
+              </a:rPr>
+              <a:t>그 다음주에 사용했다면 기존유저</a:t>
+            </a:r>
+            <a:r>
+              <a:rPr lang="en-US" altLang="ko-KR" sz="1200" b="0" i="0" dirty="0">
+                <a:solidFill>
+                  <a:srgbClr val="24292F"/>
+                </a:solidFill>
+                <a:effectLst/>
+                <a:latin typeface="ADLaM Display" panose="02010000000000000000" pitchFamily="2" charset="0"/>
+                <a:ea typeface="ADLaM Display" panose="02010000000000000000" pitchFamily="2" charset="0"/>
+                <a:cs typeface="ADLaM Display" panose="02010000000000000000" pitchFamily="2" charset="0"/>
+              </a:rPr>
+              <a:t>(Current)</a:t>
+            </a:r>
+            <a:r>
+              <a:rPr lang="ko-KR" altLang="en-US" sz="1200" b="0" i="0" dirty="0">
+                <a:solidFill>
+                  <a:srgbClr val="24292F"/>
+                </a:solidFill>
+                <a:effectLst/>
+                <a:latin typeface="ADLaM Display" panose="02010000000000000000" pitchFamily="2" charset="0"/>
+                <a:cs typeface="ADLaM Display" panose="02010000000000000000" pitchFamily="2" charset="0"/>
+              </a:rPr>
+              <a:t>로 설정했습니다</a:t>
+            </a:r>
+            <a:r>
+              <a:rPr lang="en-US" altLang="ko-KR" sz="1200" b="0" i="0" dirty="0">
+                <a:solidFill>
+                  <a:srgbClr val="24292F"/>
+                </a:solidFill>
+                <a:effectLst/>
+                <a:latin typeface="ADLaM Display" panose="02010000000000000000" pitchFamily="2" charset="0"/>
+                <a:ea typeface="ADLaM Display" panose="02010000000000000000" pitchFamily="2" charset="0"/>
+                <a:cs typeface="ADLaM Display" panose="02010000000000000000" pitchFamily="2" charset="0"/>
+              </a:rPr>
+              <a:t>.</a:t>
+            </a:r>
+          </a:p>
+          <a:p>
+            <a:pPr algn="l" fontAlgn="base">
+              <a:spcBef>
+                <a:spcPts val="600"/>
+              </a:spcBef>
+              <a:spcAft>
+                <a:spcPts val="600"/>
+              </a:spcAft>
+            </a:pPr>
+            <a:r>
+              <a:rPr lang="en-US" altLang="ko-KR" sz="1200" b="0" i="0" dirty="0">
+                <a:solidFill>
+                  <a:srgbClr val="24292F"/>
+                </a:solidFill>
+                <a:effectLst/>
+                <a:latin typeface="ADLaM Display" panose="02010000000000000000" pitchFamily="2" charset="0"/>
+                <a:ea typeface="ADLaM Display" panose="02010000000000000000" pitchFamily="2" charset="0"/>
+                <a:cs typeface="ADLaM Display" panose="02010000000000000000" pitchFamily="2" charset="0"/>
+              </a:rPr>
+              <a:t>2</a:t>
+            </a:r>
+            <a:r>
+              <a:rPr lang="ko-KR" altLang="en-US" sz="1200" b="0" i="0" dirty="0">
+                <a:solidFill>
+                  <a:srgbClr val="24292F"/>
+                </a:solidFill>
+                <a:effectLst/>
+                <a:latin typeface="ADLaM Display" panose="02010000000000000000" pitchFamily="2" charset="0"/>
+                <a:cs typeface="ADLaM Display" panose="02010000000000000000" pitchFamily="2" charset="0"/>
+              </a:rPr>
+              <a:t>주 이상 </a:t>
+            </a:r>
+            <a:r>
+              <a:rPr lang="ko-KR" altLang="en-US" sz="1200" b="0" i="0" dirty="0" err="1">
+                <a:solidFill>
+                  <a:srgbClr val="24292F"/>
+                </a:solidFill>
+                <a:effectLst/>
+                <a:latin typeface="ADLaM Display" panose="02010000000000000000" pitchFamily="2" charset="0"/>
+                <a:cs typeface="ADLaM Display" panose="02010000000000000000" pitchFamily="2" charset="0"/>
+              </a:rPr>
+              <a:t>텀을</a:t>
+            </a:r>
+            <a:r>
+              <a:rPr lang="ko-KR" altLang="en-US" sz="1200" b="0" i="0" dirty="0">
+                <a:solidFill>
+                  <a:srgbClr val="24292F"/>
+                </a:solidFill>
+                <a:effectLst/>
+                <a:latin typeface="ADLaM Display" panose="02010000000000000000" pitchFamily="2" charset="0"/>
+                <a:cs typeface="ADLaM Display" panose="02010000000000000000" pitchFamily="2" charset="0"/>
+              </a:rPr>
+              <a:t> 두고 다시 사용했다면 복귀유저</a:t>
+            </a:r>
+            <a:r>
+              <a:rPr lang="en-US" altLang="ko-KR" sz="1200" b="0" i="0" dirty="0">
+                <a:solidFill>
+                  <a:srgbClr val="24292F"/>
+                </a:solidFill>
+                <a:effectLst/>
+                <a:latin typeface="ADLaM Display" panose="02010000000000000000" pitchFamily="2" charset="0"/>
+                <a:ea typeface="ADLaM Display" panose="02010000000000000000" pitchFamily="2" charset="0"/>
+                <a:cs typeface="ADLaM Display" panose="02010000000000000000" pitchFamily="2" charset="0"/>
+              </a:rPr>
+              <a:t>(Resurrected)</a:t>
+            </a:r>
+            <a:r>
+              <a:rPr lang="ko-KR" altLang="en-US" sz="1200" b="0" i="0" dirty="0">
+                <a:solidFill>
+                  <a:srgbClr val="24292F"/>
+                </a:solidFill>
+                <a:effectLst/>
+                <a:latin typeface="ADLaM Display" panose="02010000000000000000" pitchFamily="2" charset="0"/>
+                <a:cs typeface="ADLaM Display" panose="02010000000000000000" pitchFamily="2" charset="0"/>
+              </a:rPr>
+              <a:t>로 설정했습니다</a:t>
+            </a:r>
+            <a:r>
+              <a:rPr lang="en-US" altLang="ko-KR" sz="1200" b="0" i="0" dirty="0">
+                <a:solidFill>
+                  <a:srgbClr val="24292F"/>
+                </a:solidFill>
+                <a:effectLst/>
+                <a:latin typeface="ADLaM Display" panose="02010000000000000000" pitchFamily="2" charset="0"/>
+                <a:ea typeface="ADLaM Display" panose="02010000000000000000" pitchFamily="2" charset="0"/>
+                <a:cs typeface="ADLaM Display" panose="02010000000000000000" pitchFamily="2" charset="0"/>
+              </a:rPr>
+              <a:t>.</a:t>
+            </a:r>
+          </a:p>
+          <a:p>
+            <a:pPr algn="l" fontAlgn="base">
+              <a:spcBef>
+                <a:spcPts val="600"/>
+              </a:spcBef>
+              <a:spcAft>
+                <a:spcPts val="600"/>
+              </a:spcAft>
+            </a:pPr>
+            <a:r>
+              <a:rPr lang="ko-KR" altLang="en-US" sz="1200" b="0" i="0" dirty="0">
+                <a:solidFill>
+                  <a:srgbClr val="24292F"/>
+                </a:solidFill>
+                <a:effectLst/>
+                <a:latin typeface="ADLaM Display" panose="02010000000000000000" pitchFamily="2" charset="0"/>
+                <a:cs typeface="ADLaM Display" panose="02010000000000000000" pitchFamily="2" charset="0"/>
+              </a:rPr>
+              <a:t>처음 들어가고 사용하지 않았다면 휴면유저</a:t>
+            </a:r>
+            <a:r>
+              <a:rPr lang="en-US" altLang="ko-KR" sz="1200" b="0" i="0" dirty="0">
+                <a:solidFill>
+                  <a:srgbClr val="24292F"/>
+                </a:solidFill>
+                <a:effectLst/>
+                <a:latin typeface="ADLaM Display" panose="02010000000000000000" pitchFamily="2" charset="0"/>
+                <a:ea typeface="ADLaM Display" panose="02010000000000000000" pitchFamily="2" charset="0"/>
+                <a:cs typeface="ADLaM Display" panose="02010000000000000000" pitchFamily="2" charset="0"/>
+              </a:rPr>
+              <a:t>(Dormant)</a:t>
+            </a:r>
+            <a:r>
+              <a:rPr lang="ko-KR" altLang="en-US" sz="1200" b="0" i="0" dirty="0">
+                <a:solidFill>
+                  <a:srgbClr val="24292F"/>
+                </a:solidFill>
+                <a:effectLst/>
+                <a:latin typeface="ADLaM Display" panose="02010000000000000000" pitchFamily="2" charset="0"/>
+                <a:cs typeface="ADLaM Display" panose="02010000000000000000" pitchFamily="2" charset="0"/>
+              </a:rPr>
+              <a:t>로 설정했습니다</a:t>
+            </a:r>
+            <a:r>
+              <a:rPr lang="en-US" altLang="ko-KR" sz="1200" b="0" i="0" dirty="0">
+                <a:solidFill>
+                  <a:srgbClr val="24292F"/>
+                </a:solidFill>
+                <a:effectLst/>
+                <a:latin typeface="ADLaM Display" panose="02010000000000000000" pitchFamily="2" charset="0"/>
+                <a:ea typeface="ADLaM Display" panose="02010000000000000000" pitchFamily="2" charset="0"/>
+                <a:cs typeface="ADLaM Display" panose="02010000000000000000" pitchFamily="2" charset="0"/>
+              </a:rPr>
+              <a:t>.</a:t>
+            </a:r>
+          </a:p>
+          <a:p>
+            <a:pPr algn="l" fontAlgn="base">
+              <a:spcBef>
+                <a:spcPts val="600"/>
+              </a:spcBef>
+              <a:spcAft>
+                <a:spcPts val="600"/>
+              </a:spcAft>
+            </a:pPr>
+            <a:r>
+              <a:rPr lang="ko-KR" altLang="en-US" sz="1200" b="0" i="0" dirty="0">
+                <a:solidFill>
+                  <a:srgbClr val="24292F"/>
+                </a:solidFill>
+                <a:effectLst/>
+                <a:latin typeface="ADLaM Display" panose="02010000000000000000" pitchFamily="2" charset="0"/>
+                <a:cs typeface="ADLaM Display" panose="02010000000000000000" pitchFamily="2" charset="0"/>
+              </a:rPr>
+              <a:t>주차마다 </a:t>
+            </a:r>
+            <a:r>
+              <a:rPr lang="en-US" altLang="ko-KR" sz="1200" b="0" i="0" dirty="0">
+                <a:solidFill>
+                  <a:srgbClr val="24292F"/>
+                </a:solidFill>
+                <a:effectLst/>
+                <a:latin typeface="ADLaM Display" panose="02010000000000000000" pitchFamily="2" charset="0"/>
+                <a:ea typeface="ADLaM Display" panose="02010000000000000000" pitchFamily="2" charset="0"/>
+                <a:cs typeface="ADLaM Display" panose="02010000000000000000" pitchFamily="2" charset="0"/>
+              </a:rPr>
+              <a:t>'</a:t>
+            </a:r>
+            <a:r>
+              <a:rPr lang="ko-KR" altLang="en-US" sz="1200" b="0" i="0" dirty="0">
+                <a:solidFill>
+                  <a:srgbClr val="24292F"/>
+                </a:solidFill>
+                <a:effectLst/>
+                <a:latin typeface="ADLaM Display" panose="02010000000000000000" pitchFamily="2" charset="0"/>
+                <a:cs typeface="ADLaM Display" panose="02010000000000000000" pitchFamily="2" charset="0"/>
+              </a:rPr>
+              <a:t>신규</a:t>
+            </a:r>
+            <a:r>
+              <a:rPr lang="en-US" altLang="ko-KR" sz="1200" b="0" i="0" dirty="0">
+                <a:solidFill>
+                  <a:srgbClr val="24292F"/>
+                </a:solidFill>
+                <a:effectLst/>
+                <a:latin typeface="ADLaM Display" panose="02010000000000000000" pitchFamily="2" charset="0"/>
+                <a:ea typeface="ADLaM Display" panose="02010000000000000000" pitchFamily="2" charset="0"/>
+                <a:cs typeface="ADLaM Display" panose="02010000000000000000" pitchFamily="2" charset="0"/>
+              </a:rPr>
+              <a:t>/</a:t>
+            </a:r>
+            <a:r>
+              <a:rPr lang="ko-KR" altLang="en-US" sz="1200" b="0" i="0" dirty="0">
+                <a:solidFill>
+                  <a:srgbClr val="24292F"/>
+                </a:solidFill>
+                <a:effectLst/>
+                <a:latin typeface="ADLaM Display" panose="02010000000000000000" pitchFamily="2" charset="0"/>
+                <a:cs typeface="ADLaM Display" panose="02010000000000000000" pitchFamily="2" charset="0"/>
+              </a:rPr>
+              <a:t>기존</a:t>
+            </a:r>
+            <a:r>
+              <a:rPr lang="en-US" altLang="ko-KR" sz="1200" b="0" i="0" dirty="0">
+                <a:solidFill>
+                  <a:srgbClr val="24292F"/>
+                </a:solidFill>
+                <a:effectLst/>
+                <a:latin typeface="ADLaM Display" panose="02010000000000000000" pitchFamily="2" charset="0"/>
+                <a:ea typeface="ADLaM Display" panose="02010000000000000000" pitchFamily="2" charset="0"/>
+                <a:cs typeface="ADLaM Display" panose="02010000000000000000" pitchFamily="2" charset="0"/>
+              </a:rPr>
+              <a:t>/</a:t>
+            </a:r>
+            <a:r>
+              <a:rPr lang="ko-KR" altLang="en-US" sz="1200" b="0" i="0" dirty="0">
+                <a:solidFill>
+                  <a:srgbClr val="24292F"/>
+                </a:solidFill>
+                <a:effectLst/>
+                <a:latin typeface="ADLaM Display" panose="02010000000000000000" pitchFamily="2" charset="0"/>
+                <a:cs typeface="ADLaM Display" panose="02010000000000000000" pitchFamily="2" charset="0"/>
+              </a:rPr>
+              <a:t>복귀</a:t>
+            </a:r>
+            <a:r>
+              <a:rPr lang="en-US" altLang="ko-KR" sz="1200" b="0" i="0" dirty="0">
+                <a:solidFill>
+                  <a:srgbClr val="24292F"/>
+                </a:solidFill>
+                <a:effectLst/>
+                <a:latin typeface="ADLaM Display" panose="02010000000000000000" pitchFamily="2" charset="0"/>
+                <a:ea typeface="ADLaM Display" panose="02010000000000000000" pitchFamily="2" charset="0"/>
+                <a:cs typeface="ADLaM Display" panose="02010000000000000000" pitchFamily="2" charset="0"/>
+              </a:rPr>
+              <a:t>/</a:t>
+            </a:r>
+            <a:r>
+              <a:rPr lang="ko-KR" altLang="en-US" sz="1200" b="0" i="0" dirty="0">
+                <a:solidFill>
+                  <a:srgbClr val="24292F"/>
+                </a:solidFill>
+                <a:effectLst/>
+                <a:latin typeface="ADLaM Display" panose="02010000000000000000" pitchFamily="2" charset="0"/>
+                <a:cs typeface="ADLaM Display" panose="02010000000000000000" pitchFamily="2" charset="0"/>
+              </a:rPr>
+              <a:t>휴면</a:t>
+            </a:r>
+            <a:r>
+              <a:rPr lang="en-US" altLang="ko-KR" sz="1200" b="0" i="0" dirty="0">
+                <a:solidFill>
+                  <a:srgbClr val="24292F"/>
+                </a:solidFill>
+                <a:effectLst/>
+                <a:latin typeface="ADLaM Display" panose="02010000000000000000" pitchFamily="2" charset="0"/>
+                <a:ea typeface="ADLaM Display" panose="02010000000000000000" pitchFamily="2" charset="0"/>
+                <a:cs typeface="ADLaM Display" panose="02010000000000000000" pitchFamily="2" charset="0"/>
+              </a:rPr>
+              <a:t>' </a:t>
+            </a:r>
+            <a:r>
+              <a:rPr lang="ko-KR" altLang="en-US" sz="1200" b="0" i="0" dirty="0">
+                <a:solidFill>
+                  <a:srgbClr val="24292F"/>
+                </a:solidFill>
+                <a:effectLst/>
+                <a:latin typeface="ADLaM Display" panose="02010000000000000000" pitchFamily="2" charset="0"/>
+                <a:cs typeface="ADLaM Display" panose="02010000000000000000" pitchFamily="2" charset="0"/>
+              </a:rPr>
+              <a:t>유저를 새로 계산하는 쿼리입니다</a:t>
+            </a:r>
+            <a:r>
+              <a:rPr lang="en-US" altLang="ko-KR" sz="1200" b="0" i="0" dirty="0">
+                <a:solidFill>
+                  <a:srgbClr val="24292F"/>
+                </a:solidFill>
+                <a:effectLst/>
+                <a:latin typeface="ADLaM Display" panose="02010000000000000000" pitchFamily="2" charset="0"/>
+                <a:ea typeface="ADLaM Display" panose="02010000000000000000" pitchFamily="2" charset="0"/>
+                <a:cs typeface="ADLaM Display" panose="02010000000000000000" pitchFamily="2" charset="0"/>
+              </a:rPr>
+              <a:t>.</a:t>
+            </a:r>
+          </a:p>
+          <a:p>
+            <a:pPr algn="l" fontAlgn="base">
+              <a:spcBef>
+                <a:spcPts val="600"/>
+              </a:spcBef>
+              <a:spcAft>
+                <a:spcPts val="600"/>
+              </a:spcAft>
+            </a:pPr>
+            <a:r>
+              <a:rPr lang="en-US" altLang="ko-KR" sz="1200" b="0" i="0" dirty="0">
+                <a:solidFill>
+                  <a:srgbClr val="24292F"/>
+                </a:solidFill>
+                <a:effectLst/>
+                <a:latin typeface="ADLaM Display" panose="02010000000000000000" pitchFamily="2" charset="0"/>
+                <a:ea typeface="ADLaM Display" panose="02010000000000000000" pitchFamily="2" charset="0"/>
+                <a:cs typeface="ADLaM Display" panose="02010000000000000000" pitchFamily="2" charset="0"/>
+              </a:rPr>
+              <a:t> </a:t>
+            </a:r>
+          </a:p>
+        </p:txBody>
+      </p:sp>
+    </p:spTree>
+    <p:extLst>
+      <p:ext uri="{BB962C8B-B14F-4D97-AF65-F5344CB8AC3E}">
+        <p14:creationId xmlns:p14="http://schemas.microsoft.com/office/powerpoint/2010/main" val="1005954930"/>
+      </p:ext>
+    </p:extLst>
+  </p:cSld>
+  <p:clrMapOvr>
+    <a:masterClrMapping/>
+  </p:clrMapOvr>
+</p:sld>
+</file>
+
+<file path=ppt/slides/slide17.xml><?xml version="1.0" encoding="utf-8"?>
+<p:sld xmlns:a="http://schemas.openxmlformats.org/drawingml/2006/main" xmlns:r="http://schemas.openxmlformats.org/officeDocument/2006/relationships" xmlns:p="http://schemas.openxmlformats.org/presentationml/2006/main">
+  <p:cSld>
+    <p:spTree>
+      <p:nvGrpSpPr>
+        <p:cNvPr id="1" name="">
+          <a:extLst>
+            <a:ext uri="{FF2B5EF4-FFF2-40B4-BE49-F238E27FC236}">
+              <a16:creationId xmlns:a16="http://schemas.microsoft.com/office/drawing/2014/main" id="{F2C6C333-3437-D285-21BB-C5A32FA47542}"/>
+            </a:ext>
+          </a:extLst>
+        </p:cNvPr>
+        <p:cNvGrpSpPr/>
+        <p:nvPr/>
+      </p:nvGrpSpPr>
+      <p:grpSpPr>
+        <a:xfrm>
+          <a:off x="0" y="0"/>
+          <a:ext cx="0" cy="0"/>
+          <a:chOff x="0" y="0"/>
+          <a:chExt cx="0" cy="0"/>
+        </a:xfrm>
+      </p:grpSpPr>
+      <p:sp>
+        <p:nvSpPr>
+          <p:cNvPr id="4" name="TextBox 3">
+            <a:extLst>
+              <a:ext uri="{FF2B5EF4-FFF2-40B4-BE49-F238E27FC236}">
+                <a16:creationId xmlns:a16="http://schemas.microsoft.com/office/drawing/2014/main" id="{68D68C98-D367-D901-1B0F-2357CC56B335}"/>
+              </a:ext>
+            </a:extLst>
+          </p:cNvPr>
+          <p:cNvSpPr txBox="1"/>
+          <p:nvPr/>
+        </p:nvSpPr>
+        <p:spPr>
+          <a:xfrm>
+            <a:off x="166255" y="175491"/>
+            <a:ext cx="11859490" cy="1501950"/>
+          </a:xfrm>
+          <a:prstGeom prst="rect">
+            <a:avLst/>
+          </a:prstGeom>
+          <a:noFill/>
+        </p:spPr>
+        <p:txBody>
+          <a:bodyPr wrap="square" rtlCol="0">
+            <a:spAutoFit/>
+          </a:bodyPr>
+          <a:lstStyle/>
+          <a:p>
+            <a:pPr marL="0" marR="0" indent="0" algn="just" fontAlgn="base" latinLnBrk="1">
+              <a:lnSpc>
+                <a:spcPct val="160000"/>
+              </a:lnSpc>
+              <a:spcBef>
+                <a:spcPts val="0"/>
+              </a:spcBef>
+              <a:spcAft>
+                <a:spcPts val="0"/>
+              </a:spcAft>
+            </a:pPr>
+            <a:r>
+              <a:rPr lang="en-US" altLang="ko-KR" sz="2800" b="1" kern="0" spc="0" dirty="0">
+                <a:solidFill>
+                  <a:srgbClr val="000000"/>
+                </a:solidFill>
+                <a:effectLst/>
+                <a:latin typeface="ADLaM Display" panose="02010000000000000000" pitchFamily="2" charset="0"/>
+                <a:ea typeface="ADLaM Display" panose="02010000000000000000" pitchFamily="2" charset="0"/>
+                <a:cs typeface="ADLaM Display" panose="02010000000000000000" pitchFamily="2" charset="0"/>
+              </a:rPr>
+              <a:t>Firebase </a:t>
+            </a:r>
+            <a:r>
+              <a:rPr lang="ko-KR" altLang="en-US" sz="2800" b="1" kern="0" spc="0" dirty="0">
+                <a:solidFill>
+                  <a:srgbClr val="000000"/>
+                </a:solidFill>
+                <a:effectLst/>
+                <a:latin typeface="ADLaM Display" panose="02010000000000000000" pitchFamily="2" charset="0"/>
+                <a:ea typeface="함초롬바탕" panose="02030604000101010101" pitchFamily="18" charset="-127"/>
+                <a:cs typeface="ADLaM Display" panose="02010000000000000000" pitchFamily="2" charset="0"/>
+              </a:rPr>
+              <a:t>앱 로그 기반 데이터 분석 </a:t>
+            </a:r>
+            <a:endParaRPr lang="en-US" altLang="ko-KR" sz="2800" b="1" kern="0" spc="0" dirty="0">
+              <a:solidFill>
+                <a:srgbClr val="000000"/>
+              </a:solidFill>
+              <a:effectLst/>
+              <a:latin typeface="ADLaM Display" panose="02010000000000000000" pitchFamily="2" charset="0"/>
+              <a:ea typeface="ADLaM Display" panose="02010000000000000000" pitchFamily="2" charset="0"/>
+              <a:cs typeface="ADLaM Display" panose="02010000000000000000" pitchFamily="2" charset="0"/>
+            </a:endParaRPr>
+          </a:p>
+          <a:p>
+            <a:pPr algn="just" fontAlgn="base">
+              <a:lnSpc>
+                <a:spcPct val="160000"/>
+              </a:lnSpc>
+            </a:pPr>
+            <a:r>
+              <a:rPr lang="en-US" altLang="ko-KR" sz="1800" kern="0" spc="0" dirty="0">
+                <a:solidFill>
+                  <a:srgbClr val="000000"/>
+                </a:solidFill>
+                <a:effectLst/>
+                <a:latin typeface="ADLaM Display" panose="02010000000000000000" pitchFamily="2" charset="0"/>
+                <a:ea typeface="ADLaM Display" panose="02010000000000000000" pitchFamily="2" charset="0"/>
+                <a:cs typeface="ADLaM Display" panose="02010000000000000000" pitchFamily="2" charset="0"/>
+              </a:rPr>
+              <a:t>&lt;</a:t>
+            </a:r>
+            <a:r>
+              <a:rPr lang="en-US" altLang="ko-KR" kern="0" dirty="0">
+                <a:solidFill>
+                  <a:srgbClr val="000000"/>
+                </a:solidFill>
+                <a:latin typeface="ADLaM Display" panose="02010000000000000000" pitchFamily="2" charset="0"/>
+                <a:ea typeface="ADLaM Display" panose="02010000000000000000" pitchFamily="2" charset="0"/>
+                <a:cs typeface="ADLaM Display" panose="02010000000000000000" pitchFamily="2" charset="0"/>
+              </a:rPr>
+              <a:t>4</a:t>
+            </a:r>
+            <a:r>
+              <a:rPr lang="en-US" altLang="ko-KR" sz="1800" kern="0" spc="0" dirty="0">
+                <a:solidFill>
+                  <a:srgbClr val="000000"/>
+                </a:solidFill>
+                <a:effectLst/>
+                <a:latin typeface="ADLaM Display" panose="02010000000000000000" pitchFamily="2" charset="0"/>
+                <a:ea typeface="ADLaM Display" panose="02010000000000000000" pitchFamily="2" charset="0"/>
+                <a:cs typeface="ADLaM Display" panose="02010000000000000000" pitchFamily="2" charset="0"/>
+              </a:rPr>
+              <a:t>. Retain</a:t>
+            </a:r>
+            <a:r>
+              <a:rPr lang="ko-KR" altLang="en-US" sz="1800" kern="0" spc="0" dirty="0">
+                <a:solidFill>
+                  <a:srgbClr val="000000"/>
+                </a:solidFill>
+                <a:effectLst/>
+                <a:latin typeface="ADLaM Display" panose="02010000000000000000" pitchFamily="2" charset="0"/>
+                <a:ea typeface="ADLaM Display" panose="02010000000000000000" pitchFamily="2" charset="0"/>
+                <a:cs typeface="ADLaM Display" panose="02010000000000000000" pitchFamily="2" charset="0"/>
+              </a:rPr>
+              <a:t>유저 분류 </a:t>
+            </a:r>
+            <a:r>
+              <a:rPr lang="ko-KR" altLang="en-US" kern="0" dirty="0">
+                <a:solidFill>
+                  <a:srgbClr val="000000"/>
+                </a:solidFill>
+                <a:latin typeface="ADLaM Display" panose="02010000000000000000" pitchFamily="2" charset="0"/>
+                <a:ea typeface="ADLaM Display" panose="02010000000000000000" pitchFamily="2" charset="0"/>
+                <a:cs typeface="ADLaM Display" panose="02010000000000000000" pitchFamily="2" charset="0"/>
+              </a:rPr>
+              <a:t>코호트 시각화 </a:t>
+            </a:r>
+            <a:r>
+              <a:rPr lang="en-US" altLang="ko-KR" kern="0" dirty="0">
+                <a:solidFill>
+                  <a:srgbClr val="000000"/>
+                </a:solidFill>
+                <a:latin typeface="ADLaM Display" panose="02010000000000000000" pitchFamily="2" charset="0"/>
+                <a:ea typeface="ADLaM Display" panose="02010000000000000000" pitchFamily="2" charset="0"/>
+                <a:cs typeface="ADLaM Display" panose="02010000000000000000" pitchFamily="2" charset="0"/>
+              </a:rPr>
+              <a:t>&amp; </a:t>
+            </a:r>
+            <a:r>
+              <a:rPr lang="ko-KR" altLang="en-US" kern="0" dirty="0">
+                <a:solidFill>
+                  <a:srgbClr val="000000"/>
+                </a:solidFill>
+                <a:latin typeface="ADLaM Display" panose="02010000000000000000" pitchFamily="2" charset="0"/>
+                <a:ea typeface="ADLaM Display" panose="02010000000000000000" pitchFamily="2" charset="0"/>
+                <a:cs typeface="ADLaM Display" panose="02010000000000000000" pitchFamily="2" charset="0"/>
+              </a:rPr>
+              <a:t>해석</a:t>
+            </a:r>
+            <a:r>
+              <a:rPr lang="en-US" altLang="ko-KR" kern="0" dirty="0">
+                <a:solidFill>
+                  <a:srgbClr val="000000"/>
+                </a:solidFill>
+                <a:latin typeface="ADLaM Display" panose="02010000000000000000" pitchFamily="2" charset="0"/>
+                <a:ea typeface="ADLaM Display" panose="02010000000000000000" pitchFamily="2" charset="0"/>
+                <a:cs typeface="ADLaM Display" panose="02010000000000000000" pitchFamily="2" charset="0"/>
+              </a:rPr>
+              <a:t>&gt;</a:t>
+            </a:r>
+            <a:endParaRPr lang="en-US" altLang="ko-KR" sz="1800" kern="0" spc="0" dirty="0">
+              <a:solidFill>
+                <a:srgbClr val="000000"/>
+              </a:solidFill>
+              <a:effectLst/>
+              <a:latin typeface="ADLaM Display" panose="02010000000000000000" pitchFamily="2" charset="0"/>
+              <a:ea typeface="ADLaM Display" panose="02010000000000000000" pitchFamily="2" charset="0"/>
+              <a:cs typeface="ADLaM Display" panose="02010000000000000000" pitchFamily="2" charset="0"/>
+            </a:endParaRPr>
+          </a:p>
+          <a:p>
+            <a:endParaRPr lang="ko-KR" altLang="en-US" dirty="0">
+              <a:latin typeface="ADLaM Display" panose="02010000000000000000" pitchFamily="2" charset="0"/>
+              <a:cs typeface="ADLaM Display" panose="02010000000000000000" pitchFamily="2" charset="0"/>
+            </a:endParaRPr>
+          </a:p>
+        </p:txBody>
+      </p:sp>
+      <p:pic>
+        <p:nvPicPr>
+          <p:cNvPr id="3" name="그림 2">
+            <a:extLst>
+              <a:ext uri="{FF2B5EF4-FFF2-40B4-BE49-F238E27FC236}">
+                <a16:creationId xmlns:a16="http://schemas.microsoft.com/office/drawing/2014/main" id="{0BCD7ADC-0128-CE03-88A8-FAA69329024A}"/>
+              </a:ext>
+            </a:extLst>
+          </p:cNvPr>
+          <p:cNvPicPr>
+            <a:picLocks noChangeAspect="1"/>
+          </p:cNvPicPr>
+          <p:nvPr/>
+        </p:nvPicPr>
+        <p:blipFill>
+          <a:blip r:embed="rId2">
+            <a:extLst>
+              <a:ext uri="{28A0092B-C50C-407E-A947-70E740481C1C}">
+                <a14:useLocalDpi xmlns:a14="http://schemas.microsoft.com/office/drawing/2010/main" val="0"/>
+              </a:ext>
+            </a:extLst>
+          </a:blip>
+          <a:stretch>
+            <a:fillRect/>
+          </a:stretch>
+        </p:blipFill>
+        <p:spPr>
+          <a:xfrm>
+            <a:off x="332508" y="1482661"/>
+            <a:ext cx="11240655" cy="795798"/>
+          </a:xfrm>
+          <a:prstGeom prst="rect">
+            <a:avLst/>
+          </a:prstGeom>
+        </p:spPr>
+      </p:pic>
+      <p:sp>
+        <p:nvSpPr>
+          <p:cNvPr id="6" name="TextBox 5">
+            <a:extLst>
+              <a:ext uri="{FF2B5EF4-FFF2-40B4-BE49-F238E27FC236}">
+                <a16:creationId xmlns:a16="http://schemas.microsoft.com/office/drawing/2014/main" id="{BE1A44C1-FB6F-56C4-360B-8E78D5238559}"/>
+              </a:ext>
+            </a:extLst>
+          </p:cNvPr>
+          <p:cNvSpPr txBox="1"/>
+          <p:nvPr/>
+        </p:nvSpPr>
+        <p:spPr>
+          <a:xfrm>
+            <a:off x="332508" y="2521805"/>
+            <a:ext cx="10244604" cy="4185761"/>
+          </a:xfrm>
+          <a:prstGeom prst="rect">
+            <a:avLst/>
+          </a:prstGeom>
+          <a:noFill/>
+        </p:spPr>
+        <p:txBody>
+          <a:bodyPr wrap="square" rtlCol="0">
+            <a:spAutoFit/>
+          </a:bodyPr>
+          <a:lstStyle/>
+          <a:p>
+            <a:pPr algn="l" fontAlgn="base">
+              <a:spcBef>
+                <a:spcPts val="600"/>
+              </a:spcBef>
+              <a:spcAft>
+                <a:spcPts val="600"/>
+              </a:spcAft>
+            </a:pPr>
+            <a:r>
+              <a:rPr lang="ko-KR" altLang="en-US" sz="1200" b="0" i="0" dirty="0">
+                <a:solidFill>
+                  <a:srgbClr val="24292F"/>
+                </a:solidFill>
+                <a:effectLst/>
+                <a:latin typeface="ADLaM Display" panose="02010000000000000000" pitchFamily="2" charset="0"/>
+                <a:cs typeface="ADLaM Display" panose="02010000000000000000" pitchFamily="2" charset="0"/>
+              </a:rPr>
+              <a:t>데이터를 살펴보면</a:t>
+            </a:r>
+            <a:r>
+              <a:rPr lang="en-US" altLang="ko-KR" sz="1200" b="0" i="0" dirty="0">
+                <a:solidFill>
+                  <a:srgbClr val="24292F"/>
+                </a:solidFill>
+                <a:effectLst/>
+                <a:latin typeface="ADLaM Display" panose="02010000000000000000" pitchFamily="2" charset="0"/>
+                <a:ea typeface="ADLaM Display" panose="02010000000000000000" pitchFamily="2" charset="0"/>
+                <a:cs typeface="ADLaM Display" panose="02010000000000000000" pitchFamily="2" charset="0"/>
+              </a:rPr>
+              <a:t>,</a:t>
+            </a:r>
+          </a:p>
+          <a:p>
+            <a:pPr algn="l" fontAlgn="base">
+              <a:spcBef>
+                <a:spcPts val="600"/>
+              </a:spcBef>
+              <a:spcAft>
+                <a:spcPts val="600"/>
+              </a:spcAft>
+            </a:pPr>
+            <a:r>
+              <a:rPr lang="en-US" altLang="ko-KR" sz="1200" b="0" i="0" dirty="0">
+                <a:solidFill>
+                  <a:srgbClr val="24292F"/>
+                </a:solidFill>
+                <a:effectLst/>
+                <a:latin typeface="ADLaM Display" panose="02010000000000000000" pitchFamily="2" charset="0"/>
+                <a:ea typeface="ADLaM Display" panose="02010000000000000000" pitchFamily="2" charset="0"/>
+                <a:cs typeface="ADLaM Display" panose="02010000000000000000" pitchFamily="2" charset="0"/>
+              </a:rPr>
+              <a:t>1) </a:t>
+            </a:r>
+            <a:r>
+              <a:rPr lang="ko-KR" altLang="en-US" sz="1200" b="0" i="0" dirty="0">
+                <a:solidFill>
+                  <a:srgbClr val="24292F"/>
+                </a:solidFill>
+                <a:effectLst/>
+                <a:latin typeface="ADLaM Display" panose="02010000000000000000" pitchFamily="2" charset="0"/>
+                <a:cs typeface="ADLaM Display" panose="02010000000000000000" pitchFamily="2" charset="0"/>
+              </a:rPr>
+              <a:t>신규유저</a:t>
+            </a:r>
+            <a:r>
+              <a:rPr lang="en-US" altLang="ko-KR" sz="1200" b="0" i="0" dirty="0">
+                <a:solidFill>
+                  <a:srgbClr val="24292F"/>
+                </a:solidFill>
+                <a:effectLst/>
+                <a:latin typeface="ADLaM Display" panose="02010000000000000000" pitchFamily="2" charset="0"/>
+                <a:ea typeface="ADLaM Display" panose="02010000000000000000" pitchFamily="2" charset="0"/>
+                <a:cs typeface="ADLaM Display" panose="02010000000000000000" pitchFamily="2" charset="0"/>
+              </a:rPr>
+              <a:t>(New) : </a:t>
+            </a:r>
+            <a:r>
+              <a:rPr lang="ko-KR" altLang="en-US" sz="1200" b="0" i="0" dirty="0">
+                <a:solidFill>
+                  <a:srgbClr val="24292F"/>
+                </a:solidFill>
+                <a:effectLst/>
+                <a:latin typeface="ADLaM Display" panose="02010000000000000000" pitchFamily="2" charset="0"/>
+                <a:cs typeface="ADLaM Display" panose="02010000000000000000" pitchFamily="2" charset="0"/>
+              </a:rPr>
+              <a:t>제품을 처음 사용하는 유저</a:t>
+            </a:r>
+          </a:p>
+          <a:p>
+            <a:pPr algn="l" fontAlgn="base">
+              <a:spcBef>
+                <a:spcPts val="600"/>
+              </a:spcBef>
+              <a:spcAft>
+                <a:spcPts val="600"/>
+              </a:spcAft>
+            </a:pPr>
+            <a:r>
+              <a:rPr lang="ko-KR" altLang="en-US" sz="1200" b="0" i="0" dirty="0">
+                <a:solidFill>
+                  <a:srgbClr val="24292F"/>
+                </a:solidFill>
+                <a:effectLst/>
+                <a:latin typeface="ADLaM Display" panose="02010000000000000000" pitchFamily="2" charset="0"/>
+                <a:cs typeface="ADLaM Display" panose="02010000000000000000" pitchFamily="2" charset="0"/>
+              </a:rPr>
+              <a:t>출시</a:t>
+            </a:r>
+            <a:r>
+              <a:rPr lang="en-US" altLang="ko-KR" sz="1200" b="0" i="0" dirty="0">
+                <a:solidFill>
+                  <a:srgbClr val="24292F"/>
+                </a:solidFill>
+                <a:effectLst/>
+                <a:latin typeface="ADLaM Display" panose="02010000000000000000" pitchFamily="2" charset="0"/>
+                <a:ea typeface="ADLaM Display" panose="02010000000000000000" pitchFamily="2" charset="0"/>
+                <a:cs typeface="ADLaM Display" panose="02010000000000000000" pitchFamily="2" charset="0"/>
+              </a:rPr>
+              <a:t>(2022-08-01</a:t>
+            </a:r>
+            <a:r>
+              <a:rPr lang="ko-KR" altLang="en-US" sz="1200" b="0" i="0" dirty="0">
+                <a:solidFill>
+                  <a:srgbClr val="24292F"/>
+                </a:solidFill>
+                <a:effectLst/>
+                <a:latin typeface="ADLaM Display" panose="02010000000000000000" pitchFamily="2" charset="0"/>
+                <a:cs typeface="ADLaM Display" panose="02010000000000000000" pitchFamily="2" charset="0"/>
+              </a:rPr>
+              <a:t>을 출시기간으로 생각하면</a:t>
+            </a:r>
+            <a:r>
+              <a:rPr lang="en-US" altLang="ko-KR" sz="1200" b="0" i="0" dirty="0">
+                <a:solidFill>
+                  <a:srgbClr val="24292F"/>
+                </a:solidFill>
+                <a:effectLst/>
+                <a:latin typeface="ADLaM Display" panose="02010000000000000000" pitchFamily="2" charset="0"/>
+                <a:ea typeface="ADLaM Display" panose="02010000000000000000" pitchFamily="2" charset="0"/>
+                <a:cs typeface="ADLaM Display" panose="02010000000000000000" pitchFamily="2" charset="0"/>
+              </a:rPr>
+              <a:t>)</a:t>
+            </a:r>
+            <a:r>
+              <a:rPr lang="ko-KR" altLang="en-US" sz="1200" b="0" i="0" dirty="0">
+                <a:solidFill>
+                  <a:srgbClr val="24292F"/>
+                </a:solidFill>
+                <a:effectLst/>
+                <a:latin typeface="ADLaM Display" panose="02010000000000000000" pitchFamily="2" charset="0"/>
+                <a:cs typeface="ADLaM Display" panose="02010000000000000000" pitchFamily="2" charset="0"/>
+              </a:rPr>
+              <a:t>로부터 현재</a:t>
+            </a:r>
+            <a:r>
+              <a:rPr lang="en-US" altLang="ko-KR" sz="1200" b="0" i="0" dirty="0">
+                <a:solidFill>
+                  <a:srgbClr val="24292F"/>
+                </a:solidFill>
+                <a:effectLst/>
+                <a:latin typeface="ADLaM Display" panose="02010000000000000000" pitchFamily="2" charset="0"/>
+                <a:ea typeface="ADLaM Display" panose="02010000000000000000" pitchFamily="2" charset="0"/>
+                <a:cs typeface="ADLaM Display" panose="02010000000000000000" pitchFamily="2" charset="0"/>
+              </a:rPr>
+              <a:t>(2023-01-16 =&gt; 0803</a:t>
+            </a:r>
+            <a:r>
+              <a:rPr lang="ko-KR" altLang="en-US" sz="1200" b="0" i="0" dirty="0">
+                <a:solidFill>
+                  <a:srgbClr val="24292F"/>
+                </a:solidFill>
+                <a:effectLst/>
+                <a:latin typeface="ADLaM Display" panose="02010000000000000000" pitchFamily="2" charset="0"/>
+                <a:cs typeface="ADLaM Display" panose="02010000000000000000" pitchFamily="2" charset="0"/>
+              </a:rPr>
+              <a:t>으로 설정했지만 </a:t>
+            </a:r>
+            <a:r>
+              <a:rPr lang="en-US" altLang="ko-KR" sz="1200" b="0" i="0" dirty="0">
+                <a:solidFill>
+                  <a:srgbClr val="24292F"/>
+                </a:solidFill>
+                <a:effectLst/>
+                <a:latin typeface="ADLaM Display" panose="02010000000000000000" pitchFamily="2" charset="0"/>
+                <a:ea typeface="ADLaM Display" panose="02010000000000000000" pitchFamily="2" charset="0"/>
+                <a:cs typeface="ADLaM Display" panose="02010000000000000000" pitchFamily="2" charset="0"/>
+              </a:rPr>
+              <a:t>0116</a:t>
+            </a:r>
+            <a:r>
+              <a:rPr lang="ko-KR" altLang="en-US" sz="1200" b="0" i="0" dirty="0">
+                <a:solidFill>
+                  <a:srgbClr val="24292F"/>
+                </a:solidFill>
+                <a:effectLst/>
+                <a:latin typeface="ADLaM Display" panose="02010000000000000000" pitchFamily="2" charset="0"/>
+                <a:cs typeface="ADLaM Display" panose="02010000000000000000" pitchFamily="2" charset="0"/>
+              </a:rPr>
+              <a:t>까지가 끝입니다</a:t>
+            </a:r>
+            <a:r>
+              <a:rPr lang="en-US" altLang="ko-KR" sz="1200" b="0" i="0" dirty="0">
+                <a:solidFill>
+                  <a:srgbClr val="24292F"/>
+                </a:solidFill>
+                <a:effectLst/>
+                <a:latin typeface="ADLaM Display" panose="02010000000000000000" pitchFamily="2" charset="0"/>
+                <a:ea typeface="ADLaM Display" panose="02010000000000000000" pitchFamily="2" charset="0"/>
+                <a:cs typeface="ADLaM Display" panose="02010000000000000000" pitchFamily="2" charset="0"/>
+              </a:rPr>
+              <a:t>.)</a:t>
+            </a:r>
+            <a:r>
+              <a:rPr lang="ko-KR" altLang="en-US" sz="1200" b="0" i="0" dirty="0">
+                <a:solidFill>
+                  <a:srgbClr val="24292F"/>
+                </a:solidFill>
+                <a:effectLst/>
+                <a:latin typeface="ADLaM Display" panose="02010000000000000000" pitchFamily="2" charset="0"/>
+                <a:cs typeface="ADLaM Display" panose="02010000000000000000" pitchFamily="2" charset="0"/>
+              </a:rPr>
+              <a:t>까지의 신규유저 수의 변화를 살펴보겠습니다</a:t>
+            </a:r>
+            <a:r>
+              <a:rPr lang="en-US" altLang="ko-KR" sz="1200" b="0" i="0" dirty="0">
+                <a:solidFill>
+                  <a:srgbClr val="24292F"/>
+                </a:solidFill>
+                <a:effectLst/>
+                <a:latin typeface="ADLaM Display" panose="02010000000000000000" pitchFamily="2" charset="0"/>
+                <a:ea typeface="ADLaM Display" panose="02010000000000000000" pitchFamily="2" charset="0"/>
+                <a:cs typeface="ADLaM Display" panose="02010000000000000000" pitchFamily="2" charset="0"/>
+              </a:rPr>
+              <a:t>.</a:t>
+            </a:r>
+          </a:p>
+          <a:p>
+            <a:pPr algn="l" fontAlgn="base">
+              <a:spcBef>
+                <a:spcPts val="600"/>
+              </a:spcBef>
+              <a:spcAft>
+                <a:spcPts val="600"/>
+              </a:spcAft>
+            </a:pPr>
+            <a:r>
+              <a:rPr lang="ko-KR" altLang="en-US" sz="1200" b="0" i="0" dirty="0">
+                <a:solidFill>
+                  <a:srgbClr val="24292F"/>
+                </a:solidFill>
+                <a:effectLst/>
+                <a:latin typeface="ADLaM Display" panose="02010000000000000000" pitchFamily="2" charset="0"/>
+                <a:cs typeface="ADLaM Display" panose="02010000000000000000" pitchFamily="2" charset="0"/>
+              </a:rPr>
+              <a:t>런칭부터 </a:t>
+            </a:r>
+            <a:r>
+              <a:rPr lang="en-US" altLang="ko-KR" sz="1200" b="0" i="0" dirty="0">
+                <a:solidFill>
+                  <a:srgbClr val="24292F"/>
+                </a:solidFill>
+                <a:effectLst/>
+                <a:latin typeface="ADLaM Display" panose="02010000000000000000" pitchFamily="2" charset="0"/>
+                <a:ea typeface="ADLaM Display" panose="02010000000000000000" pitchFamily="2" charset="0"/>
+                <a:cs typeface="ADLaM Display" panose="02010000000000000000" pitchFamily="2" charset="0"/>
+              </a:rPr>
+              <a:t>10</a:t>
+            </a:r>
+            <a:r>
+              <a:rPr lang="ko-KR" altLang="en-US" sz="1200" b="0" i="0" dirty="0">
+                <a:solidFill>
+                  <a:srgbClr val="24292F"/>
+                </a:solidFill>
+                <a:effectLst/>
+                <a:latin typeface="ADLaM Display" panose="02010000000000000000" pitchFamily="2" charset="0"/>
+                <a:cs typeface="ADLaM Display" panose="02010000000000000000" pitchFamily="2" charset="0"/>
+              </a:rPr>
+              <a:t>주까지의 신규유저의 수는 주춤한 경우도 있지만 평균 </a:t>
+            </a:r>
+            <a:r>
+              <a:rPr lang="en-US" altLang="ko-KR" sz="1200" b="0" i="0" dirty="0">
+                <a:solidFill>
+                  <a:srgbClr val="24292F"/>
+                </a:solidFill>
+                <a:effectLst/>
+                <a:latin typeface="ADLaM Display" panose="02010000000000000000" pitchFamily="2" charset="0"/>
+                <a:ea typeface="ADLaM Display" panose="02010000000000000000" pitchFamily="2" charset="0"/>
+                <a:cs typeface="ADLaM Display" panose="02010000000000000000" pitchFamily="2" charset="0"/>
+              </a:rPr>
+              <a:t>4~500</a:t>
+            </a:r>
+            <a:r>
+              <a:rPr lang="ko-KR" altLang="en-US" sz="1200" b="0" i="0" dirty="0">
+                <a:solidFill>
+                  <a:srgbClr val="24292F"/>
+                </a:solidFill>
+                <a:effectLst/>
+                <a:latin typeface="ADLaM Display" panose="02010000000000000000" pitchFamily="2" charset="0"/>
+                <a:cs typeface="ADLaM Display" panose="02010000000000000000" pitchFamily="2" charset="0"/>
+              </a:rPr>
+              <a:t>명 정도 증가했습니다</a:t>
+            </a:r>
+            <a:r>
+              <a:rPr lang="en-US" altLang="ko-KR" sz="1200" b="0" i="0" dirty="0">
+                <a:solidFill>
+                  <a:srgbClr val="24292F"/>
+                </a:solidFill>
+                <a:effectLst/>
+                <a:latin typeface="ADLaM Display" panose="02010000000000000000" pitchFamily="2" charset="0"/>
+                <a:ea typeface="ADLaM Display" panose="02010000000000000000" pitchFamily="2" charset="0"/>
+                <a:cs typeface="ADLaM Display" panose="02010000000000000000" pitchFamily="2" charset="0"/>
+              </a:rPr>
+              <a:t>.</a:t>
+            </a:r>
+          </a:p>
+          <a:p>
+            <a:pPr algn="l" fontAlgn="base">
+              <a:spcBef>
+                <a:spcPts val="600"/>
+              </a:spcBef>
+              <a:spcAft>
+                <a:spcPts val="600"/>
+              </a:spcAft>
+            </a:pPr>
+            <a:r>
+              <a:rPr lang="ko-KR" altLang="en-US" sz="1200" b="0" i="0" dirty="0">
+                <a:solidFill>
+                  <a:srgbClr val="24292F"/>
+                </a:solidFill>
+                <a:effectLst/>
+                <a:latin typeface="ADLaM Display" panose="02010000000000000000" pitchFamily="2" charset="0"/>
+                <a:cs typeface="ADLaM Display" panose="02010000000000000000" pitchFamily="2" charset="0"/>
+              </a:rPr>
+              <a:t>하지만</a:t>
+            </a:r>
+            <a:r>
+              <a:rPr lang="en-US" altLang="ko-KR" sz="1200" b="0" i="0" dirty="0">
+                <a:solidFill>
+                  <a:srgbClr val="24292F"/>
+                </a:solidFill>
+                <a:effectLst/>
+                <a:latin typeface="ADLaM Display" panose="02010000000000000000" pitchFamily="2" charset="0"/>
+                <a:ea typeface="ADLaM Display" panose="02010000000000000000" pitchFamily="2" charset="0"/>
+                <a:cs typeface="ADLaM Display" panose="02010000000000000000" pitchFamily="2" charset="0"/>
+              </a:rPr>
+              <a:t>, 11</a:t>
+            </a:r>
+            <a:r>
+              <a:rPr lang="ko-KR" altLang="en-US" sz="1200" b="0" i="0" dirty="0">
+                <a:solidFill>
+                  <a:srgbClr val="24292F"/>
+                </a:solidFill>
+                <a:effectLst/>
+                <a:latin typeface="ADLaM Display" panose="02010000000000000000" pitchFamily="2" charset="0"/>
+                <a:cs typeface="ADLaM Display" panose="02010000000000000000" pitchFamily="2" charset="0"/>
+              </a:rPr>
+              <a:t>주에 </a:t>
+            </a:r>
+            <a:r>
+              <a:rPr lang="en-US" altLang="ko-KR" sz="1200" b="0" i="0" dirty="0">
+                <a:solidFill>
+                  <a:srgbClr val="24292F"/>
+                </a:solidFill>
+                <a:effectLst/>
+                <a:latin typeface="ADLaM Display" panose="02010000000000000000" pitchFamily="2" charset="0"/>
+                <a:ea typeface="ADLaM Display" panose="02010000000000000000" pitchFamily="2" charset="0"/>
+                <a:cs typeface="ADLaM Display" panose="02010000000000000000" pitchFamily="2" charset="0"/>
+              </a:rPr>
+              <a:t>4000</a:t>
+            </a:r>
+            <a:r>
+              <a:rPr lang="ko-KR" altLang="en-US" sz="1200" b="0" i="0" dirty="0">
+                <a:solidFill>
+                  <a:srgbClr val="24292F"/>
+                </a:solidFill>
+                <a:effectLst/>
+                <a:latin typeface="ADLaM Display" panose="02010000000000000000" pitchFamily="2" charset="0"/>
+                <a:cs typeface="ADLaM Display" panose="02010000000000000000" pitchFamily="2" charset="0"/>
+              </a:rPr>
+              <a:t>명 대에서 </a:t>
+            </a:r>
+            <a:r>
+              <a:rPr lang="en-US" altLang="ko-KR" sz="1200" b="0" i="0" dirty="0">
+                <a:solidFill>
+                  <a:srgbClr val="24292F"/>
+                </a:solidFill>
+                <a:effectLst/>
+                <a:latin typeface="ADLaM Display" panose="02010000000000000000" pitchFamily="2" charset="0"/>
+                <a:ea typeface="ADLaM Display" panose="02010000000000000000" pitchFamily="2" charset="0"/>
+                <a:cs typeface="ADLaM Display" panose="02010000000000000000" pitchFamily="2" charset="0"/>
+              </a:rPr>
+              <a:t>3100</a:t>
+            </a:r>
+            <a:r>
+              <a:rPr lang="ko-KR" altLang="en-US" sz="1200" b="0" i="0" dirty="0">
+                <a:solidFill>
+                  <a:srgbClr val="24292F"/>
+                </a:solidFill>
+                <a:effectLst/>
+                <a:latin typeface="ADLaM Display" panose="02010000000000000000" pitchFamily="2" charset="0"/>
+                <a:cs typeface="ADLaM Display" panose="02010000000000000000" pitchFamily="2" charset="0"/>
+              </a:rPr>
+              <a:t>명으로 </a:t>
+            </a:r>
+            <a:r>
+              <a:rPr lang="en-US" altLang="ko-KR" sz="1200" b="0" i="0" dirty="0">
+                <a:solidFill>
+                  <a:srgbClr val="24292F"/>
+                </a:solidFill>
+                <a:effectLst/>
+                <a:latin typeface="ADLaM Display" panose="02010000000000000000" pitchFamily="2" charset="0"/>
+                <a:ea typeface="ADLaM Display" panose="02010000000000000000" pitchFamily="2" charset="0"/>
+                <a:cs typeface="ADLaM Display" panose="02010000000000000000" pitchFamily="2" charset="0"/>
+              </a:rPr>
+              <a:t>900</a:t>
+            </a:r>
+            <a:r>
+              <a:rPr lang="ko-KR" altLang="en-US" sz="1200" b="0" i="0" dirty="0">
+                <a:solidFill>
+                  <a:srgbClr val="24292F"/>
+                </a:solidFill>
+                <a:effectLst/>
+                <a:latin typeface="ADLaM Display" panose="02010000000000000000" pitchFamily="2" charset="0"/>
+                <a:cs typeface="ADLaM Display" panose="02010000000000000000" pitchFamily="2" charset="0"/>
+              </a:rPr>
+              <a:t>명이 급감한 이후로 계속 하락세를 타고 </a:t>
+            </a:r>
+            <a:r>
+              <a:rPr lang="en-US" altLang="ko-KR" sz="1200" b="0" i="0" dirty="0">
+                <a:solidFill>
+                  <a:srgbClr val="24292F"/>
+                </a:solidFill>
+                <a:effectLst/>
+                <a:latin typeface="ADLaM Display" panose="02010000000000000000" pitchFamily="2" charset="0"/>
+                <a:ea typeface="ADLaM Display" panose="02010000000000000000" pitchFamily="2" charset="0"/>
+                <a:cs typeface="ADLaM Display" panose="02010000000000000000" pitchFamily="2" charset="0"/>
+              </a:rPr>
+              <a:t>24</a:t>
+            </a:r>
+            <a:r>
+              <a:rPr lang="ko-KR" altLang="en-US" sz="1200" b="0" i="0" dirty="0">
+                <a:solidFill>
+                  <a:srgbClr val="24292F"/>
+                </a:solidFill>
+                <a:effectLst/>
+                <a:latin typeface="ADLaM Display" panose="02010000000000000000" pitchFamily="2" charset="0"/>
+                <a:cs typeface="ADLaM Display" panose="02010000000000000000" pitchFamily="2" charset="0"/>
+              </a:rPr>
+              <a:t>주차 현재 신규 가입자의 수는 </a:t>
+            </a:r>
+            <a:r>
+              <a:rPr lang="en-US" altLang="ko-KR" sz="1200" b="0" i="0" dirty="0">
+                <a:solidFill>
+                  <a:srgbClr val="24292F"/>
+                </a:solidFill>
+                <a:effectLst/>
+                <a:latin typeface="ADLaM Display" panose="02010000000000000000" pitchFamily="2" charset="0"/>
+                <a:ea typeface="ADLaM Display" panose="02010000000000000000" pitchFamily="2" charset="0"/>
+                <a:cs typeface="ADLaM Display" panose="02010000000000000000" pitchFamily="2" charset="0"/>
+              </a:rPr>
+              <a:t>500</a:t>
+            </a:r>
+            <a:r>
+              <a:rPr lang="ko-KR" altLang="en-US" sz="1200" b="0" i="0" dirty="0">
+                <a:solidFill>
+                  <a:srgbClr val="24292F"/>
+                </a:solidFill>
+                <a:effectLst/>
+                <a:latin typeface="ADLaM Display" panose="02010000000000000000" pitchFamily="2" charset="0"/>
+                <a:cs typeface="ADLaM Display" panose="02010000000000000000" pitchFamily="2" charset="0"/>
+              </a:rPr>
+              <a:t>명 남짓하고 있습니다</a:t>
+            </a:r>
+            <a:r>
+              <a:rPr lang="en-US" altLang="ko-KR" sz="1200" b="0" i="0" dirty="0">
+                <a:solidFill>
+                  <a:srgbClr val="24292F"/>
+                </a:solidFill>
+                <a:effectLst/>
+                <a:latin typeface="ADLaM Display" panose="02010000000000000000" pitchFamily="2" charset="0"/>
+                <a:ea typeface="ADLaM Display" panose="02010000000000000000" pitchFamily="2" charset="0"/>
+                <a:cs typeface="ADLaM Display" panose="02010000000000000000" pitchFamily="2" charset="0"/>
+              </a:rPr>
+              <a:t>.</a:t>
+            </a:r>
+          </a:p>
+          <a:p>
+            <a:pPr algn="l" fontAlgn="base">
+              <a:spcBef>
+                <a:spcPts val="600"/>
+              </a:spcBef>
+              <a:spcAft>
+                <a:spcPts val="600"/>
+              </a:spcAft>
+            </a:pPr>
+            <a:r>
+              <a:rPr lang="en-US" altLang="ko-KR" sz="1200" b="0" i="0" dirty="0">
+                <a:solidFill>
+                  <a:srgbClr val="24292F"/>
+                </a:solidFill>
+                <a:effectLst/>
+                <a:latin typeface="ADLaM Display" panose="02010000000000000000" pitchFamily="2" charset="0"/>
+                <a:ea typeface="ADLaM Display" panose="02010000000000000000" pitchFamily="2" charset="0"/>
+                <a:cs typeface="ADLaM Display" panose="02010000000000000000" pitchFamily="2" charset="0"/>
+              </a:rPr>
+              <a:t>11</a:t>
+            </a:r>
+            <a:r>
+              <a:rPr lang="ko-KR" altLang="en-US" sz="1200" b="0" i="0" dirty="0" err="1">
+                <a:solidFill>
+                  <a:srgbClr val="24292F"/>
+                </a:solidFill>
+                <a:effectLst/>
+                <a:latin typeface="ADLaM Display" panose="02010000000000000000" pitchFamily="2" charset="0"/>
+                <a:cs typeface="ADLaM Display" panose="02010000000000000000" pitchFamily="2" charset="0"/>
+              </a:rPr>
+              <a:t>주차부터의</a:t>
+            </a:r>
+            <a:r>
+              <a:rPr lang="ko-KR" altLang="en-US" sz="1200" b="0" i="0" dirty="0">
+                <a:solidFill>
+                  <a:srgbClr val="24292F"/>
+                </a:solidFill>
+                <a:effectLst/>
+                <a:latin typeface="ADLaM Display" panose="02010000000000000000" pitchFamily="2" charset="0"/>
+                <a:cs typeface="ADLaM Display" panose="02010000000000000000" pitchFamily="2" charset="0"/>
+              </a:rPr>
+              <a:t> 마케팅 효과는 빛을 보지 못하고 있는 것 같습니다</a:t>
+            </a:r>
+            <a:r>
+              <a:rPr lang="en-US" altLang="ko-KR" sz="1200" b="0" i="0" dirty="0">
+                <a:solidFill>
+                  <a:srgbClr val="24292F"/>
+                </a:solidFill>
+                <a:effectLst/>
+                <a:latin typeface="ADLaM Display" panose="02010000000000000000" pitchFamily="2" charset="0"/>
+                <a:ea typeface="ADLaM Display" panose="02010000000000000000" pitchFamily="2" charset="0"/>
+                <a:cs typeface="ADLaM Display" panose="02010000000000000000" pitchFamily="2" charset="0"/>
+              </a:rPr>
+              <a:t>.</a:t>
+            </a:r>
+          </a:p>
+          <a:p>
+            <a:pPr algn="l" fontAlgn="base">
+              <a:spcBef>
+                <a:spcPts val="600"/>
+              </a:spcBef>
+              <a:spcAft>
+                <a:spcPts val="600"/>
+              </a:spcAft>
+            </a:pPr>
+            <a:r>
+              <a:rPr lang="en-US" altLang="ko-KR" sz="1200" b="0" i="0" dirty="0">
+                <a:solidFill>
+                  <a:srgbClr val="24292F"/>
+                </a:solidFill>
+                <a:effectLst/>
+                <a:latin typeface="ADLaM Display" panose="02010000000000000000" pitchFamily="2" charset="0"/>
+                <a:ea typeface="ADLaM Display" panose="02010000000000000000" pitchFamily="2" charset="0"/>
+                <a:cs typeface="ADLaM Display" panose="02010000000000000000" pitchFamily="2" charset="0"/>
+              </a:rPr>
+              <a:t> </a:t>
+            </a:r>
+          </a:p>
+          <a:p>
+            <a:pPr algn="l" fontAlgn="base">
+              <a:spcBef>
+                <a:spcPts val="600"/>
+              </a:spcBef>
+              <a:spcAft>
+                <a:spcPts val="600"/>
+              </a:spcAft>
+            </a:pPr>
+            <a:r>
+              <a:rPr lang="ko-KR" altLang="en-US" sz="1200" b="0" i="0" dirty="0">
+                <a:solidFill>
+                  <a:srgbClr val="24292F"/>
+                </a:solidFill>
+                <a:effectLst/>
+                <a:latin typeface="ADLaM Display" panose="02010000000000000000" pitchFamily="2" charset="0"/>
+                <a:cs typeface="ADLaM Display" panose="02010000000000000000" pitchFamily="2" charset="0"/>
+              </a:rPr>
+              <a:t>코호트 </a:t>
+            </a:r>
+            <a:r>
+              <a:rPr lang="ko-KR" altLang="en-US" sz="1200" b="0" i="0" dirty="0" err="1">
+                <a:solidFill>
+                  <a:srgbClr val="24292F"/>
+                </a:solidFill>
+                <a:effectLst/>
+                <a:latin typeface="ADLaM Display" panose="02010000000000000000" pitchFamily="2" charset="0"/>
+                <a:cs typeface="ADLaM Display" panose="02010000000000000000" pitchFamily="2" charset="0"/>
+              </a:rPr>
+              <a:t>리텐션</a:t>
+            </a:r>
+            <a:r>
+              <a:rPr lang="ko-KR" altLang="en-US" sz="1200" b="0" i="0" dirty="0">
+                <a:solidFill>
+                  <a:srgbClr val="24292F"/>
+                </a:solidFill>
+                <a:effectLst/>
+                <a:latin typeface="ADLaM Display" panose="02010000000000000000" pitchFamily="2" charset="0"/>
+                <a:cs typeface="ADLaM Display" panose="02010000000000000000" pitchFamily="2" charset="0"/>
+              </a:rPr>
+              <a:t> 시각화를 보자면</a:t>
+            </a:r>
+            <a:r>
+              <a:rPr lang="en-US" altLang="ko-KR" sz="1200" b="0" i="0" dirty="0">
+                <a:solidFill>
+                  <a:srgbClr val="24292F"/>
+                </a:solidFill>
+                <a:effectLst/>
+                <a:latin typeface="ADLaM Display" panose="02010000000000000000" pitchFamily="2" charset="0"/>
+                <a:ea typeface="ADLaM Display" panose="02010000000000000000" pitchFamily="2" charset="0"/>
+                <a:cs typeface="ADLaM Display" panose="02010000000000000000" pitchFamily="2" charset="0"/>
+              </a:rPr>
+              <a:t>,</a:t>
+            </a:r>
+          </a:p>
+          <a:p>
+            <a:pPr algn="l" fontAlgn="base">
+              <a:spcBef>
+                <a:spcPts val="600"/>
+              </a:spcBef>
+              <a:spcAft>
+                <a:spcPts val="600"/>
+              </a:spcAft>
+            </a:pPr>
+            <a:r>
+              <a:rPr lang="en-US" altLang="ko-KR" sz="1200" b="0" i="0" dirty="0">
+                <a:solidFill>
+                  <a:srgbClr val="24292F"/>
+                </a:solidFill>
+                <a:effectLst/>
+                <a:latin typeface="ADLaM Display" panose="02010000000000000000" pitchFamily="2" charset="0"/>
+                <a:ea typeface="ADLaM Display" panose="02010000000000000000" pitchFamily="2" charset="0"/>
+                <a:cs typeface="ADLaM Display" panose="02010000000000000000" pitchFamily="2" charset="0"/>
+              </a:rPr>
+              <a:t>2) </a:t>
+            </a:r>
+            <a:r>
+              <a:rPr lang="ko-KR" altLang="en-US" sz="1200" b="0" i="0" dirty="0">
+                <a:solidFill>
+                  <a:srgbClr val="24292F"/>
+                </a:solidFill>
+                <a:effectLst/>
+                <a:latin typeface="ADLaM Display" panose="02010000000000000000" pitchFamily="2" charset="0"/>
+                <a:cs typeface="ADLaM Display" panose="02010000000000000000" pitchFamily="2" charset="0"/>
+              </a:rPr>
+              <a:t>기존유저</a:t>
+            </a:r>
+            <a:r>
+              <a:rPr lang="en-US" altLang="ko-KR" sz="1200" b="0" i="0" dirty="0">
+                <a:solidFill>
+                  <a:srgbClr val="24292F"/>
+                </a:solidFill>
+                <a:effectLst/>
+                <a:latin typeface="ADLaM Display" panose="02010000000000000000" pitchFamily="2" charset="0"/>
+                <a:ea typeface="ADLaM Display" panose="02010000000000000000" pitchFamily="2" charset="0"/>
+                <a:cs typeface="ADLaM Display" panose="02010000000000000000" pitchFamily="2" charset="0"/>
+              </a:rPr>
+              <a:t>(Current) : </a:t>
+            </a:r>
+            <a:r>
+              <a:rPr lang="ko-KR" altLang="en-US" sz="1200" b="0" i="0" dirty="0">
+                <a:solidFill>
+                  <a:srgbClr val="24292F"/>
+                </a:solidFill>
+                <a:effectLst/>
+                <a:latin typeface="ADLaM Display" panose="02010000000000000000" pitchFamily="2" charset="0"/>
+                <a:cs typeface="ADLaM Display" panose="02010000000000000000" pitchFamily="2" charset="0"/>
+              </a:rPr>
+              <a:t>제품을 지속적으로 사용하는 유저</a:t>
+            </a:r>
+            <a:r>
+              <a:rPr lang="en-US" altLang="ko-KR" sz="1200" b="0" i="0" dirty="0">
+                <a:solidFill>
+                  <a:srgbClr val="24292F"/>
+                </a:solidFill>
+                <a:effectLst/>
+                <a:latin typeface="ADLaM Display" panose="02010000000000000000" pitchFamily="2" charset="0"/>
+                <a:ea typeface="ADLaM Display" panose="02010000000000000000" pitchFamily="2" charset="0"/>
+                <a:cs typeface="ADLaM Display" panose="02010000000000000000" pitchFamily="2" charset="0"/>
+              </a:rPr>
+              <a:t>(</a:t>
+            </a:r>
+            <a:r>
+              <a:rPr lang="ko-KR" altLang="en-US" sz="1200" b="0" i="0" dirty="0">
+                <a:solidFill>
+                  <a:srgbClr val="24292F"/>
+                </a:solidFill>
+                <a:effectLst/>
+                <a:latin typeface="ADLaM Display" panose="02010000000000000000" pitchFamily="2" charset="0"/>
+                <a:cs typeface="ADLaM Display" panose="02010000000000000000" pitchFamily="2" charset="0"/>
+              </a:rPr>
+              <a:t>바로 전 주와 이번 주</a:t>
+            </a:r>
+            <a:r>
+              <a:rPr lang="en-US" altLang="ko-KR" sz="1200" b="0" i="0" dirty="0">
+                <a:solidFill>
+                  <a:srgbClr val="24292F"/>
+                </a:solidFill>
+                <a:effectLst/>
+                <a:latin typeface="ADLaM Display" panose="02010000000000000000" pitchFamily="2" charset="0"/>
+                <a:ea typeface="ADLaM Display" panose="02010000000000000000" pitchFamily="2" charset="0"/>
+                <a:cs typeface="ADLaM Display" panose="02010000000000000000" pitchFamily="2" charset="0"/>
+              </a:rPr>
+              <a:t>)</a:t>
+            </a:r>
+          </a:p>
+          <a:p>
+            <a:pPr algn="l" fontAlgn="base">
+              <a:spcBef>
+                <a:spcPts val="600"/>
+              </a:spcBef>
+              <a:spcAft>
+                <a:spcPts val="600"/>
+              </a:spcAft>
+            </a:pPr>
+            <a:r>
+              <a:rPr lang="ko-KR" altLang="en-US" sz="1200" b="0" i="0" dirty="0">
+                <a:solidFill>
+                  <a:srgbClr val="24292F"/>
+                </a:solidFill>
+                <a:effectLst/>
+                <a:latin typeface="ADLaM Display" panose="02010000000000000000" pitchFamily="2" charset="0"/>
+                <a:cs typeface="ADLaM Display" panose="02010000000000000000" pitchFamily="2" charset="0"/>
+              </a:rPr>
+              <a:t>출시로부터 현재까지 줄곧 주차마다의 신규유저 대비 기존유저의 비율이 증가하고 있습니다</a:t>
+            </a:r>
+            <a:r>
+              <a:rPr lang="en-US" altLang="ko-KR" sz="1200" b="0" i="0" dirty="0">
+                <a:solidFill>
+                  <a:srgbClr val="24292F"/>
+                </a:solidFill>
+                <a:effectLst/>
+                <a:latin typeface="ADLaM Display" panose="02010000000000000000" pitchFamily="2" charset="0"/>
+                <a:ea typeface="ADLaM Display" panose="02010000000000000000" pitchFamily="2" charset="0"/>
+                <a:cs typeface="ADLaM Display" panose="02010000000000000000" pitchFamily="2" charset="0"/>
+              </a:rPr>
+              <a:t>.</a:t>
+            </a:r>
+          </a:p>
+          <a:p>
+            <a:pPr algn="l" fontAlgn="base">
+              <a:spcBef>
+                <a:spcPts val="600"/>
+              </a:spcBef>
+              <a:spcAft>
+                <a:spcPts val="600"/>
+              </a:spcAft>
+            </a:pPr>
+            <a:r>
+              <a:rPr lang="ko-KR" altLang="en-US" sz="1200" b="0" i="0" dirty="0">
+                <a:solidFill>
+                  <a:srgbClr val="24292F"/>
+                </a:solidFill>
+                <a:effectLst/>
+                <a:latin typeface="ADLaM Display" panose="02010000000000000000" pitchFamily="2" charset="0"/>
+                <a:cs typeface="ADLaM Display" panose="02010000000000000000" pitchFamily="2" charset="0"/>
+              </a:rPr>
+              <a:t>특히</a:t>
+            </a:r>
+            <a:r>
+              <a:rPr lang="en-US" altLang="ko-KR" sz="1200" b="0" i="0" dirty="0">
+                <a:solidFill>
+                  <a:srgbClr val="24292F"/>
+                </a:solidFill>
+                <a:effectLst/>
+                <a:latin typeface="ADLaM Display" panose="02010000000000000000" pitchFamily="2" charset="0"/>
+                <a:ea typeface="ADLaM Display" panose="02010000000000000000" pitchFamily="2" charset="0"/>
+                <a:cs typeface="ADLaM Display" panose="02010000000000000000" pitchFamily="2" charset="0"/>
+              </a:rPr>
+              <a:t>, 24</a:t>
+            </a:r>
+            <a:r>
+              <a:rPr lang="ko-KR" altLang="en-US" sz="1200" b="0" i="0" dirty="0">
+                <a:solidFill>
+                  <a:srgbClr val="24292F"/>
+                </a:solidFill>
+                <a:effectLst/>
+                <a:latin typeface="ADLaM Display" panose="02010000000000000000" pitchFamily="2" charset="0"/>
+                <a:cs typeface="ADLaM Display" panose="02010000000000000000" pitchFamily="2" charset="0"/>
+              </a:rPr>
+              <a:t>주차에 가입한 신규유저 대비 기존유저의 비율은 </a:t>
+            </a:r>
+            <a:r>
+              <a:rPr lang="en-US" altLang="ko-KR" sz="1200" b="0" i="0" dirty="0">
+                <a:solidFill>
+                  <a:srgbClr val="24292F"/>
+                </a:solidFill>
+                <a:effectLst/>
+                <a:latin typeface="ADLaM Display" panose="02010000000000000000" pitchFamily="2" charset="0"/>
+                <a:ea typeface="ADLaM Display" panose="02010000000000000000" pitchFamily="2" charset="0"/>
+                <a:cs typeface="ADLaM Display" panose="02010000000000000000" pitchFamily="2" charset="0"/>
+              </a:rPr>
+              <a:t>76%</a:t>
+            </a:r>
+            <a:r>
+              <a:rPr lang="ko-KR" altLang="en-US" sz="1200" b="0" i="0" dirty="0">
+                <a:solidFill>
+                  <a:srgbClr val="24292F"/>
+                </a:solidFill>
+                <a:effectLst/>
+                <a:latin typeface="ADLaM Display" panose="02010000000000000000" pitchFamily="2" charset="0"/>
+                <a:cs typeface="ADLaM Display" panose="02010000000000000000" pitchFamily="2" charset="0"/>
+              </a:rPr>
+              <a:t>나 차지하고 있습니다</a:t>
+            </a:r>
+            <a:r>
+              <a:rPr lang="en-US" altLang="ko-KR" sz="1200" b="0" i="0" dirty="0">
+                <a:solidFill>
+                  <a:srgbClr val="24292F"/>
+                </a:solidFill>
+                <a:effectLst/>
+                <a:latin typeface="ADLaM Display" panose="02010000000000000000" pitchFamily="2" charset="0"/>
+                <a:ea typeface="ADLaM Display" panose="02010000000000000000" pitchFamily="2" charset="0"/>
+                <a:cs typeface="ADLaM Display" panose="02010000000000000000" pitchFamily="2" charset="0"/>
+              </a:rPr>
+              <a:t>.</a:t>
+            </a:r>
+          </a:p>
+          <a:p>
+            <a:pPr algn="l" fontAlgn="base">
+              <a:spcBef>
+                <a:spcPts val="600"/>
+              </a:spcBef>
+              <a:spcAft>
+                <a:spcPts val="600"/>
+              </a:spcAft>
+            </a:pPr>
+            <a:r>
+              <a:rPr lang="ko-KR" altLang="en-US" sz="1200" b="0" i="0" dirty="0">
+                <a:solidFill>
+                  <a:srgbClr val="24292F"/>
+                </a:solidFill>
+                <a:effectLst/>
+                <a:latin typeface="ADLaM Display" panose="02010000000000000000" pitchFamily="2" charset="0"/>
+                <a:cs typeface="ADLaM Display" panose="02010000000000000000" pitchFamily="2" charset="0"/>
+              </a:rPr>
+              <a:t>시간이 흐름에 따라 점차 어플이 안정화되면서 신규유저들이 만족을 느끼는 비율이 늘어가고 있다고 보입니다</a:t>
+            </a:r>
+            <a:r>
+              <a:rPr lang="en-US" altLang="ko-KR" sz="1200" b="0" i="0" dirty="0">
+                <a:solidFill>
+                  <a:srgbClr val="24292F"/>
+                </a:solidFill>
+                <a:effectLst/>
+                <a:latin typeface="ADLaM Display" panose="02010000000000000000" pitchFamily="2" charset="0"/>
+                <a:ea typeface="ADLaM Display" panose="02010000000000000000" pitchFamily="2" charset="0"/>
+                <a:cs typeface="ADLaM Display" panose="02010000000000000000" pitchFamily="2" charset="0"/>
+              </a:rPr>
+              <a:t>.</a:t>
+            </a:r>
+          </a:p>
+        </p:txBody>
+      </p:sp>
+    </p:spTree>
+    <p:extLst>
+      <p:ext uri="{BB962C8B-B14F-4D97-AF65-F5344CB8AC3E}">
+        <p14:creationId xmlns:p14="http://schemas.microsoft.com/office/powerpoint/2010/main" val="600282114"/>
+      </p:ext>
+    </p:extLst>
+  </p:cSld>
+  <p:clrMapOvr>
+    <a:masterClrMapping/>
+  </p:clrMapOvr>
+</p:sld>
+</file>
+
+<file path=ppt/slides/slide18.xml><?xml version="1.0" encoding="utf-8"?>
+<p:sld xmlns:a="http://schemas.openxmlformats.org/drawingml/2006/main" xmlns:r="http://schemas.openxmlformats.org/officeDocument/2006/relationships" xmlns:p="http://schemas.openxmlformats.org/presentationml/2006/main">
+  <p:cSld>
+    <p:spTree>
+      <p:nvGrpSpPr>
+        <p:cNvPr id="1" name="">
+          <a:extLst>
+            <a:ext uri="{FF2B5EF4-FFF2-40B4-BE49-F238E27FC236}">
+              <a16:creationId xmlns:a16="http://schemas.microsoft.com/office/drawing/2014/main" id="{30BAD98C-D092-AD8A-E525-6491EF6FDFF6}"/>
+            </a:ext>
+          </a:extLst>
+        </p:cNvPr>
+        <p:cNvGrpSpPr/>
+        <p:nvPr/>
+      </p:nvGrpSpPr>
+      <p:grpSpPr>
+        <a:xfrm>
+          <a:off x="0" y="0"/>
+          <a:ext cx="0" cy="0"/>
+          <a:chOff x="0" y="0"/>
+          <a:chExt cx="0" cy="0"/>
+        </a:xfrm>
+      </p:grpSpPr>
+      <p:sp>
+        <p:nvSpPr>
+          <p:cNvPr id="4" name="TextBox 3">
+            <a:extLst>
+              <a:ext uri="{FF2B5EF4-FFF2-40B4-BE49-F238E27FC236}">
+                <a16:creationId xmlns:a16="http://schemas.microsoft.com/office/drawing/2014/main" id="{6BB1C06E-BE2B-4F07-CD1F-96763D24342B}"/>
+              </a:ext>
+            </a:extLst>
+          </p:cNvPr>
+          <p:cNvSpPr txBox="1"/>
+          <p:nvPr/>
+        </p:nvSpPr>
+        <p:spPr>
+          <a:xfrm>
+            <a:off x="166255" y="175491"/>
+            <a:ext cx="11859490" cy="1501950"/>
+          </a:xfrm>
+          <a:prstGeom prst="rect">
+            <a:avLst/>
+          </a:prstGeom>
+          <a:noFill/>
+        </p:spPr>
+        <p:txBody>
+          <a:bodyPr wrap="square" rtlCol="0">
+            <a:spAutoFit/>
+          </a:bodyPr>
+          <a:lstStyle/>
+          <a:p>
+            <a:pPr marL="0" marR="0" indent="0" algn="just" fontAlgn="base" latinLnBrk="1">
+              <a:lnSpc>
+                <a:spcPct val="160000"/>
+              </a:lnSpc>
+              <a:spcBef>
+                <a:spcPts val="0"/>
+              </a:spcBef>
+              <a:spcAft>
+                <a:spcPts val="0"/>
+              </a:spcAft>
+            </a:pPr>
+            <a:r>
+              <a:rPr lang="en-US" altLang="ko-KR" sz="2800" b="1" kern="0" spc="0" dirty="0">
+                <a:solidFill>
+                  <a:srgbClr val="000000"/>
+                </a:solidFill>
+                <a:effectLst/>
+                <a:latin typeface="ADLaM Display" panose="02010000000000000000" pitchFamily="2" charset="0"/>
+                <a:ea typeface="ADLaM Display" panose="02010000000000000000" pitchFamily="2" charset="0"/>
+                <a:cs typeface="ADLaM Display" panose="02010000000000000000" pitchFamily="2" charset="0"/>
+              </a:rPr>
+              <a:t>Firebase </a:t>
+            </a:r>
+            <a:r>
+              <a:rPr lang="ko-KR" altLang="en-US" sz="2800" b="1" kern="0" spc="0" dirty="0">
+                <a:solidFill>
+                  <a:srgbClr val="000000"/>
+                </a:solidFill>
+                <a:effectLst/>
+                <a:latin typeface="ADLaM Display" panose="02010000000000000000" pitchFamily="2" charset="0"/>
+                <a:ea typeface="함초롬바탕" panose="02030604000101010101" pitchFamily="18" charset="-127"/>
+                <a:cs typeface="ADLaM Display" panose="02010000000000000000" pitchFamily="2" charset="0"/>
+              </a:rPr>
+              <a:t>앱 로그 기반 데이터 분석 </a:t>
+            </a:r>
+            <a:endParaRPr lang="en-US" altLang="ko-KR" sz="2800" b="1" kern="0" spc="0" dirty="0">
+              <a:solidFill>
+                <a:srgbClr val="000000"/>
+              </a:solidFill>
+              <a:effectLst/>
+              <a:latin typeface="ADLaM Display" panose="02010000000000000000" pitchFamily="2" charset="0"/>
+              <a:ea typeface="ADLaM Display" panose="02010000000000000000" pitchFamily="2" charset="0"/>
+              <a:cs typeface="ADLaM Display" panose="02010000000000000000" pitchFamily="2" charset="0"/>
+            </a:endParaRPr>
+          </a:p>
+          <a:p>
+            <a:pPr algn="just" fontAlgn="base">
+              <a:lnSpc>
+                <a:spcPct val="160000"/>
+              </a:lnSpc>
+            </a:pPr>
+            <a:r>
+              <a:rPr lang="en-US" altLang="ko-KR" sz="1800" kern="0" spc="0" dirty="0">
+                <a:solidFill>
+                  <a:srgbClr val="000000"/>
+                </a:solidFill>
+                <a:effectLst/>
+                <a:latin typeface="ADLaM Display" panose="02010000000000000000" pitchFamily="2" charset="0"/>
+                <a:ea typeface="ADLaM Display" panose="02010000000000000000" pitchFamily="2" charset="0"/>
+                <a:cs typeface="ADLaM Display" panose="02010000000000000000" pitchFamily="2" charset="0"/>
+              </a:rPr>
+              <a:t>&lt;</a:t>
+            </a:r>
+            <a:r>
+              <a:rPr lang="en-US" altLang="ko-KR" kern="0" dirty="0">
+                <a:solidFill>
+                  <a:srgbClr val="000000"/>
+                </a:solidFill>
+                <a:latin typeface="ADLaM Display" panose="02010000000000000000" pitchFamily="2" charset="0"/>
+                <a:ea typeface="ADLaM Display" panose="02010000000000000000" pitchFamily="2" charset="0"/>
+                <a:cs typeface="ADLaM Display" panose="02010000000000000000" pitchFamily="2" charset="0"/>
+              </a:rPr>
+              <a:t>4</a:t>
+            </a:r>
+            <a:r>
+              <a:rPr lang="en-US" altLang="ko-KR" sz="1800" kern="0" spc="0" dirty="0">
+                <a:solidFill>
+                  <a:srgbClr val="000000"/>
+                </a:solidFill>
+                <a:effectLst/>
+                <a:latin typeface="ADLaM Display" panose="02010000000000000000" pitchFamily="2" charset="0"/>
+                <a:ea typeface="ADLaM Display" panose="02010000000000000000" pitchFamily="2" charset="0"/>
+                <a:cs typeface="ADLaM Display" panose="02010000000000000000" pitchFamily="2" charset="0"/>
+              </a:rPr>
+              <a:t>. Retain</a:t>
+            </a:r>
+            <a:r>
+              <a:rPr lang="ko-KR" altLang="en-US" sz="1800" kern="0" spc="0" dirty="0">
+                <a:solidFill>
+                  <a:srgbClr val="000000"/>
+                </a:solidFill>
+                <a:effectLst/>
+                <a:latin typeface="ADLaM Display" panose="02010000000000000000" pitchFamily="2" charset="0"/>
+                <a:ea typeface="ADLaM Display" panose="02010000000000000000" pitchFamily="2" charset="0"/>
+                <a:cs typeface="ADLaM Display" panose="02010000000000000000" pitchFamily="2" charset="0"/>
+              </a:rPr>
+              <a:t>유저 분류 </a:t>
+            </a:r>
+            <a:r>
+              <a:rPr lang="ko-KR" altLang="en-US" kern="0" dirty="0">
+                <a:solidFill>
+                  <a:srgbClr val="000000"/>
+                </a:solidFill>
+                <a:latin typeface="ADLaM Display" panose="02010000000000000000" pitchFamily="2" charset="0"/>
+                <a:ea typeface="ADLaM Display" panose="02010000000000000000" pitchFamily="2" charset="0"/>
+                <a:cs typeface="ADLaM Display" panose="02010000000000000000" pitchFamily="2" charset="0"/>
+              </a:rPr>
+              <a:t>코호트 시각화 </a:t>
+            </a:r>
+            <a:r>
+              <a:rPr lang="en-US" altLang="ko-KR" kern="0" dirty="0">
+                <a:solidFill>
+                  <a:srgbClr val="000000"/>
+                </a:solidFill>
+                <a:latin typeface="ADLaM Display" panose="02010000000000000000" pitchFamily="2" charset="0"/>
+                <a:ea typeface="ADLaM Display" panose="02010000000000000000" pitchFamily="2" charset="0"/>
+                <a:cs typeface="ADLaM Display" panose="02010000000000000000" pitchFamily="2" charset="0"/>
+              </a:rPr>
+              <a:t>&amp; </a:t>
+            </a:r>
+            <a:r>
+              <a:rPr lang="ko-KR" altLang="en-US" kern="0" dirty="0">
+                <a:solidFill>
+                  <a:srgbClr val="000000"/>
+                </a:solidFill>
+                <a:latin typeface="ADLaM Display" panose="02010000000000000000" pitchFamily="2" charset="0"/>
+                <a:ea typeface="ADLaM Display" panose="02010000000000000000" pitchFamily="2" charset="0"/>
+                <a:cs typeface="ADLaM Display" panose="02010000000000000000" pitchFamily="2" charset="0"/>
+              </a:rPr>
+              <a:t>해석</a:t>
+            </a:r>
+            <a:r>
+              <a:rPr lang="en-US" altLang="ko-KR" kern="0" dirty="0">
+                <a:solidFill>
+                  <a:srgbClr val="000000"/>
+                </a:solidFill>
+                <a:latin typeface="ADLaM Display" panose="02010000000000000000" pitchFamily="2" charset="0"/>
+                <a:ea typeface="ADLaM Display" panose="02010000000000000000" pitchFamily="2" charset="0"/>
+                <a:cs typeface="ADLaM Display" panose="02010000000000000000" pitchFamily="2" charset="0"/>
+              </a:rPr>
+              <a:t>&gt;</a:t>
+            </a:r>
+            <a:endParaRPr lang="en-US" altLang="ko-KR" sz="1800" kern="0" spc="0" dirty="0">
+              <a:solidFill>
+                <a:srgbClr val="000000"/>
+              </a:solidFill>
+              <a:effectLst/>
+              <a:latin typeface="ADLaM Display" panose="02010000000000000000" pitchFamily="2" charset="0"/>
+              <a:ea typeface="ADLaM Display" panose="02010000000000000000" pitchFamily="2" charset="0"/>
+              <a:cs typeface="ADLaM Display" panose="02010000000000000000" pitchFamily="2" charset="0"/>
+            </a:endParaRPr>
+          </a:p>
+          <a:p>
+            <a:endParaRPr lang="ko-KR" altLang="en-US" dirty="0">
+              <a:latin typeface="ADLaM Display" panose="02010000000000000000" pitchFamily="2" charset="0"/>
+              <a:cs typeface="ADLaM Display" panose="02010000000000000000" pitchFamily="2" charset="0"/>
+            </a:endParaRPr>
+          </a:p>
+        </p:txBody>
+      </p:sp>
+      <p:pic>
+        <p:nvPicPr>
+          <p:cNvPr id="3" name="그림 2">
+            <a:extLst>
+              <a:ext uri="{FF2B5EF4-FFF2-40B4-BE49-F238E27FC236}">
+                <a16:creationId xmlns:a16="http://schemas.microsoft.com/office/drawing/2014/main" id="{BE6F9351-E0B6-6CF2-A18B-F0B0F56807BE}"/>
+              </a:ext>
+            </a:extLst>
+          </p:cNvPr>
+          <p:cNvPicPr>
+            <a:picLocks noChangeAspect="1"/>
+          </p:cNvPicPr>
+          <p:nvPr/>
+        </p:nvPicPr>
+        <p:blipFill>
+          <a:blip r:embed="rId2">
+            <a:extLst>
+              <a:ext uri="{28A0092B-C50C-407E-A947-70E740481C1C}">
+                <a14:useLocalDpi xmlns:a14="http://schemas.microsoft.com/office/drawing/2010/main" val="0"/>
+              </a:ext>
+            </a:extLst>
+          </a:blip>
+          <a:stretch>
+            <a:fillRect/>
+          </a:stretch>
+        </p:blipFill>
+        <p:spPr>
+          <a:xfrm>
+            <a:off x="332508" y="1482661"/>
+            <a:ext cx="11240655" cy="795798"/>
+          </a:xfrm>
+          <a:prstGeom prst="rect">
+            <a:avLst/>
+          </a:prstGeom>
+        </p:spPr>
+      </p:pic>
+      <p:sp>
+        <p:nvSpPr>
+          <p:cNvPr id="6" name="TextBox 5">
+            <a:extLst>
+              <a:ext uri="{FF2B5EF4-FFF2-40B4-BE49-F238E27FC236}">
+                <a16:creationId xmlns:a16="http://schemas.microsoft.com/office/drawing/2014/main" id="{013D51D8-97C7-EC2A-8AF2-53122A9FB780}"/>
+              </a:ext>
+            </a:extLst>
+          </p:cNvPr>
+          <p:cNvSpPr txBox="1"/>
+          <p:nvPr/>
+        </p:nvSpPr>
+        <p:spPr>
+          <a:xfrm>
+            <a:off x="332508" y="2506789"/>
+            <a:ext cx="10244604" cy="2646878"/>
+          </a:xfrm>
+          <a:prstGeom prst="rect">
+            <a:avLst/>
+          </a:prstGeom>
+          <a:noFill/>
+        </p:spPr>
+        <p:txBody>
+          <a:bodyPr wrap="square" rtlCol="0">
+            <a:spAutoFit/>
+          </a:bodyPr>
+          <a:lstStyle/>
+          <a:p>
+            <a:pPr algn="l" fontAlgn="base">
+              <a:spcBef>
+                <a:spcPts val="600"/>
+              </a:spcBef>
+              <a:spcAft>
+                <a:spcPts val="600"/>
+              </a:spcAft>
+            </a:pPr>
+            <a:r>
+              <a:rPr lang="en-US" altLang="ko-KR" sz="1200" b="0" i="0" dirty="0">
+                <a:solidFill>
+                  <a:srgbClr val="24292F"/>
+                </a:solidFill>
+                <a:effectLst/>
+                <a:latin typeface="ADLaM Display" panose="02010000000000000000" pitchFamily="2" charset="0"/>
+                <a:ea typeface="ADLaM Display" panose="02010000000000000000" pitchFamily="2" charset="0"/>
+                <a:cs typeface="ADLaM Display" panose="02010000000000000000" pitchFamily="2" charset="0"/>
+              </a:rPr>
+              <a:t>3) </a:t>
+            </a:r>
+            <a:r>
+              <a:rPr lang="ko-KR" altLang="en-US" sz="1200" b="0" i="0" dirty="0">
+                <a:solidFill>
+                  <a:srgbClr val="24292F"/>
+                </a:solidFill>
+                <a:effectLst/>
+                <a:latin typeface="ADLaM Display" panose="02010000000000000000" pitchFamily="2" charset="0"/>
+                <a:cs typeface="ADLaM Display" panose="02010000000000000000" pitchFamily="2" charset="0"/>
+              </a:rPr>
+              <a:t>복귀유저</a:t>
+            </a:r>
+            <a:r>
+              <a:rPr lang="en-US" altLang="ko-KR" sz="1200" b="0" i="0" dirty="0">
+                <a:solidFill>
+                  <a:srgbClr val="24292F"/>
+                </a:solidFill>
+                <a:effectLst/>
+                <a:latin typeface="ADLaM Display" panose="02010000000000000000" pitchFamily="2" charset="0"/>
+                <a:ea typeface="ADLaM Display" panose="02010000000000000000" pitchFamily="2" charset="0"/>
+                <a:cs typeface="ADLaM Display" panose="02010000000000000000" pitchFamily="2" charset="0"/>
+              </a:rPr>
+              <a:t>(Resurrected) : </a:t>
+            </a:r>
+            <a:r>
+              <a:rPr lang="ko-KR" altLang="en-US" sz="1200" b="0" i="0" dirty="0">
+                <a:solidFill>
+                  <a:srgbClr val="24292F"/>
+                </a:solidFill>
+                <a:effectLst/>
+                <a:latin typeface="ADLaM Display" panose="02010000000000000000" pitchFamily="2" charset="0"/>
+                <a:cs typeface="ADLaM Display" panose="02010000000000000000" pitchFamily="2" charset="0"/>
+              </a:rPr>
+              <a:t>과거에 사용 </a:t>
+            </a:r>
+            <a:r>
+              <a:rPr lang="en-US" altLang="ko-KR" sz="1200" b="0" i="0" dirty="0">
+                <a:solidFill>
+                  <a:srgbClr val="24292F"/>
+                </a:solidFill>
+                <a:effectLst/>
+                <a:latin typeface="ADLaM Display" panose="02010000000000000000" pitchFamily="2" charset="0"/>
+                <a:ea typeface="ADLaM Display" panose="02010000000000000000" pitchFamily="2" charset="0"/>
+                <a:cs typeface="ADLaM Display" panose="02010000000000000000" pitchFamily="2" charset="0"/>
+              </a:rPr>
+              <a:t>-&gt; </a:t>
+            </a:r>
+            <a:r>
+              <a:rPr lang="ko-KR" altLang="en-US" sz="1200" b="0" i="0" dirty="0">
+                <a:solidFill>
+                  <a:srgbClr val="24292F"/>
+                </a:solidFill>
+                <a:effectLst/>
+                <a:latin typeface="ADLaM Display" panose="02010000000000000000" pitchFamily="2" charset="0"/>
+                <a:cs typeface="ADLaM Display" panose="02010000000000000000" pitchFamily="2" charset="0"/>
+              </a:rPr>
+              <a:t>비활성화 </a:t>
+            </a:r>
+            <a:r>
+              <a:rPr lang="en-US" altLang="ko-KR" sz="1200" b="0" i="0" dirty="0">
+                <a:solidFill>
+                  <a:srgbClr val="24292F"/>
+                </a:solidFill>
+                <a:effectLst/>
+                <a:latin typeface="ADLaM Display" panose="02010000000000000000" pitchFamily="2" charset="0"/>
+                <a:ea typeface="ADLaM Display" panose="02010000000000000000" pitchFamily="2" charset="0"/>
+                <a:cs typeface="ADLaM Display" panose="02010000000000000000" pitchFamily="2" charset="0"/>
+              </a:rPr>
+              <a:t>-&gt; </a:t>
+            </a:r>
+            <a:r>
+              <a:rPr lang="ko-KR" altLang="en-US" sz="1200" b="0" i="0" dirty="0">
+                <a:solidFill>
+                  <a:srgbClr val="24292F"/>
+                </a:solidFill>
+                <a:effectLst/>
+                <a:latin typeface="ADLaM Display" panose="02010000000000000000" pitchFamily="2" charset="0"/>
+                <a:cs typeface="ADLaM Display" panose="02010000000000000000" pitchFamily="2" charset="0"/>
+              </a:rPr>
+              <a:t>다시 제품을 사용한 유저</a:t>
+            </a:r>
+            <a:r>
+              <a:rPr lang="en-US" altLang="ko-KR" sz="1200" b="0" i="0" dirty="0">
+                <a:solidFill>
+                  <a:srgbClr val="24292F"/>
+                </a:solidFill>
+                <a:effectLst/>
+                <a:latin typeface="ADLaM Display" panose="02010000000000000000" pitchFamily="2" charset="0"/>
+                <a:ea typeface="ADLaM Display" panose="02010000000000000000" pitchFamily="2" charset="0"/>
+                <a:cs typeface="ADLaM Display" panose="02010000000000000000" pitchFamily="2" charset="0"/>
+              </a:rPr>
+              <a:t>(2</a:t>
+            </a:r>
+            <a:r>
+              <a:rPr lang="ko-KR" altLang="en-US" sz="1200" b="0" i="0" dirty="0">
+                <a:solidFill>
+                  <a:srgbClr val="24292F"/>
+                </a:solidFill>
+                <a:effectLst/>
+                <a:latin typeface="ADLaM Display" panose="02010000000000000000" pitchFamily="2" charset="0"/>
+                <a:cs typeface="ADLaM Display" panose="02010000000000000000" pitchFamily="2" charset="0"/>
+              </a:rPr>
+              <a:t>주 후 복귀</a:t>
+            </a:r>
+            <a:r>
+              <a:rPr lang="en-US" altLang="ko-KR" sz="1200" b="0" i="0" dirty="0">
+                <a:solidFill>
+                  <a:srgbClr val="24292F"/>
+                </a:solidFill>
+                <a:effectLst/>
+                <a:latin typeface="ADLaM Display" panose="02010000000000000000" pitchFamily="2" charset="0"/>
+                <a:ea typeface="ADLaM Display" panose="02010000000000000000" pitchFamily="2" charset="0"/>
+                <a:cs typeface="ADLaM Display" panose="02010000000000000000" pitchFamily="2" charset="0"/>
+              </a:rPr>
+              <a:t>)</a:t>
+            </a:r>
+          </a:p>
+          <a:p>
+            <a:pPr algn="l" fontAlgn="base">
+              <a:spcBef>
+                <a:spcPts val="600"/>
+              </a:spcBef>
+              <a:spcAft>
+                <a:spcPts val="600"/>
+              </a:spcAft>
+            </a:pPr>
+            <a:r>
+              <a:rPr lang="ko-KR" altLang="en-US" sz="1200" b="0" i="0" dirty="0">
+                <a:solidFill>
+                  <a:srgbClr val="24292F"/>
+                </a:solidFill>
+                <a:effectLst/>
+                <a:latin typeface="ADLaM Display" panose="02010000000000000000" pitchFamily="2" charset="0"/>
+                <a:cs typeface="ADLaM Display" panose="02010000000000000000" pitchFamily="2" charset="0"/>
+              </a:rPr>
+              <a:t>복귀유저는 </a:t>
+            </a:r>
+            <a:r>
+              <a:rPr lang="en-US" altLang="ko-KR" sz="1200" b="0" i="0" dirty="0">
+                <a:solidFill>
+                  <a:srgbClr val="24292F"/>
+                </a:solidFill>
+                <a:effectLst/>
+                <a:latin typeface="ADLaM Display" panose="02010000000000000000" pitchFamily="2" charset="0"/>
+                <a:ea typeface="ADLaM Display" panose="02010000000000000000" pitchFamily="2" charset="0"/>
+                <a:cs typeface="ADLaM Display" panose="02010000000000000000" pitchFamily="2" charset="0"/>
+              </a:rPr>
+              <a:t>12</a:t>
+            </a:r>
+            <a:r>
+              <a:rPr lang="ko-KR" altLang="en-US" sz="1200" b="0" i="0" dirty="0">
+                <a:solidFill>
+                  <a:srgbClr val="24292F"/>
+                </a:solidFill>
+                <a:effectLst/>
+                <a:latin typeface="ADLaM Display" panose="02010000000000000000" pitchFamily="2" charset="0"/>
+                <a:cs typeface="ADLaM Display" panose="02010000000000000000" pitchFamily="2" charset="0"/>
+              </a:rPr>
+              <a:t>주차를 분기로 </a:t>
+            </a:r>
+            <a:r>
+              <a:rPr lang="en-US" altLang="ko-KR" sz="1200" b="0" i="0" dirty="0">
+                <a:solidFill>
+                  <a:srgbClr val="24292F"/>
+                </a:solidFill>
+                <a:effectLst/>
+                <a:latin typeface="ADLaM Display" panose="02010000000000000000" pitchFamily="2" charset="0"/>
+                <a:ea typeface="ADLaM Display" panose="02010000000000000000" pitchFamily="2" charset="0"/>
+                <a:cs typeface="ADLaM Display" panose="02010000000000000000" pitchFamily="2" charset="0"/>
+              </a:rPr>
+              <a:t>13</a:t>
+            </a:r>
+            <a:r>
+              <a:rPr lang="ko-KR" altLang="en-US" sz="1200" b="0" i="0" dirty="0">
+                <a:solidFill>
+                  <a:srgbClr val="24292F"/>
+                </a:solidFill>
+                <a:effectLst/>
+                <a:latin typeface="ADLaM Display" panose="02010000000000000000" pitchFamily="2" charset="0"/>
+                <a:cs typeface="ADLaM Display" panose="02010000000000000000" pitchFamily="2" charset="0"/>
+              </a:rPr>
+              <a:t>주차부터는 신규가입자보다 복귀유저의 수가 많아지기 시작했습니다</a:t>
+            </a:r>
+            <a:r>
+              <a:rPr lang="en-US" altLang="ko-KR" sz="1200" b="0" i="0" dirty="0">
+                <a:solidFill>
+                  <a:srgbClr val="24292F"/>
+                </a:solidFill>
+                <a:effectLst/>
+                <a:latin typeface="ADLaM Display" panose="02010000000000000000" pitchFamily="2" charset="0"/>
+                <a:ea typeface="ADLaM Display" panose="02010000000000000000" pitchFamily="2" charset="0"/>
+                <a:cs typeface="ADLaM Display" panose="02010000000000000000" pitchFamily="2" charset="0"/>
+              </a:rPr>
+              <a:t>.</a:t>
+            </a:r>
+          </a:p>
+          <a:p>
+            <a:pPr algn="l" fontAlgn="base">
+              <a:spcBef>
+                <a:spcPts val="600"/>
+              </a:spcBef>
+              <a:spcAft>
+                <a:spcPts val="600"/>
+              </a:spcAft>
+            </a:pPr>
+            <a:r>
+              <a:rPr lang="en-US" altLang="ko-KR" sz="1200" b="0" i="0" dirty="0">
+                <a:solidFill>
+                  <a:srgbClr val="24292F"/>
+                </a:solidFill>
+                <a:effectLst/>
+                <a:latin typeface="ADLaM Display" panose="02010000000000000000" pitchFamily="2" charset="0"/>
+                <a:ea typeface="ADLaM Display" panose="02010000000000000000" pitchFamily="2" charset="0"/>
+                <a:cs typeface="ADLaM Display" panose="02010000000000000000" pitchFamily="2" charset="0"/>
+              </a:rPr>
+              <a:t>24</a:t>
+            </a:r>
+            <a:r>
+              <a:rPr lang="ko-KR" altLang="en-US" sz="1200" b="0" i="0" dirty="0">
+                <a:solidFill>
+                  <a:srgbClr val="24292F"/>
+                </a:solidFill>
+                <a:effectLst/>
+                <a:latin typeface="ADLaM Display" panose="02010000000000000000" pitchFamily="2" charset="0"/>
+                <a:cs typeface="ADLaM Display" panose="02010000000000000000" pitchFamily="2" charset="0"/>
+              </a:rPr>
+              <a:t>주차에는 신규유저 대비 복귀유저는 </a:t>
+            </a:r>
+            <a:r>
+              <a:rPr lang="en-US" altLang="ko-KR" sz="1200" b="0" i="0" dirty="0">
+                <a:solidFill>
+                  <a:srgbClr val="24292F"/>
+                </a:solidFill>
+                <a:effectLst/>
+                <a:latin typeface="ADLaM Display" panose="02010000000000000000" pitchFamily="2" charset="0"/>
+                <a:ea typeface="ADLaM Display" panose="02010000000000000000" pitchFamily="2" charset="0"/>
+                <a:cs typeface="ADLaM Display" panose="02010000000000000000" pitchFamily="2" charset="0"/>
+              </a:rPr>
+              <a:t>6</a:t>
+            </a:r>
+            <a:r>
+              <a:rPr lang="ko-KR" altLang="en-US" sz="1200" b="0" i="0" dirty="0">
+                <a:solidFill>
+                  <a:srgbClr val="24292F"/>
+                </a:solidFill>
+                <a:effectLst/>
+                <a:latin typeface="ADLaM Display" panose="02010000000000000000" pitchFamily="2" charset="0"/>
+                <a:cs typeface="ADLaM Display" panose="02010000000000000000" pitchFamily="2" charset="0"/>
+              </a:rPr>
+              <a:t>배가 많습니다</a:t>
+            </a:r>
+            <a:r>
+              <a:rPr lang="en-US" altLang="ko-KR" sz="1200" b="0" i="0" dirty="0">
+                <a:solidFill>
+                  <a:srgbClr val="24292F"/>
+                </a:solidFill>
+                <a:effectLst/>
+                <a:latin typeface="ADLaM Display" panose="02010000000000000000" pitchFamily="2" charset="0"/>
+                <a:ea typeface="ADLaM Display" panose="02010000000000000000" pitchFamily="2" charset="0"/>
+                <a:cs typeface="ADLaM Display" panose="02010000000000000000" pitchFamily="2" charset="0"/>
+              </a:rPr>
+              <a:t>.</a:t>
+            </a:r>
+          </a:p>
+          <a:p>
+            <a:pPr algn="l" fontAlgn="base">
+              <a:spcBef>
+                <a:spcPts val="600"/>
+              </a:spcBef>
+              <a:spcAft>
+                <a:spcPts val="600"/>
+              </a:spcAft>
+            </a:pPr>
+            <a:r>
+              <a:rPr lang="ko-KR" altLang="en-US" sz="1200" b="0" i="0" dirty="0">
+                <a:solidFill>
+                  <a:srgbClr val="24292F"/>
+                </a:solidFill>
+                <a:effectLst/>
+                <a:latin typeface="ADLaM Display" panose="02010000000000000000" pitchFamily="2" charset="0"/>
+                <a:cs typeface="ADLaM Display" panose="02010000000000000000" pitchFamily="2" charset="0"/>
+              </a:rPr>
+              <a:t>복귀유저가 기존유저로 안정되는 현황을 추출할 수 있는 쿼리는 조금 더 연구해 보겠습니다</a:t>
+            </a:r>
+            <a:r>
+              <a:rPr lang="en-US" altLang="ko-KR" sz="1200" b="0" i="0" dirty="0">
+                <a:solidFill>
+                  <a:srgbClr val="24292F"/>
+                </a:solidFill>
+                <a:effectLst/>
+                <a:latin typeface="ADLaM Display" panose="02010000000000000000" pitchFamily="2" charset="0"/>
+                <a:ea typeface="ADLaM Display" panose="02010000000000000000" pitchFamily="2" charset="0"/>
+                <a:cs typeface="ADLaM Display" panose="02010000000000000000" pitchFamily="2" charset="0"/>
+              </a:rPr>
+              <a:t>.</a:t>
+            </a:r>
+          </a:p>
+          <a:p>
+            <a:pPr algn="l" fontAlgn="base">
+              <a:spcBef>
+                <a:spcPts val="600"/>
+              </a:spcBef>
+              <a:spcAft>
+                <a:spcPts val="600"/>
+              </a:spcAft>
+            </a:pPr>
+            <a:r>
+              <a:rPr lang="en-US" altLang="ko-KR" sz="1200" b="0" i="0" dirty="0">
+                <a:solidFill>
+                  <a:srgbClr val="24292F"/>
+                </a:solidFill>
+                <a:effectLst/>
+                <a:latin typeface="ADLaM Display" panose="02010000000000000000" pitchFamily="2" charset="0"/>
+                <a:ea typeface="ADLaM Display" panose="02010000000000000000" pitchFamily="2" charset="0"/>
+                <a:cs typeface="ADLaM Display" panose="02010000000000000000" pitchFamily="2" charset="0"/>
+              </a:rPr>
+              <a:t> </a:t>
+            </a:r>
+          </a:p>
+          <a:p>
+            <a:pPr algn="l" fontAlgn="base">
+              <a:spcBef>
+                <a:spcPts val="600"/>
+              </a:spcBef>
+              <a:spcAft>
+                <a:spcPts val="600"/>
+              </a:spcAft>
+            </a:pPr>
+            <a:r>
+              <a:rPr lang="en-US" altLang="ko-KR" sz="1200" b="0" i="0" dirty="0">
+                <a:solidFill>
+                  <a:srgbClr val="24292F"/>
+                </a:solidFill>
+                <a:effectLst/>
+                <a:latin typeface="ADLaM Display" panose="02010000000000000000" pitchFamily="2" charset="0"/>
+                <a:ea typeface="ADLaM Display" panose="02010000000000000000" pitchFamily="2" charset="0"/>
+                <a:cs typeface="ADLaM Display" panose="02010000000000000000" pitchFamily="2" charset="0"/>
+              </a:rPr>
+              <a:t>4) </a:t>
+            </a:r>
+            <a:r>
+              <a:rPr lang="ko-KR" altLang="en-US" sz="1200" b="0" i="0" dirty="0">
+                <a:solidFill>
+                  <a:srgbClr val="24292F"/>
+                </a:solidFill>
+                <a:effectLst/>
+                <a:latin typeface="ADLaM Display" panose="02010000000000000000" pitchFamily="2" charset="0"/>
+                <a:cs typeface="ADLaM Display" panose="02010000000000000000" pitchFamily="2" charset="0"/>
+              </a:rPr>
+              <a:t>휴면유저</a:t>
+            </a:r>
+            <a:r>
+              <a:rPr lang="en-US" altLang="ko-KR" sz="1200" b="0" i="0" dirty="0">
+                <a:solidFill>
+                  <a:srgbClr val="24292F"/>
+                </a:solidFill>
+                <a:effectLst/>
+                <a:latin typeface="ADLaM Display" panose="02010000000000000000" pitchFamily="2" charset="0"/>
+                <a:ea typeface="ADLaM Display" panose="02010000000000000000" pitchFamily="2" charset="0"/>
+                <a:cs typeface="ADLaM Display" panose="02010000000000000000" pitchFamily="2" charset="0"/>
+              </a:rPr>
+              <a:t>(Dormant) : </a:t>
+            </a:r>
+            <a:r>
+              <a:rPr lang="ko-KR" altLang="en-US" sz="1200" b="0" i="0" dirty="0">
+                <a:solidFill>
+                  <a:srgbClr val="24292F"/>
+                </a:solidFill>
+                <a:effectLst/>
+                <a:latin typeface="ADLaM Display" panose="02010000000000000000" pitchFamily="2" charset="0"/>
+                <a:cs typeface="ADLaM Display" panose="02010000000000000000" pitchFamily="2" charset="0"/>
+              </a:rPr>
+              <a:t>일정기간 제품을 사용하지 않은 비활성화 사용자</a:t>
+            </a:r>
+          </a:p>
+          <a:p>
+            <a:pPr algn="l" fontAlgn="base">
+              <a:spcBef>
+                <a:spcPts val="600"/>
+              </a:spcBef>
+              <a:spcAft>
+                <a:spcPts val="600"/>
+              </a:spcAft>
+            </a:pPr>
+            <a:r>
+              <a:rPr lang="ko-KR" altLang="en-US" sz="1200" b="0" i="0" dirty="0">
+                <a:solidFill>
+                  <a:srgbClr val="24292F"/>
+                </a:solidFill>
+                <a:effectLst/>
+                <a:latin typeface="ADLaM Display" panose="02010000000000000000" pitchFamily="2" charset="0"/>
+                <a:cs typeface="ADLaM Display" panose="02010000000000000000" pitchFamily="2" charset="0"/>
+              </a:rPr>
+              <a:t>신규유저 대비 휴면유저는 꾸준히 늘어가고 있습니다</a:t>
+            </a:r>
+            <a:r>
+              <a:rPr lang="en-US" altLang="ko-KR" sz="1200" b="0" i="0" dirty="0">
+                <a:solidFill>
+                  <a:srgbClr val="24292F"/>
+                </a:solidFill>
+                <a:effectLst/>
+                <a:latin typeface="ADLaM Display" panose="02010000000000000000" pitchFamily="2" charset="0"/>
+                <a:ea typeface="ADLaM Display" panose="02010000000000000000" pitchFamily="2" charset="0"/>
+                <a:cs typeface="ADLaM Display" panose="02010000000000000000" pitchFamily="2" charset="0"/>
+              </a:rPr>
+              <a:t>(</a:t>
+            </a:r>
+            <a:r>
+              <a:rPr lang="ko-KR" altLang="en-US" sz="1200" b="0" i="0" dirty="0">
+                <a:solidFill>
+                  <a:srgbClr val="24292F"/>
+                </a:solidFill>
+                <a:effectLst/>
+                <a:latin typeface="ADLaM Display" panose="02010000000000000000" pitchFamily="2" charset="0"/>
+                <a:cs typeface="ADLaM Display" panose="02010000000000000000" pitchFamily="2" charset="0"/>
+              </a:rPr>
+              <a:t>휴면유저가 누적됨</a:t>
+            </a:r>
+            <a:r>
+              <a:rPr lang="en-US" altLang="ko-KR" sz="1200" b="0" i="0" dirty="0">
+                <a:solidFill>
+                  <a:srgbClr val="24292F"/>
+                </a:solidFill>
+                <a:effectLst/>
+                <a:latin typeface="ADLaM Display" panose="02010000000000000000" pitchFamily="2" charset="0"/>
+                <a:ea typeface="ADLaM Display" panose="02010000000000000000" pitchFamily="2" charset="0"/>
+                <a:cs typeface="ADLaM Display" panose="02010000000000000000" pitchFamily="2" charset="0"/>
+              </a:rPr>
+              <a:t>).</a:t>
+            </a:r>
+          </a:p>
+          <a:p>
+            <a:pPr algn="l" fontAlgn="base">
+              <a:spcBef>
+                <a:spcPts val="600"/>
+              </a:spcBef>
+              <a:spcAft>
+                <a:spcPts val="600"/>
+              </a:spcAft>
+            </a:pPr>
+            <a:r>
+              <a:rPr lang="en-US" altLang="ko-KR" sz="1200" b="0" i="0" dirty="0">
+                <a:solidFill>
+                  <a:srgbClr val="24292F"/>
+                </a:solidFill>
+                <a:effectLst/>
+                <a:latin typeface="ADLaM Display" panose="02010000000000000000" pitchFamily="2" charset="0"/>
+                <a:ea typeface="ADLaM Display" panose="02010000000000000000" pitchFamily="2" charset="0"/>
+                <a:cs typeface="ADLaM Display" panose="02010000000000000000" pitchFamily="2" charset="0"/>
+              </a:rPr>
+              <a:t>24</a:t>
+            </a:r>
+            <a:r>
+              <a:rPr lang="ko-KR" altLang="en-US" sz="1200" b="0" i="0" dirty="0">
+                <a:solidFill>
+                  <a:srgbClr val="24292F"/>
+                </a:solidFill>
+                <a:effectLst/>
+                <a:latin typeface="ADLaM Display" panose="02010000000000000000" pitchFamily="2" charset="0"/>
+                <a:cs typeface="ADLaM Display" panose="02010000000000000000" pitchFamily="2" charset="0"/>
+              </a:rPr>
+              <a:t>주차 신규가입자의 </a:t>
+            </a:r>
+            <a:r>
+              <a:rPr lang="en-US" altLang="ko-KR" sz="1200" b="0" i="0" dirty="0">
+                <a:solidFill>
+                  <a:srgbClr val="24292F"/>
+                </a:solidFill>
+                <a:effectLst/>
+                <a:latin typeface="ADLaM Display" panose="02010000000000000000" pitchFamily="2" charset="0"/>
+                <a:ea typeface="ADLaM Display" panose="02010000000000000000" pitchFamily="2" charset="0"/>
+                <a:cs typeface="ADLaM Display" panose="02010000000000000000" pitchFamily="2" charset="0"/>
+              </a:rPr>
+              <a:t>5.7</a:t>
+            </a:r>
+            <a:r>
+              <a:rPr lang="ko-KR" altLang="en-US" sz="1200" b="0" i="0" dirty="0">
+                <a:solidFill>
+                  <a:srgbClr val="24292F"/>
+                </a:solidFill>
+                <a:effectLst/>
+                <a:latin typeface="ADLaM Display" panose="02010000000000000000" pitchFamily="2" charset="0"/>
+                <a:cs typeface="ADLaM Display" panose="02010000000000000000" pitchFamily="2" charset="0"/>
+              </a:rPr>
+              <a:t>배가 휴면유저 입니다</a:t>
+            </a:r>
+            <a:r>
+              <a:rPr lang="en-US" altLang="ko-KR" sz="1200" b="0" i="0" dirty="0">
+                <a:solidFill>
+                  <a:srgbClr val="24292F"/>
+                </a:solidFill>
+                <a:effectLst/>
+                <a:latin typeface="ADLaM Display" panose="02010000000000000000" pitchFamily="2" charset="0"/>
+                <a:ea typeface="ADLaM Display" panose="02010000000000000000" pitchFamily="2" charset="0"/>
+                <a:cs typeface="ADLaM Display" panose="02010000000000000000" pitchFamily="2" charset="0"/>
+              </a:rPr>
+              <a:t>.</a:t>
+            </a:r>
+          </a:p>
+        </p:txBody>
+      </p:sp>
+    </p:spTree>
+    <p:extLst>
+      <p:ext uri="{BB962C8B-B14F-4D97-AF65-F5344CB8AC3E}">
+        <p14:creationId xmlns:p14="http://schemas.microsoft.com/office/powerpoint/2010/main" val="1569755364"/>
       </p:ext>
     </p:extLst>
   </p:cSld>
@@ -4217,7 +8997,7 @@
                 <a:ea typeface="ADLaM Display" panose="02010000000000000000" pitchFamily="2" charset="0"/>
                 <a:cs typeface="ADLaM Display" panose="02010000000000000000" pitchFamily="2" charset="0"/>
               </a:rPr>
-              <a:t>&lt;</a:t>
+              <a:t>&lt;1. </a:t>
             </a:r>
             <a:r>
               <a:rPr lang="ko-KR" altLang="en-US" sz="1800" kern="0" spc="0" dirty="0" err="1">
@@ -4671,6 +9451,455 @@
         <p:cNvPr id="1" name="">
           <a:extLst>
             <a:ext uri="{FF2B5EF4-FFF2-40B4-BE49-F238E27FC236}">
+              <a16:creationId xmlns:a16="http://schemas.microsoft.com/office/drawing/2014/main" id="{AF8CCC44-95DB-9042-8B72-75EFFC2C0B9D}"/>
+            </a:ext>
+          </a:extLst>
+        </p:cNvPr>
+        <p:cNvGrpSpPr/>
+        <p:nvPr/>
+      </p:nvGrpSpPr>
+      <p:grpSpPr>
+        <a:xfrm>
+          <a:off x="0" y="0"/>
+          <a:ext cx="0" cy="0"/>
+          <a:chOff x="0" y="0"/>
+          <a:chExt cx="0" cy="0"/>
+        </a:xfrm>
+      </p:grpSpPr>
+      <p:sp>
+        <p:nvSpPr>
+          <p:cNvPr id="4" name="TextBox 3">
+            <a:extLst>
+              <a:ext uri="{FF2B5EF4-FFF2-40B4-BE49-F238E27FC236}">
+                <a16:creationId xmlns:a16="http://schemas.microsoft.com/office/drawing/2014/main" id="{DCFD86E9-DB52-4CCE-3DED-4830E4196F95}"/>
+              </a:ext>
+            </a:extLst>
+          </p:cNvPr>
+          <p:cNvSpPr txBox="1"/>
+          <p:nvPr/>
+        </p:nvSpPr>
+        <p:spPr>
+          <a:xfrm>
+            <a:off x="166255" y="175491"/>
+            <a:ext cx="11859490" cy="1501950"/>
+          </a:xfrm>
+          <a:prstGeom prst="rect">
+            <a:avLst/>
+          </a:prstGeom>
+          <a:noFill/>
+        </p:spPr>
+        <p:txBody>
+          <a:bodyPr wrap="square" rtlCol="0">
+            <a:spAutoFit/>
+          </a:bodyPr>
+          <a:lstStyle/>
+          <a:p>
+            <a:pPr marL="0" marR="0" indent="0" algn="just" fontAlgn="base" latinLnBrk="1">
+              <a:lnSpc>
+                <a:spcPct val="160000"/>
+              </a:lnSpc>
+              <a:spcBef>
+                <a:spcPts val="0"/>
+              </a:spcBef>
+              <a:spcAft>
+                <a:spcPts val="0"/>
+              </a:spcAft>
+            </a:pPr>
+            <a:r>
+              <a:rPr lang="en-US" altLang="ko-KR" sz="2800" b="1" kern="0" spc="0" dirty="0">
+                <a:solidFill>
+                  <a:srgbClr val="000000"/>
+                </a:solidFill>
+                <a:effectLst/>
+                <a:latin typeface="ADLaM Display" panose="02010000000000000000" pitchFamily="2" charset="0"/>
+                <a:ea typeface="ADLaM Display" panose="02010000000000000000" pitchFamily="2" charset="0"/>
+                <a:cs typeface="ADLaM Display" panose="02010000000000000000" pitchFamily="2" charset="0"/>
+              </a:rPr>
+              <a:t>Firebase </a:t>
+            </a:r>
+            <a:r>
+              <a:rPr lang="ko-KR" altLang="en-US" sz="2800" b="1" kern="0" spc="0" dirty="0">
+                <a:solidFill>
+                  <a:srgbClr val="000000"/>
+                </a:solidFill>
+                <a:effectLst/>
+                <a:latin typeface="ADLaM Display" panose="02010000000000000000" pitchFamily="2" charset="0"/>
+                <a:ea typeface="함초롬바탕" panose="02030604000101010101" pitchFamily="18" charset="-127"/>
+                <a:cs typeface="ADLaM Display" panose="02010000000000000000" pitchFamily="2" charset="0"/>
+              </a:rPr>
+              <a:t>앱 로그 기반 데이터 분석 </a:t>
+            </a:r>
+            <a:endParaRPr lang="en-US" altLang="ko-KR" sz="2800" b="1" kern="0" spc="0" dirty="0">
+              <a:solidFill>
+                <a:srgbClr val="000000"/>
+              </a:solidFill>
+              <a:effectLst/>
+              <a:latin typeface="ADLaM Display" panose="02010000000000000000" pitchFamily="2" charset="0"/>
+              <a:ea typeface="ADLaM Display" panose="02010000000000000000" pitchFamily="2" charset="0"/>
+              <a:cs typeface="ADLaM Display" panose="02010000000000000000" pitchFamily="2" charset="0"/>
+            </a:endParaRPr>
+          </a:p>
+          <a:p>
+            <a:pPr algn="just" fontAlgn="base">
+              <a:lnSpc>
+                <a:spcPct val="160000"/>
+              </a:lnSpc>
+            </a:pPr>
+            <a:r>
+              <a:rPr lang="en-US" altLang="ko-KR" sz="1800" kern="0" spc="0" dirty="0">
+                <a:solidFill>
+                  <a:srgbClr val="000000"/>
+                </a:solidFill>
+                <a:effectLst/>
+                <a:latin typeface="ADLaM Display" panose="02010000000000000000" pitchFamily="2" charset="0"/>
+                <a:ea typeface="ADLaM Display" panose="02010000000000000000" pitchFamily="2" charset="0"/>
+                <a:cs typeface="ADLaM Display" panose="02010000000000000000" pitchFamily="2" charset="0"/>
+              </a:rPr>
+              <a:t>&lt;1. </a:t>
+            </a:r>
+            <a:r>
+              <a:rPr lang="ko-KR" altLang="en-US" sz="1800" kern="0" spc="0" dirty="0" err="1">
+                <a:solidFill>
+                  <a:srgbClr val="000000"/>
+                </a:solidFill>
+                <a:effectLst/>
+                <a:latin typeface="ADLaM Display" panose="02010000000000000000" pitchFamily="2" charset="0"/>
+                <a:cs typeface="ADLaM Display" panose="02010000000000000000" pitchFamily="2" charset="0"/>
+              </a:rPr>
+              <a:t>퍼널</a:t>
+            </a:r>
+            <a:r>
+              <a:rPr lang="ko-KR" altLang="en-US" sz="1800" kern="0" spc="0" dirty="0">
+                <a:solidFill>
+                  <a:srgbClr val="000000"/>
+                </a:solidFill>
+                <a:effectLst/>
+                <a:latin typeface="ADLaM Display" panose="02010000000000000000" pitchFamily="2" charset="0"/>
+                <a:cs typeface="ADLaM Display" panose="02010000000000000000" pitchFamily="2" charset="0"/>
+              </a:rPr>
+              <a:t> 분석 쿼리</a:t>
+            </a:r>
+            <a:r>
+              <a:rPr lang="en-US" altLang="ko-KR" kern="0" dirty="0">
+                <a:solidFill>
+                  <a:srgbClr val="000000"/>
+                </a:solidFill>
+                <a:latin typeface="ADLaM Display" panose="02010000000000000000" pitchFamily="2" charset="0"/>
+                <a:ea typeface="ADLaM Display" panose="02010000000000000000" pitchFamily="2" charset="0"/>
+                <a:cs typeface="ADLaM Display" panose="02010000000000000000" pitchFamily="2" charset="0"/>
+              </a:rPr>
+              <a:t>&gt;</a:t>
+            </a:r>
+            <a:endParaRPr lang="en-US" altLang="ko-KR" sz="1800" kern="0" spc="0" dirty="0">
+              <a:solidFill>
+                <a:srgbClr val="000000"/>
+              </a:solidFill>
+              <a:effectLst/>
+              <a:latin typeface="ADLaM Display" panose="02010000000000000000" pitchFamily="2" charset="0"/>
+              <a:ea typeface="ADLaM Display" panose="02010000000000000000" pitchFamily="2" charset="0"/>
+              <a:cs typeface="ADLaM Display" panose="02010000000000000000" pitchFamily="2" charset="0"/>
+            </a:endParaRPr>
+          </a:p>
+          <a:p>
+            <a:endParaRPr lang="ko-KR" altLang="en-US" dirty="0">
+              <a:latin typeface="ADLaM Display" panose="02010000000000000000" pitchFamily="2" charset="0"/>
+              <a:cs typeface="ADLaM Display" panose="02010000000000000000" pitchFamily="2" charset="0"/>
+            </a:endParaRPr>
+          </a:p>
+        </p:txBody>
+      </p:sp>
+      <p:sp>
+        <p:nvSpPr>
+          <p:cNvPr id="2" name="TextBox 1">
+            <a:extLst>
+              <a:ext uri="{FF2B5EF4-FFF2-40B4-BE49-F238E27FC236}">
+                <a16:creationId xmlns:a16="http://schemas.microsoft.com/office/drawing/2014/main" id="{7CDBCF1A-B942-35FC-48D2-4DC6D4E0168F}"/>
+              </a:ext>
+            </a:extLst>
+          </p:cNvPr>
+          <p:cNvSpPr txBox="1"/>
+          <p:nvPr/>
+        </p:nvSpPr>
+        <p:spPr>
+          <a:xfrm>
+            <a:off x="166255" y="1263432"/>
+            <a:ext cx="8756072" cy="230832"/>
+          </a:xfrm>
+          <a:prstGeom prst="rect">
+            <a:avLst/>
+          </a:prstGeom>
+          <a:noFill/>
+        </p:spPr>
+        <p:txBody>
+          <a:bodyPr wrap="square" rtlCol="0">
+            <a:spAutoFit/>
+          </a:bodyPr>
+          <a:lstStyle/>
+          <a:p>
+            <a:r>
+              <a:rPr lang="en-US" altLang="ko-KR" sz="900" dirty="0" err="1">
+                <a:latin typeface="ADLaM Display" panose="02010000000000000000" pitchFamily="2" charset="0"/>
+                <a:ea typeface="ADLaM Display" panose="02010000000000000000" pitchFamily="2" charset="0"/>
+                <a:cs typeface="ADLaM Display" panose="02010000000000000000" pitchFamily="2" charset="0"/>
+              </a:rPr>
+              <a:t>screen_view</a:t>
+            </a:r>
+            <a:r>
+              <a:rPr lang="en-US" altLang="ko-KR" sz="900" dirty="0">
+                <a:latin typeface="ADLaM Display" panose="02010000000000000000" pitchFamily="2" charset="0"/>
+                <a:ea typeface="ADLaM Display" panose="02010000000000000000" pitchFamily="2" charset="0"/>
+                <a:cs typeface="ADLaM Display" panose="02010000000000000000" pitchFamily="2" charset="0"/>
+              </a:rPr>
+              <a:t>(welcome)     </a:t>
+            </a:r>
+            <a:r>
+              <a:rPr lang="en-US" altLang="ko-KR" sz="900" dirty="0" err="1">
+                <a:latin typeface="ADLaM Display" panose="02010000000000000000" pitchFamily="2" charset="0"/>
+                <a:ea typeface="ADLaM Display" panose="02010000000000000000" pitchFamily="2" charset="0"/>
+                <a:cs typeface="ADLaM Display" panose="02010000000000000000" pitchFamily="2" charset="0"/>
+              </a:rPr>
+              <a:t>screen_view</a:t>
+            </a:r>
+            <a:r>
+              <a:rPr lang="en-US" altLang="ko-KR" sz="900" dirty="0">
+                <a:latin typeface="ADLaM Display" panose="02010000000000000000" pitchFamily="2" charset="0"/>
+                <a:ea typeface="ADLaM Display" panose="02010000000000000000" pitchFamily="2" charset="0"/>
+                <a:cs typeface="ADLaM Display" panose="02010000000000000000" pitchFamily="2" charset="0"/>
+              </a:rPr>
+              <a:t>(home)    </a:t>
+            </a:r>
+            <a:r>
+              <a:rPr lang="en-US" altLang="ko-KR" sz="900" dirty="0" err="1">
+                <a:latin typeface="ADLaM Display" panose="02010000000000000000" pitchFamily="2" charset="0"/>
+                <a:ea typeface="ADLaM Display" panose="02010000000000000000" pitchFamily="2" charset="0"/>
+                <a:cs typeface="ADLaM Display" panose="02010000000000000000" pitchFamily="2" charset="0"/>
+              </a:rPr>
+              <a:t>screen_view</a:t>
+            </a:r>
+            <a:r>
+              <a:rPr lang="en-US" altLang="ko-KR" sz="900" dirty="0">
+                <a:latin typeface="ADLaM Display" panose="02010000000000000000" pitchFamily="2" charset="0"/>
+                <a:ea typeface="ADLaM Display" panose="02010000000000000000" pitchFamily="2" charset="0"/>
+                <a:cs typeface="ADLaM Display" panose="02010000000000000000" pitchFamily="2" charset="0"/>
+              </a:rPr>
+              <a:t>(</a:t>
+            </a:r>
+            <a:r>
+              <a:rPr lang="en-US" altLang="ko-KR" sz="900" dirty="0" err="1">
+                <a:latin typeface="ADLaM Display" panose="02010000000000000000" pitchFamily="2" charset="0"/>
+                <a:ea typeface="ADLaM Display" panose="02010000000000000000" pitchFamily="2" charset="0"/>
+                <a:cs typeface="ADLaM Display" panose="02010000000000000000" pitchFamily="2" charset="0"/>
+              </a:rPr>
+              <a:t>food_category</a:t>
+            </a:r>
+            <a:r>
+              <a:rPr lang="en-US" altLang="ko-KR" sz="900" dirty="0">
+                <a:latin typeface="ADLaM Display" panose="02010000000000000000" pitchFamily="2" charset="0"/>
+                <a:ea typeface="ADLaM Display" panose="02010000000000000000" pitchFamily="2" charset="0"/>
+                <a:cs typeface="ADLaM Display" panose="02010000000000000000" pitchFamily="2" charset="0"/>
+              </a:rPr>
+              <a:t>)             </a:t>
+            </a:r>
+            <a:r>
+              <a:rPr lang="en-US" altLang="ko-KR" sz="900" dirty="0" err="1">
+                <a:latin typeface="ADLaM Display" panose="02010000000000000000" pitchFamily="2" charset="0"/>
+                <a:ea typeface="ADLaM Display" panose="02010000000000000000" pitchFamily="2" charset="0"/>
+                <a:cs typeface="ADLaM Display" panose="02010000000000000000" pitchFamily="2" charset="0"/>
+              </a:rPr>
+              <a:t>screen_view</a:t>
+            </a:r>
+            <a:r>
+              <a:rPr lang="en-US" altLang="ko-KR" sz="900" dirty="0">
+                <a:latin typeface="ADLaM Display" panose="02010000000000000000" pitchFamily="2" charset="0"/>
+                <a:ea typeface="ADLaM Display" panose="02010000000000000000" pitchFamily="2" charset="0"/>
+                <a:cs typeface="ADLaM Display" panose="02010000000000000000" pitchFamily="2" charset="0"/>
+              </a:rPr>
+              <a:t>(</a:t>
+            </a:r>
+            <a:r>
+              <a:rPr lang="en-US" altLang="ko-KR" sz="900" dirty="0" err="1">
+                <a:latin typeface="ADLaM Display" panose="02010000000000000000" pitchFamily="2" charset="0"/>
+                <a:ea typeface="ADLaM Display" panose="02010000000000000000" pitchFamily="2" charset="0"/>
+                <a:cs typeface="ADLaM Display" panose="02010000000000000000" pitchFamily="2" charset="0"/>
+              </a:rPr>
+              <a:t>restaurank</a:t>
+            </a:r>
+            <a:r>
+              <a:rPr lang="en-US" altLang="ko-KR" sz="900" dirty="0">
+                <a:latin typeface="ADLaM Display" panose="02010000000000000000" pitchFamily="2" charset="0"/>
+                <a:ea typeface="ADLaM Display" panose="02010000000000000000" pitchFamily="2" charset="0"/>
+                <a:cs typeface="ADLaM Display" panose="02010000000000000000" pitchFamily="2" charset="0"/>
+              </a:rPr>
+              <a:t>)       </a:t>
+            </a:r>
+            <a:r>
+              <a:rPr lang="en-US" altLang="ko-KR" sz="900" dirty="0" err="1">
+                <a:latin typeface="ADLaM Display" panose="02010000000000000000" pitchFamily="2" charset="0"/>
+                <a:ea typeface="ADLaM Display" panose="02010000000000000000" pitchFamily="2" charset="0"/>
+                <a:cs typeface="ADLaM Display" panose="02010000000000000000" pitchFamily="2" charset="0"/>
+              </a:rPr>
+              <a:t>screen_view</a:t>
+            </a:r>
+            <a:r>
+              <a:rPr lang="en-US" altLang="ko-KR" sz="900" dirty="0">
+                <a:latin typeface="ADLaM Display" panose="02010000000000000000" pitchFamily="2" charset="0"/>
+                <a:ea typeface="ADLaM Display" panose="02010000000000000000" pitchFamily="2" charset="0"/>
+                <a:cs typeface="ADLaM Display" panose="02010000000000000000" pitchFamily="2" charset="0"/>
+              </a:rPr>
+              <a:t>(cart)       </a:t>
+            </a:r>
+            <a:r>
+              <a:rPr lang="en-US" altLang="ko-KR" sz="900" dirty="0" err="1">
+                <a:latin typeface="ADLaM Display" panose="02010000000000000000" pitchFamily="2" charset="0"/>
+                <a:ea typeface="ADLaM Display" panose="02010000000000000000" pitchFamily="2" charset="0"/>
+                <a:cs typeface="ADLaM Display" panose="02010000000000000000" pitchFamily="2" charset="0"/>
+              </a:rPr>
+              <a:t>click_payment</a:t>
+            </a:r>
+            <a:r>
+              <a:rPr lang="en-US" altLang="ko-KR" sz="900" dirty="0">
+                <a:latin typeface="ADLaM Display" panose="02010000000000000000" pitchFamily="2" charset="0"/>
+                <a:ea typeface="ADLaM Display" panose="02010000000000000000" pitchFamily="2" charset="0"/>
+                <a:cs typeface="ADLaM Display" panose="02010000000000000000" pitchFamily="2" charset="0"/>
+              </a:rPr>
+              <a:t>(cart)</a:t>
+            </a:r>
+            <a:endParaRPr lang="ko-KR" altLang="en-US" sz="900" dirty="0">
+              <a:latin typeface="ADLaM Display" panose="02010000000000000000" pitchFamily="2" charset="0"/>
+              <a:cs typeface="ADLaM Display" panose="02010000000000000000" pitchFamily="2" charset="0"/>
+            </a:endParaRPr>
+          </a:p>
+        </p:txBody>
+      </p:sp>
+      <p:pic>
+        <p:nvPicPr>
+          <p:cNvPr id="5" name="그림 4" descr="텍스트, 스크린샷, 폰트이(가) 표시된 사진&#10;&#10;자동 생성된 설명">
+            <a:extLst>
+              <a:ext uri="{FF2B5EF4-FFF2-40B4-BE49-F238E27FC236}">
+                <a16:creationId xmlns:a16="http://schemas.microsoft.com/office/drawing/2014/main" id="{4656810B-9AD5-1BF2-319E-31E7D023B9C6}"/>
+              </a:ext>
+            </a:extLst>
+          </p:cNvPr>
+          <p:cNvPicPr>
+            <a:picLocks noChangeAspect="1"/>
+          </p:cNvPicPr>
+          <p:nvPr/>
+        </p:nvPicPr>
+        <p:blipFill>
+          <a:blip r:embed="rId2">
+            <a:extLst>
+              <a:ext uri="{28A0092B-C50C-407E-A947-70E740481C1C}">
+                <a14:useLocalDpi xmlns:a14="http://schemas.microsoft.com/office/drawing/2010/main" val="0"/>
+              </a:ext>
+            </a:extLst>
+          </a:blip>
+          <a:stretch>
+            <a:fillRect/>
+          </a:stretch>
+        </p:blipFill>
+        <p:spPr>
+          <a:xfrm>
+            <a:off x="249797" y="1531573"/>
+            <a:ext cx="3743331" cy="3091908"/>
+          </a:xfrm>
+          <a:prstGeom prst="rect">
+            <a:avLst/>
+          </a:prstGeom>
+        </p:spPr>
+      </p:pic>
+      <p:pic>
+        <p:nvPicPr>
+          <p:cNvPr id="8" name="그림 7" descr="텍스트, 스크린샷, 폰트, 번호이(가) 표시된 사진&#10;&#10;자동 생성된 설명">
+            <a:extLst>
+              <a:ext uri="{FF2B5EF4-FFF2-40B4-BE49-F238E27FC236}">
+                <a16:creationId xmlns:a16="http://schemas.microsoft.com/office/drawing/2014/main" id="{ABF65125-4887-04A9-2F2B-2F6F597EA6ED}"/>
+              </a:ext>
+            </a:extLst>
+          </p:cNvPr>
+          <p:cNvPicPr>
+            <a:picLocks noChangeAspect="1"/>
+          </p:cNvPicPr>
+          <p:nvPr/>
+        </p:nvPicPr>
+        <p:blipFill>
+          <a:blip r:embed="rId3">
+            <a:extLst>
+              <a:ext uri="{28A0092B-C50C-407E-A947-70E740481C1C}">
+                <a14:useLocalDpi xmlns:a14="http://schemas.microsoft.com/office/drawing/2010/main" val="0"/>
+              </a:ext>
+            </a:extLst>
+          </a:blip>
+          <a:stretch>
+            <a:fillRect/>
+          </a:stretch>
+        </p:blipFill>
+        <p:spPr>
+          <a:xfrm>
+            <a:off x="4720494" y="1494265"/>
+            <a:ext cx="3186213" cy="2939190"/>
+          </a:xfrm>
+          <a:prstGeom prst="rect">
+            <a:avLst/>
+          </a:prstGeom>
+        </p:spPr>
+      </p:pic>
+      <p:pic>
+        <p:nvPicPr>
+          <p:cNvPr id="11" name="그림 10" descr="텍스트, 폰트, 스크린샷이(가) 표시된 사진&#10;&#10;자동 생성된 설명">
+            <a:extLst>
+              <a:ext uri="{FF2B5EF4-FFF2-40B4-BE49-F238E27FC236}">
+                <a16:creationId xmlns:a16="http://schemas.microsoft.com/office/drawing/2014/main" id="{C0AE261B-373D-B92F-4312-A87A6AB64558}"/>
+              </a:ext>
+            </a:extLst>
+          </p:cNvPr>
+          <p:cNvPicPr>
+            <a:picLocks noChangeAspect="1"/>
+          </p:cNvPicPr>
+          <p:nvPr/>
+        </p:nvPicPr>
+        <p:blipFill>
+          <a:blip r:embed="rId4">
+            <a:extLst>
+              <a:ext uri="{28A0092B-C50C-407E-A947-70E740481C1C}">
+                <a14:useLocalDpi xmlns:a14="http://schemas.microsoft.com/office/drawing/2010/main" val="0"/>
+              </a:ext>
+            </a:extLst>
+          </a:blip>
+          <a:stretch>
+            <a:fillRect/>
+          </a:stretch>
+        </p:blipFill>
+        <p:spPr>
+          <a:xfrm>
+            <a:off x="249797" y="4687339"/>
+            <a:ext cx="9356435" cy="1995170"/>
+          </a:xfrm>
+          <a:prstGeom prst="rect">
+            <a:avLst/>
+          </a:prstGeom>
+        </p:spPr>
+      </p:pic>
+    </p:spTree>
+    <p:extLst>
+      <p:ext uri="{BB962C8B-B14F-4D97-AF65-F5344CB8AC3E}">
+        <p14:creationId xmlns:p14="http://schemas.microsoft.com/office/powerpoint/2010/main" val="3505977161"/>
+      </p:ext>
+    </p:extLst>
+  </p:cSld>
+  <p:clrMapOvr>
+    <a:masterClrMapping/>
+  </p:clrMapOvr>
+</p:sld>
+</file>
+
+<file path=ppt/slides/slide4.xml><?xml version="1.0" encoding="utf-8"?>
+<p:sld xmlns:a="http://schemas.openxmlformats.org/drawingml/2006/main" xmlns:r="http://schemas.openxmlformats.org/officeDocument/2006/relationships" xmlns:p="http://schemas.openxmlformats.org/presentationml/2006/main">
+  <p:cSld>
+    <p:spTree>
+      <p:nvGrpSpPr>
+        <p:cNvPr id="1" name="">
+          <a:extLst>
+            <a:ext uri="{FF2B5EF4-FFF2-40B4-BE49-F238E27FC236}">
               <a16:creationId xmlns:a16="http://schemas.microsoft.com/office/drawing/2014/main" id="{2DE1FBC4-9F05-FCE2-8C39-CAD9677DF89F}"/>
             </a:ext>
           </a:extLst>
@@ -4775,7 +10004,7 @@
                 <a:ea typeface="ADLaM Display" panose="02010000000000000000" pitchFamily="2" charset="0"/>
                 <a:cs typeface="ADLaM Display" panose="02010000000000000000" pitchFamily="2" charset="0"/>
               </a:rPr>
-              <a:t>&lt;</a:t>
+              <a:t>&lt;1. </a:t>
             </a:r>
             <a:r>
               <a:rPr lang="ko-KR" altLang="en-US" sz="1800" kern="0" spc="0" dirty="0" err="1">
@@ -4797,7 +10026,7 @@
                 <a:latin typeface="ADLaM Display" panose="02010000000000000000" pitchFamily="2" charset="0"/>
                 <a:cs typeface="ADLaM Display" panose="02010000000000000000" pitchFamily="2" charset="0"/>
               </a:rPr>
-              <a:t> 분석</a:t>
+              <a:t> 분석 시각화</a:t>
             </a:r>
             <a:r>
               <a:rPr lang="en-US" altLang="ko-KR" kern="0" dirty="0">
@@ -4853,6 +10082,17 @@
               </a:spcAft>
             </a:pPr>
             <a:r>
+              <a:rPr lang="ko-KR" altLang="en-US" kern="0" dirty="0">
+                <a:solidFill>
+                  <a:srgbClr val="000000"/>
+                </a:solidFill>
+                <a:latin typeface="ADLaM Display" panose="02010000000000000000" pitchFamily="2" charset="0"/>
+                <a:ea typeface="ADLaM Display" panose="02010000000000000000" pitchFamily="2" charset="0"/>
+                <a:cs typeface="ADLaM Display" panose="02010000000000000000" pitchFamily="2" charset="0"/>
+              </a:rPr>
+              <a:t>위 </a:t>
+            </a:r>
+            <a:r>
               <a:rPr lang="en-US" altLang="ko-KR" kern="0" dirty="0">
                 <a:solidFill>
                   <a:srgbClr val="000000"/>
@@ -4893,12 +10133,12 @@
               </a:rPr>
               <a:t> 집계한 결과를 스프레드 시트로 시각화</a:t>
             </a:r>
-            <a:endParaRPr lang="ko-KR" altLang="en-US" sz="1800" kern="0" spc="0" dirty="0">
+            <a:endParaRPr lang="en-US" altLang="ko-KR" kern="0" dirty="0">
               <a:solidFill>
                 <a:srgbClr val="000000"/>
               </a:solidFill>
-              <a:effectLst/>
               <a:latin typeface="ADLaM Display" panose="02010000000000000000" pitchFamily="2" charset="0"/>
+              <a:ea typeface="ADLaM Display" panose="02010000000000000000" pitchFamily="2" charset="0"/>
               <a:cs typeface="ADLaM Display" panose="02010000000000000000" pitchFamily="2" charset="0"/>
             </a:endParaRPr>
           </a:p>
@@ -4938,7 +10178,7 @@
         </p:blipFill>
         <p:spPr>
           <a:xfrm>
-            <a:off x="7391596" y="175491"/>
+            <a:off x="7660438" y="135650"/>
             <a:ext cx="3666836" cy="2185678"/>
           </a:xfrm>
           <a:prstGeom prst="rect">
@@ -5067,7 +10307,7 @@
 </p:sld>
 </file>
 
-<file path=ppt/slides/slide4.xml><?xml version="1.0" encoding="utf-8"?>
+<file path=ppt/slides/slide5.xml><?xml version="1.0" encoding="utf-8"?>
 <p:sld xmlns:a="http://schemas.openxmlformats.org/drawingml/2006/main" xmlns:r="http://schemas.openxmlformats.org/officeDocument/2006/relationships" xmlns:p="http://schemas.openxmlformats.org/presentationml/2006/main">
   <p:cSld>
     <p:spTree>
@@ -5179,7 +10419,7 @@
                 <a:ea typeface="ADLaM Display" panose="02010000000000000000" pitchFamily="2" charset="0"/>
                 <a:cs typeface="ADLaM Display" panose="02010000000000000000" pitchFamily="2" charset="0"/>
               </a:rPr>
-              <a:t>&lt;</a:t>
+              <a:t>&lt;1. </a:t>
             </a:r>
             <a:r>
               <a:rPr lang="ko-KR" altLang="en-US" sz="1800" kern="0" spc="0" dirty="0" err="1">
@@ -5201,7 +10441,7 @@
                 <a:latin typeface="ADLaM Display" panose="02010000000000000000" pitchFamily="2" charset="0"/>
                 <a:cs typeface="ADLaM Display" panose="02010000000000000000" pitchFamily="2" charset="0"/>
               </a:rPr>
-              <a:t> 분석</a:t>
+              <a:t> 분석 해석</a:t>
             </a:r>
             <a:r>
               <a:rPr lang="en-US" altLang="ko-KR" kern="0" dirty="0">
@@ -5240,7 +10480,7 @@
                 <a:srgbClr val="000000"/>
               </a:solidFill>
               <a:latin typeface="ADLaM Display" panose="02010000000000000000" pitchFamily="2" charset="0"/>
-              <a:ea typeface="함초롬바탕" panose="02030604000101010101" pitchFamily="18" charset="-127"/>
+              <a:ea typeface="ADLaM Display" panose="02010000000000000000" pitchFamily="2" charset="0"/>
               <a:cs typeface="ADLaM Display" panose="02010000000000000000" pitchFamily="2" charset="0"/>
             </a:endParaRPr>
           </a:p>
@@ -5960,7 +11200,7 @@
 </p:sld>
 </file>
 
-<file path=ppt/slides/slide5.xml><?xml version="1.0" encoding="utf-8"?>
+<file path=ppt/slides/slide6.xml><?xml version="1.0" encoding="utf-8"?>
 <p:sld xmlns:a="http://schemas.openxmlformats.org/drawingml/2006/main" xmlns:r="http://schemas.openxmlformats.org/officeDocument/2006/relationships" xmlns:p="http://schemas.openxmlformats.org/presentationml/2006/main">
   <p:cSld>
     <p:spTree>
@@ -6072,7 +11312,7 @@
                 <a:ea typeface="ADLaM Display" panose="02010000000000000000" pitchFamily="2" charset="0"/>
                 <a:cs typeface="ADLaM Display" panose="02010000000000000000" pitchFamily="2" charset="0"/>
               </a:rPr>
-              <a:t>&lt;</a:t>
+              <a:t>&lt;2. </a:t>
             </a:r>
             <a:r>
               <a:rPr lang="ko-KR" altLang="en-US" kern="0" dirty="0" err="1">
@@ -6140,18 +11380,17 @@
                 <a:latin typeface="ADLaM Display" panose="02010000000000000000" pitchFamily="2" charset="0"/>
                 <a:cs typeface="ADLaM Display" panose="02010000000000000000" pitchFamily="2" charset="0"/>
               </a:rPr>
-              <a:t>쿼리를 통해 사용자 행동 데이터</a:t>
-            </a:r>
-            <a:r>
-              <a:rPr lang="en-US" altLang="ko-KR" kern="0" dirty="0">
-                <a:solidFill>
-                  <a:srgbClr val="000000"/>
-                </a:solidFill>
-                <a:latin typeface="ADLaM Display" panose="02010000000000000000" pitchFamily="2" charset="0"/>
-                <a:ea typeface="ADLaM Display" panose="02010000000000000000" pitchFamily="2" charset="0"/>
-                <a:cs typeface="ADLaM Display" panose="02010000000000000000" pitchFamily="2" charset="0"/>
-              </a:rPr>
-              <a:t>, </a:t>
+              <a:t>쿼리를 통해 주 별 </a:t>
+            </a:r>
+            <a:r>
+              <a:rPr lang="ko-KR" altLang="en-US" kern="0" dirty="0" err="1">
+                <a:solidFill>
+                  <a:srgbClr val="000000"/>
+                </a:solidFill>
+                <a:latin typeface="ADLaM Display" panose="02010000000000000000" pitchFamily="2" charset="0"/>
+                <a:cs typeface="ADLaM Display" panose="02010000000000000000" pitchFamily="2" charset="0"/>
+              </a:rPr>
+              <a:t>리텐션</a:t>
             </a:r>
             <a:r>
               <a:rPr lang="ko-KR" altLang="en-US" kern="0" dirty="0">
@@ -6161,7 +11400,7 @@
                 <a:latin typeface="ADLaM Display" panose="02010000000000000000" pitchFamily="2" charset="0"/>
                 <a:cs typeface="ADLaM Display" panose="02010000000000000000" pitchFamily="2" charset="0"/>
               </a:rPr>
-              <a:t>행동 로그 집계</a:t>
+              <a:t> 그래프 도출</a:t>
             </a:r>
             <a:endParaRPr lang="en-US" altLang="ko-KR" sz="1800" kern="0" spc="0" dirty="0">
               <a:solidFill>
@@ -6179,7 +11418,10 @@
                 <a:spcPct val="160000"/>
               </a:lnSpc>
             </a:pPr>
-            <a:endParaRPr lang="ko-KR" altLang="en-US" dirty="0"/>
+            <a:endParaRPr lang="ko-KR" altLang="en-US" dirty="0">
+              <a:latin typeface="ADLaM Display" panose="02010000000000000000" pitchFamily="2" charset="0"/>
+              <a:cs typeface="ADLaM Display" panose="02010000000000000000" pitchFamily="2" charset="0"/>
+            </a:endParaRPr>
           </a:p>
         </p:txBody>
       </p:sp>
@@ -6550,7 +11792,7 @@
 </p:sld>
 </file>
 
-<file path=ppt/slides/slide6.xml><?xml version="1.0" encoding="utf-8"?>
+<file path=ppt/slides/slide7.xml><?xml version="1.0" encoding="utf-8"?>
 <p:sld xmlns:a="http://schemas.openxmlformats.org/drawingml/2006/main" xmlns:r="http://schemas.openxmlformats.org/officeDocument/2006/relationships" xmlns:p="http://schemas.openxmlformats.org/presentationml/2006/main">
   <p:cSld>
     <p:spTree>
@@ -6662,7 +11904,7 @@
                 <a:ea typeface="ADLaM Display" panose="02010000000000000000" pitchFamily="2" charset="0"/>
                 <a:cs typeface="ADLaM Display" panose="02010000000000000000" pitchFamily="2" charset="0"/>
               </a:rPr>
-              <a:t>&lt;</a:t>
+              <a:t>&lt;2. </a:t>
             </a:r>
             <a:r>
               <a:rPr lang="ko-KR" altLang="en-US" kern="0" dirty="0" err="1">
@@ -6711,7 +11953,10 @@
                 <a:spcPct val="160000"/>
               </a:lnSpc>
             </a:pPr>
-            <a:endParaRPr lang="ko-KR" altLang="en-US" dirty="0"/>
+            <a:endParaRPr lang="ko-KR" altLang="en-US" dirty="0">
+              <a:latin typeface="ADLaM Display" panose="02010000000000000000" pitchFamily="2" charset="0"/>
+              <a:cs typeface="ADLaM Display" panose="02010000000000000000" pitchFamily="2" charset="0"/>
+            </a:endParaRPr>
           </a:p>
         </p:txBody>
       </p:sp>
@@ -6919,7 +12164,256 @@
 </p:sld>
 </file>
 
-<file path=ppt/slides/slide7.xml><?xml version="1.0" encoding="utf-8"?>
+<file path=ppt/slides/slide8.xml><?xml version="1.0" encoding="utf-8"?>
+<p:sld xmlns:a="http://schemas.openxmlformats.org/drawingml/2006/main" xmlns:r="http://schemas.openxmlformats.org/officeDocument/2006/relationships" xmlns:p="http://schemas.openxmlformats.org/presentationml/2006/main">
+  <p:cSld>
+    <p:spTree>
+      <p:nvGrpSpPr>
+        <p:cNvPr id="1" name="">
+          <a:extLst>
+            <a:ext uri="{FF2B5EF4-FFF2-40B4-BE49-F238E27FC236}">
+              <a16:creationId xmlns:a16="http://schemas.microsoft.com/office/drawing/2014/main" id="{D953D0AC-885D-DC22-2491-A078403FD77C}"/>
+            </a:ext>
+          </a:extLst>
+        </p:cNvPr>
+        <p:cNvGrpSpPr/>
+        <p:nvPr/>
+      </p:nvGrpSpPr>
+      <p:grpSpPr>
+        <a:xfrm>
+          <a:off x="0" y="0"/>
+          <a:ext cx="0" cy="0"/>
+          <a:chOff x="0" y="0"/>
+          <a:chExt cx="0" cy="0"/>
+        </a:xfrm>
+      </p:grpSpPr>
+      <p:sp>
+        <p:nvSpPr>
+          <p:cNvPr id="4" name="TextBox 3">
+            <a:extLst>
+              <a:ext uri="{FF2B5EF4-FFF2-40B4-BE49-F238E27FC236}">
+                <a16:creationId xmlns:a16="http://schemas.microsoft.com/office/drawing/2014/main" id="{46D8FEBF-5319-4227-F7E8-383B3A59ADF4}"/>
+              </a:ext>
+            </a:extLst>
+          </p:cNvPr>
+          <p:cNvSpPr txBox="1"/>
+          <p:nvPr/>
+        </p:nvSpPr>
+        <p:spPr>
+          <a:xfrm>
+            <a:off x="166255" y="175491"/>
+            <a:ext cx="11859490" cy="1501950"/>
+          </a:xfrm>
+          <a:prstGeom prst="rect">
+            <a:avLst/>
+          </a:prstGeom>
+          <a:noFill/>
+        </p:spPr>
+        <p:txBody>
+          <a:bodyPr wrap="square" rtlCol="0">
+            <a:spAutoFit/>
+          </a:bodyPr>
+          <a:lstStyle/>
+          <a:p>
+            <a:pPr marL="0" marR="0" indent="0" algn="just" fontAlgn="base" latinLnBrk="1">
+              <a:lnSpc>
+                <a:spcPct val="160000"/>
+              </a:lnSpc>
+              <a:spcBef>
+                <a:spcPts val="0"/>
+              </a:spcBef>
+              <a:spcAft>
+                <a:spcPts val="0"/>
+              </a:spcAft>
+            </a:pPr>
+            <a:r>
+              <a:rPr lang="en-US" altLang="ko-KR" sz="2800" b="1" kern="0" spc="0" dirty="0">
+                <a:solidFill>
+                  <a:srgbClr val="000000"/>
+                </a:solidFill>
+                <a:effectLst/>
+                <a:latin typeface="ADLaM Display" panose="02010000000000000000" pitchFamily="2" charset="0"/>
+                <a:ea typeface="ADLaM Display" panose="02010000000000000000" pitchFamily="2" charset="0"/>
+                <a:cs typeface="ADLaM Display" panose="02010000000000000000" pitchFamily="2" charset="0"/>
+              </a:rPr>
+              <a:t>Firebase </a:t>
+            </a:r>
+            <a:r>
+              <a:rPr lang="ko-KR" altLang="en-US" sz="2800" b="1" kern="0" spc="0" dirty="0">
+                <a:solidFill>
+                  <a:srgbClr val="000000"/>
+                </a:solidFill>
+                <a:effectLst/>
+                <a:latin typeface="ADLaM Display" panose="02010000000000000000" pitchFamily="2" charset="0"/>
+                <a:ea typeface="함초롬바탕" panose="02030604000101010101" pitchFamily="18" charset="-127"/>
+                <a:cs typeface="ADLaM Display" panose="02010000000000000000" pitchFamily="2" charset="0"/>
+              </a:rPr>
+              <a:t>앱 로그 기반 데이터 분석 </a:t>
+            </a:r>
+            <a:endParaRPr lang="en-US" altLang="ko-KR" sz="2800" b="1" kern="0" spc="0" dirty="0">
+              <a:solidFill>
+                <a:srgbClr val="000000"/>
+              </a:solidFill>
+              <a:effectLst/>
+              <a:latin typeface="ADLaM Display" panose="02010000000000000000" pitchFamily="2" charset="0"/>
+              <a:ea typeface="ADLaM Display" panose="02010000000000000000" pitchFamily="2" charset="0"/>
+              <a:cs typeface="ADLaM Display" panose="02010000000000000000" pitchFamily="2" charset="0"/>
+            </a:endParaRPr>
+          </a:p>
+          <a:p>
+            <a:pPr algn="just" fontAlgn="base">
+              <a:lnSpc>
+                <a:spcPct val="160000"/>
+              </a:lnSpc>
+            </a:pPr>
+            <a:r>
+              <a:rPr lang="en-US" altLang="ko-KR" sz="1800" kern="0" spc="0" dirty="0">
+                <a:solidFill>
+                  <a:srgbClr val="000000"/>
+                </a:solidFill>
+                <a:effectLst/>
+                <a:latin typeface="ADLaM Display" panose="02010000000000000000" pitchFamily="2" charset="0"/>
+                <a:ea typeface="ADLaM Display" panose="02010000000000000000" pitchFamily="2" charset="0"/>
+                <a:cs typeface="ADLaM Display" panose="02010000000000000000" pitchFamily="2" charset="0"/>
+              </a:rPr>
+              <a:t>&lt;2. </a:t>
+            </a:r>
+            <a:r>
+              <a:rPr lang="ko-KR" altLang="en-US" kern="0" dirty="0" err="1">
+                <a:solidFill>
+                  <a:srgbClr val="000000"/>
+                </a:solidFill>
+                <a:latin typeface="ADLaM Display" panose="02010000000000000000" pitchFamily="2" charset="0"/>
+                <a:cs typeface="ADLaM Display" panose="02010000000000000000" pitchFamily="2" charset="0"/>
+              </a:rPr>
+              <a:t>리텐션</a:t>
+            </a:r>
+            <a:r>
+              <a:rPr lang="ko-KR" altLang="en-US" sz="1800" kern="0" spc="0" dirty="0">
+                <a:solidFill>
+                  <a:srgbClr val="000000"/>
+                </a:solidFill>
+                <a:effectLst/>
+                <a:latin typeface="ADLaM Display" panose="02010000000000000000" pitchFamily="2" charset="0"/>
+                <a:cs typeface="ADLaM Display" panose="02010000000000000000" pitchFamily="2" charset="0"/>
+              </a:rPr>
+              <a:t> 분석 쿼리</a:t>
+            </a:r>
+            <a:r>
+              <a:rPr lang="en-US" altLang="ko-KR" kern="0" dirty="0">
+                <a:solidFill>
+                  <a:srgbClr val="000000"/>
+                </a:solidFill>
+                <a:latin typeface="ADLaM Display" panose="02010000000000000000" pitchFamily="2" charset="0"/>
+                <a:ea typeface="ADLaM Display" panose="02010000000000000000" pitchFamily="2" charset="0"/>
+                <a:cs typeface="ADLaM Display" panose="02010000000000000000" pitchFamily="2" charset="0"/>
+              </a:rPr>
+              <a:t>&gt;</a:t>
+            </a:r>
+            <a:endParaRPr lang="en-US" altLang="ko-KR" sz="1800" kern="0" spc="0" dirty="0">
+              <a:solidFill>
+                <a:srgbClr val="000000"/>
+              </a:solidFill>
+              <a:effectLst/>
+              <a:latin typeface="ADLaM Display" panose="02010000000000000000" pitchFamily="2" charset="0"/>
+              <a:ea typeface="ADLaM Display" panose="02010000000000000000" pitchFamily="2" charset="0"/>
+              <a:cs typeface="ADLaM Display" panose="02010000000000000000" pitchFamily="2" charset="0"/>
+            </a:endParaRPr>
+          </a:p>
+          <a:p>
+            <a:endParaRPr lang="ko-KR" altLang="en-US" dirty="0">
+              <a:latin typeface="ADLaM Display" panose="02010000000000000000" pitchFamily="2" charset="0"/>
+              <a:cs typeface="ADLaM Display" panose="02010000000000000000" pitchFamily="2" charset="0"/>
+            </a:endParaRPr>
+          </a:p>
+        </p:txBody>
+      </p:sp>
+      <p:pic>
+        <p:nvPicPr>
+          <p:cNvPr id="6" name="그림 5" descr="텍스트, 폰트, 스크린샷, 화이트이(가) 표시된 사진&#10;&#10;자동 생성된 설명">
+            <a:extLst>
+              <a:ext uri="{FF2B5EF4-FFF2-40B4-BE49-F238E27FC236}">
+                <a16:creationId xmlns:a16="http://schemas.microsoft.com/office/drawing/2014/main" id="{5DF875DB-EDD9-A1CC-D43F-B031FD475656}"/>
+              </a:ext>
+            </a:extLst>
+          </p:cNvPr>
+          <p:cNvPicPr>
+            <a:picLocks noChangeAspect="1"/>
+          </p:cNvPicPr>
+          <p:nvPr/>
+        </p:nvPicPr>
+        <p:blipFill>
+          <a:blip r:embed="rId2">
+            <a:extLst>
+              <a:ext uri="{28A0092B-C50C-407E-A947-70E740481C1C}">
+                <a14:useLocalDpi xmlns:a14="http://schemas.microsoft.com/office/drawing/2010/main" val="0"/>
+              </a:ext>
+            </a:extLst>
+          </a:blip>
+          <a:stretch>
+            <a:fillRect/>
+          </a:stretch>
+        </p:blipFill>
+        <p:spPr>
+          <a:xfrm>
+            <a:off x="166255" y="1441677"/>
+            <a:ext cx="7305963" cy="1501951"/>
+          </a:xfrm>
+          <a:prstGeom prst="rect">
+            <a:avLst/>
+          </a:prstGeom>
+        </p:spPr>
+      </p:pic>
+      <p:pic>
+        <p:nvPicPr>
+          <p:cNvPr id="9" name="그림 8" descr="텍스트, 스크린샷, 폰트이(가) 표시된 사진&#10;&#10;자동 생성된 설명">
+            <a:extLst>
+              <a:ext uri="{FF2B5EF4-FFF2-40B4-BE49-F238E27FC236}">
+                <a16:creationId xmlns:a16="http://schemas.microsoft.com/office/drawing/2014/main" id="{3601002D-7733-ACF4-AF3A-E212500547C5}"/>
+              </a:ext>
+            </a:extLst>
+          </p:cNvPr>
+          <p:cNvPicPr>
+            <a:picLocks noChangeAspect="1"/>
+          </p:cNvPicPr>
+          <p:nvPr/>
+        </p:nvPicPr>
+        <p:blipFill>
+          <a:blip r:embed="rId3">
+            <a:extLst>
+              <a:ext uri="{28A0092B-C50C-407E-A947-70E740481C1C}">
+                <a14:useLocalDpi xmlns:a14="http://schemas.microsoft.com/office/drawing/2010/main" val="0"/>
+              </a:ext>
+            </a:extLst>
+          </a:blip>
+          <a:stretch>
+            <a:fillRect/>
+          </a:stretch>
+        </p:blipFill>
+        <p:spPr>
+          <a:xfrm>
+            <a:off x="7604857" y="1146233"/>
+            <a:ext cx="4288249" cy="4565534"/>
+          </a:xfrm>
+          <a:prstGeom prst="rect">
+            <a:avLst/>
+          </a:prstGeom>
+        </p:spPr>
+      </p:pic>
+    </p:spTree>
+    <p:extLst>
+      <p:ext uri="{BB962C8B-B14F-4D97-AF65-F5344CB8AC3E}">
+        <p14:creationId xmlns:p14="http://schemas.microsoft.com/office/powerpoint/2010/main" val="3299902587"/>
+      </p:ext>
+    </p:extLst>
+  </p:cSld>
+  <p:clrMapOvr>
+    <a:masterClrMapping/>
+  </p:clrMapOvr>
+</p:sld>
+</file>
+
+<file path=ppt/slides/slide9.xml><?xml version="1.0" encoding="utf-8"?>
 <p:sld xmlns:a="http://schemas.openxmlformats.org/drawingml/2006/main" xmlns:r="http://schemas.openxmlformats.org/officeDocument/2006/relationships" xmlns:p="http://schemas.openxmlformats.org/presentationml/2006/main">
   <p:cSld>
     <p:spTree>
@@ -7031,7 +12525,7 @@
                 <a:ea typeface="ADLaM Display" panose="02010000000000000000" pitchFamily="2" charset="0"/>
                 <a:cs typeface="ADLaM Display" panose="02010000000000000000" pitchFamily="2" charset="0"/>
               </a:rPr>
-              <a:t>&lt;</a:t>
+              <a:t>&lt;2. </a:t>
             </a:r>
             <a:r>
               <a:rPr lang="ko-KR" altLang="en-US" kern="0" dirty="0" err="1">
@@ -7052,7 +12546,30 @@
                 <a:latin typeface="ADLaM Display" panose="02010000000000000000" pitchFamily="2" charset="0"/>
                 <a:cs typeface="ADLaM Display" panose="02010000000000000000" pitchFamily="2" charset="0"/>
               </a:rPr>
-              <a:t> 분석</a:t>
+              <a:t> 분석 시각화 </a:t>
+            </a:r>
+            <a:r>
+              <a:rPr lang="en-US" altLang="ko-KR" sz="1800" kern="0" spc="0" dirty="0">
+                <a:solidFill>
+                  <a:srgbClr val="000000"/>
+                </a:solidFill>
+                <a:effectLst/>
+                <a:latin typeface="ADLaM Display" panose="02010000000000000000" pitchFamily="2" charset="0"/>
+                <a:ea typeface="ADLaM Display" panose="02010000000000000000" pitchFamily="2" charset="0"/>
+                <a:cs typeface="ADLaM Display" panose="02010000000000000000" pitchFamily="2" charset="0"/>
+              </a:rPr>
+              <a:t>&amp; </a:t>
+            </a:r>
+            <a:r>
+              <a:rPr lang="ko-KR" altLang="en-US" sz="1800" kern="0" spc="0" dirty="0">
+                <a:solidFill>
+                  <a:srgbClr val="000000"/>
+                </a:solidFill>
+                <a:effectLst/>
+                <a:latin typeface="ADLaM Display" panose="02010000000000000000" pitchFamily="2" charset="0"/>
+                <a:cs typeface="ADLaM Display" panose="02010000000000000000" pitchFamily="2" charset="0"/>
+              </a:rPr>
+              <a:t>해석</a:t>
             </a:r>
             <a:r>
               <a:rPr lang="en-US" altLang="ko-KR" kern="0" dirty="0">
@@ -7080,7 +12597,10 @@
                 <a:spcPct val="160000"/>
               </a:lnSpc>
             </a:pPr>
-            <a:endParaRPr lang="ko-KR" altLang="en-US" dirty="0"/>
+            <a:endParaRPr lang="ko-KR" altLang="en-US" dirty="0">
+              <a:latin typeface="ADLaM Display" panose="02010000000000000000" pitchFamily="2" charset="0"/>
+              <a:cs typeface="ADLaM Display" panose="02010000000000000000" pitchFamily="2" charset="0"/>
+            </a:endParaRPr>
           </a:p>
         </p:txBody>
       </p:sp>
@@ -7187,6 +12707,7 @@
             </a:r>
             <a:endParaRPr lang="en-US" altLang="ko-KR" sz="1400" b="1" dirty="0">
               <a:latin typeface="ADLaM Display" panose="02010000000000000000" pitchFamily="2" charset="0"/>
+              <a:ea typeface="ADLaM Display" panose="02010000000000000000" pitchFamily="2" charset="0"/>
               <a:cs typeface="ADLaM Display" panose="02010000000000000000" pitchFamily="2" charset="0"/>
             </a:endParaRPr>
           </a:p>
@@ -7296,6 +12817,7 @@
             <a:r>
               <a:rPr lang="en-US" altLang="ko-KR" sz="1400" dirty="0">
                 <a:latin typeface="ADLaM Display" panose="02010000000000000000" pitchFamily="2" charset="0"/>
+                <a:ea typeface="ADLaM Display" panose="02010000000000000000" pitchFamily="2" charset="0"/>
                 <a:cs typeface="ADLaM Display" panose="02010000000000000000" pitchFamily="2" charset="0"/>
               </a:rPr>
               <a:t>- </a:t>
@@ -7406,6 +12928,7 @@
             </a:r>
             <a:endParaRPr lang="en-US" altLang="ko-KR" sz="1400" b="1" dirty="0">
               <a:latin typeface="ADLaM Display" panose="02010000000000000000" pitchFamily="2" charset="0"/>
+              <a:ea typeface="ADLaM Display" panose="02010000000000000000" pitchFamily="2" charset="0"/>
               <a:cs typeface="ADLaM Display" panose="02010000000000000000" pitchFamily="2" charset="0"/>
             </a:endParaRPr>
           </a:p>
@@ -7441,6 +12964,7 @@
           <a:p>
             <a:endParaRPr lang="en-US" altLang="ko-KR" sz="1400" dirty="0">
               <a:latin typeface="ADLaM Display" panose="02010000000000000000" pitchFamily="2" charset="0"/>
+              <a:ea typeface="ADLaM Display" panose="02010000000000000000" pitchFamily="2" charset="0"/>
               <a:cs typeface="ADLaM Display" panose="02010000000000000000" pitchFamily="2" charset="0"/>
             </a:endParaRPr>
           </a:p>
@@ -7448,6 +12972,7 @@
             <a:r>
               <a:rPr lang="en-US" altLang="ko-KR" sz="1400" dirty="0">
                 <a:latin typeface="ADLaM Display" panose="02010000000000000000" pitchFamily="2" charset="0"/>
+                <a:ea typeface="ADLaM Display" panose="02010000000000000000" pitchFamily="2" charset="0"/>
                 <a:cs typeface="ADLaM Display" panose="02010000000000000000" pitchFamily="2" charset="0"/>
               </a:rPr>
               <a:t>- </a:t>
@@ -7516,6 +13041,7 @@
           <a:p>
             <a:endParaRPr lang="en-US" altLang="ko-KR" sz="1400" dirty="0">
               <a:latin typeface="ADLaM Display" panose="02010000000000000000" pitchFamily="2" charset="0"/>
+              <a:ea typeface="ADLaM Display" panose="02010000000000000000" pitchFamily="2" charset="0"/>
               <a:cs typeface="ADLaM Display" panose="02010000000000000000" pitchFamily="2" charset="0"/>
             </a:endParaRPr>
           </a:p>
@@ -7523,6 +13049,7 @@
             <a:r>
               <a:rPr lang="en-US" altLang="ko-KR" sz="1400" dirty="0">
                 <a:latin typeface="ADLaM Display" panose="02010000000000000000" pitchFamily="2" charset="0"/>
+                <a:ea typeface="ADLaM Display" panose="02010000000000000000" pitchFamily="2" charset="0"/>
                 <a:cs typeface="ADLaM Display" panose="02010000000000000000" pitchFamily="2" charset="0"/>
               </a:rPr>
               <a:t>- </a:t>
@@ -7597,654 +13124,6 @@
     <p:extLst>
       <p:ext uri="{BB962C8B-B14F-4D97-AF65-F5344CB8AC3E}">
         <p14:creationId xmlns:p14="http://schemas.microsoft.com/office/powerpoint/2010/main" val="231107558"/>
-      </p:ext>
-    </p:extLst>
-  </p:cSld>
-  <p:clrMapOvr>
-    <a:masterClrMapping/>
-  </p:clrMapOvr>
-</p:sld>
-</file>
-
-<file path=ppt/slides/slide8.xml><?xml version="1.0" encoding="utf-8"?>
-<p:sld xmlns:a="http://schemas.openxmlformats.org/drawingml/2006/main" xmlns:r="http://schemas.openxmlformats.org/officeDocument/2006/relationships" xmlns:p="http://schemas.openxmlformats.org/presentationml/2006/main">
-  <p:cSld>
-    <p:spTree>
-      <p:nvGrpSpPr>
-        <p:cNvPr id="1" name="">
-          <a:extLst>
-            <a:ext uri="{FF2B5EF4-FFF2-40B4-BE49-F238E27FC236}">
-              <a16:creationId xmlns:a16="http://schemas.microsoft.com/office/drawing/2014/main" id="{FCA092B6-5D42-FB3F-587B-204AEE9C9C9C}"/>
-            </a:ext>
-          </a:extLst>
-        </p:cNvPr>
-        <p:cNvGrpSpPr/>
-        <p:nvPr/>
-      </p:nvGrpSpPr>
-      <p:grpSpPr>
-        <a:xfrm>
-          <a:off x="0" y="0"/>
-          <a:ext cx="0" cy="0"/>
-          <a:chOff x="0" y="0"/>
-          <a:chExt cx="0" cy="0"/>
-        </a:xfrm>
-      </p:grpSpPr>
-      <p:sp>
-        <p:nvSpPr>
-          <p:cNvPr id="4" name="TextBox 3">
-            <a:extLst>
-              <a:ext uri="{FF2B5EF4-FFF2-40B4-BE49-F238E27FC236}">
-                <a16:creationId xmlns:a16="http://schemas.microsoft.com/office/drawing/2014/main" id="{1B9229E8-DBA0-E35F-274A-F9060DB3889D}"/>
-              </a:ext>
-            </a:extLst>
-          </p:cNvPr>
-          <p:cNvSpPr txBox="1"/>
-          <p:nvPr/>
-        </p:nvSpPr>
-        <p:spPr>
-          <a:xfrm>
-            <a:off x="166255" y="175491"/>
-            <a:ext cx="10603345" cy="2937279"/>
-          </a:xfrm>
-          <a:prstGeom prst="rect">
-            <a:avLst/>
-          </a:prstGeom>
-          <a:noFill/>
-        </p:spPr>
-        <p:txBody>
-          <a:bodyPr wrap="square" rtlCol="0">
-            <a:spAutoFit/>
-          </a:bodyPr>
-          <a:lstStyle/>
-          <a:p>
-            <a:pPr marL="0" marR="0" indent="0" algn="just" fontAlgn="base" latinLnBrk="1">
-              <a:lnSpc>
-                <a:spcPct val="160000"/>
-              </a:lnSpc>
-              <a:spcBef>
-                <a:spcPts val="0"/>
-              </a:spcBef>
-              <a:spcAft>
-                <a:spcPts val="0"/>
-              </a:spcAft>
-            </a:pPr>
-            <a:r>
-              <a:rPr lang="en-US" altLang="ko-KR" sz="2800" b="1" kern="0" spc="0" dirty="0">
-                <a:solidFill>
-                  <a:srgbClr val="000000"/>
-                </a:solidFill>
-                <a:effectLst/>
-                <a:latin typeface="ADLaM Display" panose="02010000000000000000" pitchFamily="2" charset="0"/>
-                <a:ea typeface="ADLaM Display" panose="02010000000000000000" pitchFamily="2" charset="0"/>
-                <a:cs typeface="ADLaM Display" panose="02010000000000000000" pitchFamily="2" charset="0"/>
-              </a:rPr>
-              <a:t>Firebase </a:t>
-            </a:r>
-            <a:r>
-              <a:rPr lang="ko-KR" altLang="en-US" sz="2800" b="1" kern="0" spc="0" dirty="0">
-                <a:solidFill>
-                  <a:srgbClr val="000000"/>
-                </a:solidFill>
-                <a:effectLst/>
-                <a:latin typeface="ADLaM Display" panose="02010000000000000000" pitchFamily="2" charset="0"/>
-                <a:ea typeface="함초롬바탕" panose="02030604000101010101" pitchFamily="18" charset="-127"/>
-                <a:cs typeface="ADLaM Display" panose="02010000000000000000" pitchFamily="2" charset="0"/>
-              </a:rPr>
-              <a:t>앱 로그 기반 데이터 분석 </a:t>
-            </a:r>
-            <a:endParaRPr lang="en-US" altLang="ko-KR" sz="2800" b="1" kern="0" spc="0" dirty="0">
-              <a:solidFill>
-                <a:srgbClr val="000000"/>
-              </a:solidFill>
-              <a:effectLst/>
-              <a:latin typeface="ADLaM Display" panose="02010000000000000000" pitchFamily="2" charset="0"/>
-              <a:ea typeface="ADLaM Display" panose="02010000000000000000" pitchFamily="2" charset="0"/>
-              <a:cs typeface="ADLaM Display" panose="02010000000000000000" pitchFamily="2" charset="0"/>
-            </a:endParaRPr>
-          </a:p>
-          <a:p>
-            <a:pPr algn="just" fontAlgn="base">
-              <a:lnSpc>
-                <a:spcPct val="160000"/>
-              </a:lnSpc>
-            </a:pPr>
-            <a:r>
-              <a:rPr lang="en-US" altLang="ko-KR" sz="1800" kern="0" spc="0" dirty="0">
-                <a:solidFill>
-                  <a:srgbClr val="000000"/>
-                </a:solidFill>
-                <a:effectLst/>
-                <a:latin typeface="ADLaM Display" panose="02010000000000000000" pitchFamily="2" charset="0"/>
-                <a:ea typeface="ADLaM Display" panose="02010000000000000000" pitchFamily="2" charset="0"/>
-                <a:cs typeface="ADLaM Display" panose="02010000000000000000" pitchFamily="2" charset="0"/>
-              </a:rPr>
-              <a:t>&lt;</a:t>
-            </a:r>
-            <a:r>
-              <a:rPr lang="ko-KR" altLang="en-US" sz="1800" kern="0" spc="0" dirty="0">
-                <a:solidFill>
-                  <a:srgbClr val="000000"/>
-                </a:solidFill>
-                <a:effectLst/>
-                <a:latin typeface="ADLaM Display" panose="02010000000000000000" pitchFamily="2" charset="0"/>
-                <a:cs typeface="ADLaM Display" panose="02010000000000000000" pitchFamily="2" charset="0"/>
-              </a:rPr>
-              <a:t>코호트 </a:t>
-            </a:r>
-            <a:r>
-              <a:rPr lang="ko-KR" altLang="en-US" sz="1800" kern="0" spc="0" dirty="0" err="1">
-                <a:solidFill>
-                  <a:srgbClr val="000000"/>
-                </a:solidFill>
-                <a:effectLst/>
-                <a:latin typeface="ADLaM Display" panose="02010000000000000000" pitchFamily="2" charset="0"/>
-                <a:cs typeface="ADLaM Display" panose="02010000000000000000" pitchFamily="2" charset="0"/>
-              </a:rPr>
-              <a:t>리텐션</a:t>
-            </a:r>
-            <a:r>
-              <a:rPr lang="en-US" altLang="ko-KR" kern="0" dirty="0">
-                <a:solidFill>
-                  <a:srgbClr val="000000"/>
-                </a:solidFill>
-                <a:latin typeface="ADLaM Display" panose="02010000000000000000" pitchFamily="2" charset="0"/>
-                <a:ea typeface="ADLaM Display" panose="02010000000000000000" pitchFamily="2" charset="0"/>
-                <a:cs typeface="ADLaM Display" panose="02010000000000000000" pitchFamily="2" charset="0"/>
-              </a:rPr>
-              <a:t>&gt;</a:t>
-            </a:r>
-            <a:endParaRPr lang="ko-KR" altLang="en-US" sz="1800" kern="0" spc="0" dirty="0">
-              <a:solidFill>
-                <a:srgbClr val="000000"/>
-              </a:solidFill>
-              <a:effectLst/>
-              <a:latin typeface="ADLaM Display" panose="02010000000000000000" pitchFamily="2" charset="0"/>
-              <a:cs typeface="ADLaM Display" panose="02010000000000000000" pitchFamily="2" charset="0"/>
-            </a:endParaRPr>
-          </a:p>
-          <a:p>
-            <a:pPr algn="just" fontAlgn="base">
-              <a:lnSpc>
-                <a:spcPct val="160000"/>
-              </a:lnSpc>
-            </a:pPr>
-            <a:r>
-              <a:rPr lang="en-US" altLang="ko-KR" kern="0" dirty="0">
-                <a:solidFill>
-                  <a:srgbClr val="000000"/>
-                </a:solidFill>
-                <a:latin typeface="ADLaM Display" panose="02010000000000000000" pitchFamily="2" charset="0"/>
-                <a:ea typeface="ADLaM Display" panose="02010000000000000000" pitchFamily="2" charset="0"/>
-                <a:cs typeface="ADLaM Display" panose="02010000000000000000" pitchFamily="2" charset="0"/>
-              </a:rPr>
-              <a:t>SQL </a:t>
-            </a:r>
-            <a:r>
-              <a:rPr lang="ko-KR" altLang="en-US" kern="0" dirty="0">
-                <a:solidFill>
-                  <a:srgbClr val="000000"/>
-                </a:solidFill>
-                <a:latin typeface="ADLaM Display" panose="02010000000000000000" pitchFamily="2" charset="0"/>
-                <a:cs typeface="ADLaM Display" panose="02010000000000000000" pitchFamily="2" charset="0"/>
-              </a:rPr>
-              <a:t>쿼리를 통해 사용자 행동 데이터</a:t>
-            </a:r>
-            <a:r>
-              <a:rPr lang="en-US" altLang="ko-KR" kern="0" dirty="0">
-                <a:solidFill>
-                  <a:srgbClr val="000000"/>
-                </a:solidFill>
-                <a:latin typeface="ADLaM Display" panose="02010000000000000000" pitchFamily="2" charset="0"/>
-                <a:ea typeface="ADLaM Display" panose="02010000000000000000" pitchFamily="2" charset="0"/>
-                <a:cs typeface="ADLaM Display" panose="02010000000000000000" pitchFamily="2" charset="0"/>
-              </a:rPr>
-              <a:t>, </a:t>
-            </a:r>
-            <a:r>
-              <a:rPr lang="ko-KR" altLang="en-US" kern="0" dirty="0">
-                <a:solidFill>
-                  <a:srgbClr val="000000"/>
-                </a:solidFill>
-                <a:latin typeface="ADLaM Display" panose="02010000000000000000" pitchFamily="2" charset="0"/>
-                <a:cs typeface="ADLaM Display" panose="02010000000000000000" pitchFamily="2" charset="0"/>
-              </a:rPr>
-              <a:t>행동 로그 집계</a:t>
-            </a:r>
-            <a:endParaRPr lang="en-US" altLang="ko-KR" sz="1800" kern="0" spc="0" dirty="0">
-              <a:solidFill>
-                <a:srgbClr val="000000"/>
-              </a:solidFill>
-              <a:effectLst/>
-              <a:latin typeface="ADLaM Display" panose="02010000000000000000" pitchFamily="2" charset="0"/>
-              <a:ea typeface="ADLaM Display" panose="02010000000000000000" pitchFamily="2" charset="0"/>
-              <a:cs typeface="ADLaM Display" panose="02010000000000000000" pitchFamily="2" charset="0"/>
-            </a:endParaRPr>
-          </a:p>
-          <a:p>
-            <a:pPr algn="just" fontAlgn="base">
-              <a:lnSpc>
-                <a:spcPct val="160000"/>
-              </a:lnSpc>
-            </a:pPr>
-            <a:endParaRPr lang="en-US" altLang="ko-KR" dirty="0">
-              <a:latin typeface="ADLaM Display" panose="02010000000000000000" pitchFamily="2" charset="0"/>
-              <a:ea typeface="ADLaM Display" panose="02010000000000000000" pitchFamily="2" charset="0"/>
-              <a:cs typeface="ADLaM Display" panose="02010000000000000000" pitchFamily="2" charset="0"/>
-            </a:endParaRPr>
-          </a:p>
-          <a:p>
-            <a:pPr algn="just" fontAlgn="base">
-              <a:lnSpc>
-                <a:spcPct val="160000"/>
-              </a:lnSpc>
-            </a:pPr>
-            <a:r>
-              <a:rPr lang="ko-KR" altLang="en-US" kern="0" dirty="0">
-                <a:solidFill>
-                  <a:srgbClr val="000000"/>
-                </a:solidFill>
-                <a:latin typeface="ADLaM Display" panose="02010000000000000000" pitchFamily="2" charset="0"/>
-                <a:ea typeface="함초롬바탕" panose="02030604000101010101" pitchFamily="18" charset="-127"/>
-                <a:cs typeface="ADLaM Display" panose="02010000000000000000" pitchFamily="2" charset="0"/>
-              </a:rPr>
-              <a:t>데이터 </a:t>
-            </a:r>
-            <a:r>
-              <a:rPr lang="en-US" altLang="ko-KR" kern="0" dirty="0">
-                <a:solidFill>
-                  <a:srgbClr val="000000"/>
-                </a:solidFill>
-                <a:latin typeface="ADLaM Display" panose="02010000000000000000" pitchFamily="2" charset="0"/>
-                <a:ea typeface="ADLaM Display" panose="02010000000000000000" pitchFamily="2" charset="0"/>
-                <a:cs typeface="ADLaM Display" panose="02010000000000000000" pitchFamily="2" charset="0"/>
-              </a:rPr>
-              <a:t>: 2022-08-01 ~ 2022-12-31</a:t>
-            </a:r>
-            <a:endParaRPr lang="en-US" altLang="ko-KR" sz="1800" kern="0" spc="0" dirty="0">
-              <a:solidFill>
-                <a:srgbClr val="000000"/>
-              </a:solidFill>
-              <a:effectLst/>
-              <a:latin typeface="ADLaM Display" panose="02010000000000000000" pitchFamily="2" charset="0"/>
-              <a:ea typeface="ADLaM Display" panose="02010000000000000000" pitchFamily="2" charset="0"/>
-              <a:cs typeface="ADLaM Display" panose="02010000000000000000" pitchFamily="2" charset="0"/>
-            </a:endParaRPr>
-          </a:p>
-          <a:p>
-            <a:pPr algn="just" fontAlgn="base">
-              <a:lnSpc>
-                <a:spcPct val="160000"/>
-              </a:lnSpc>
-            </a:pPr>
-            <a:endParaRPr lang="ko-KR" altLang="en-US" dirty="0"/>
-          </a:p>
-        </p:txBody>
-      </p:sp>
-      <p:pic>
-        <p:nvPicPr>
-          <p:cNvPr id="5" name="그림 4" descr="텍스트, 번호, 스크린샷, 폰트이(가) 표시된 사진&#10;&#10;자동 생성된 설명">
-            <a:extLst>
-              <a:ext uri="{FF2B5EF4-FFF2-40B4-BE49-F238E27FC236}">
-                <a16:creationId xmlns:a16="http://schemas.microsoft.com/office/drawing/2014/main" id="{C3D899A6-BF7D-51D1-DB2E-B5EA03CC3B4F}"/>
-              </a:ext>
-            </a:extLst>
-          </p:cNvPr>
-          <p:cNvPicPr>
-            <a:picLocks noChangeAspect="1"/>
-          </p:cNvPicPr>
-          <p:nvPr/>
-        </p:nvPicPr>
-        <p:blipFill>
-          <a:blip r:embed="rId2">
-            <a:extLst>
-              <a:ext uri="{28A0092B-C50C-407E-A947-70E740481C1C}">
-                <a14:useLocalDpi xmlns:a14="http://schemas.microsoft.com/office/drawing/2010/main" val="0"/>
-              </a:ext>
-            </a:extLst>
-          </a:blip>
-          <a:stretch>
-            <a:fillRect/>
-          </a:stretch>
-        </p:blipFill>
-        <p:spPr>
-          <a:xfrm>
-            <a:off x="5496717" y="2299010"/>
-            <a:ext cx="6083998" cy="3409064"/>
-          </a:xfrm>
-          <a:prstGeom prst="rect">
-            <a:avLst/>
-          </a:prstGeom>
-        </p:spPr>
-      </p:pic>
-    </p:spTree>
-    <p:extLst>
-      <p:ext uri="{BB962C8B-B14F-4D97-AF65-F5344CB8AC3E}">
-        <p14:creationId xmlns:p14="http://schemas.microsoft.com/office/powerpoint/2010/main" val="955460939"/>
-      </p:ext>
-    </p:extLst>
-  </p:cSld>
-  <p:clrMapOvr>
-    <a:masterClrMapping/>
-  </p:clrMapOvr>
-</p:sld>
-</file>
-
-<file path=ppt/slides/slide9.xml><?xml version="1.0" encoding="utf-8"?>
-<p:sld xmlns:a="http://schemas.openxmlformats.org/drawingml/2006/main" xmlns:r="http://schemas.openxmlformats.org/officeDocument/2006/relationships" xmlns:p="http://schemas.openxmlformats.org/presentationml/2006/main">
-  <p:cSld>
-    <p:spTree>
-      <p:nvGrpSpPr>
-        <p:cNvPr id="1" name="">
-          <a:extLst>
-            <a:ext uri="{FF2B5EF4-FFF2-40B4-BE49-F238E27FC236}">
-              <a16:creationId xmlns:a16="http://schemas.microsoft.com/office/drawing/2014/main" id="{E78FDB4B-450B-B7DC-C630-9D45BCC71981}"/>
-            </a:ext>
-          </a:extLst>
-        </p:cNvPr>
-        <p:cNvGrpSpPr/>
-        <p:nvPr/>
-      </p:nvGrpSpPr>
-      <p:grpSpPr>
-        <a:xfrm>
-          <a:off x="0" y="0"/>
-          <a:ext cx="0" cy="0"/>
-          <a:chOff x="0" y="0"/>
-          <a:chExt cx="0" cy="0"/>
-        </a:xfrm>
-      </p:grpSpPr>
-      <p:sp>
-        <p:nvSpPr>
-          <p:cNvPr id="4" name="TextBox 3">
-            <a:extLst>
-              <a:ext uri="{FF2B5EF4-FFF2-40B4-BE49-F238E27FC236}">
-                <a16:creationId xmlns:a16="http://schemas.microsoft.com/office/drawing/2014/main" id="{5F82A067-3513-7D7A-B70B-A8877DA9BCDF}"/>
-              </a:ext>
-            </a:extLst>
-          </p:cNvPr>
-          <p:cNvSpPr txBox="1"/>
-          <p:nvPr/>
-        </p:nvSpPr>
-        <p:spPr>
-          <a:xfrm>
-            <a:off x="166255" y="175491"/>
-            <a:ext cx="10603345" cy="1607684"/>
-          </a:xfrm>
-          <a:prstGeom prst="rect">
-            <a:avLst/>
-          </a:prstGeom>
-          <a:noFill/>
-        </p:spPr>
-        <p:txBody>
-          <a:bodyPr wrap="square" rtlCol="0">
-            <a:spAutoFit/>
-          </a:bodyPr>
-          <a:lstStyle/>
-          <a:p>
-            <a:pPr marL="0" marR="0" indent="0" algn="just" fontAlgn="base" latinLnBrk="1">
-              <a:lnSpc>
-                <a:spcPct val="160000"/>
-              </a:lnSpc>
-              <a:spcBef>
-                <a:spcPts val="0"/>
-              </a:spcBef>
-              <a:spcAft>
-                <a:spcPts val="0"/>
-              </a:spcAft>
-            </a:pPr>
-            <a:r>
-              <a:rPr lang="en-US" altLang="ko-KR" sz="2800" b="1" kern="0" spc="0" dirty="0">
-                <a:solidFill>
-                  <a:srgbClr val="000000"/>
-                </a:solidFill>
-                <a:effectLst/>
-                <a:latin typeface="ADLaM Display" panose="02010000000000000000" pitchFamily="2" charset="0"/>
-                <a:ea typeface="ADLaM Display" panose="02010000000000000000" pitchFamily="2" charset="0"/>
-                <a:cs typeface="ADLaM Display" panose="02010000000000000000" pitchFamily="2" charset="0"/>
-              </a:rPr>
-              <a:t>Firebase </a:t>
-            </a:r>
-            <a:r>
-              <a:rPr lang="ko-KR" altLang="en-US" sz="2800" b="1" kern="0" spc="0" dirty="0">
-                <a:solidFill>
-                  <a:srgbClr val="000000"/>
-                </a:solidFill>
-                <a:effectLst/>
-                <a:latin typeface="ADLaM Display" panose="02010000000000000000" pitchFamily="2" charset="0"/>
-                <a:ea typeface="함초롬바탕" panose="02030604000101010101" pitchFamily="18" charset="-127"/>
-                <a:cs typeface="ADLaM Display" panose="02010000000000000000" pitchFamily="2" charset="0"/>
-              </a:rPr>
-              <a:t>앱 로그 기반 데이터 분석 </a:t>
-            </a:r>
-            <a:endParaRPr lang="en-US" altLang="ko-KR" sz="2800" b="1" kern="0" spc="0" dirty="0">
-              <a:solidFill>
-                <a:srgbClr val="000000"/>
-              </a:solidFill>
-              <a:effectLst/>
-              <a:latin typeface="ADLaM Display" panose="02010000000000000000" pitchFamily="2" charset="0"/>
-              <a:ea typeface="ADLaM Display" panose="02010000000000000000" pitchFamily="2" charset="0"/>
-              <a:cs typeface="ADLaM Display" panose="02010000000000000000" pitchFamily="2" charset="0"/>
-            </a:endParaRPr>
-          </a:p>
-          <a:p>
-            <a:pPr algn="just" fontAlgn="base">
-              <a:lnSpc>
-                <a:spcPct val="160000"/>
-              </a:lnSpc>
-            </a:pPr>
-            <a:r>
-              <a:rPr lang="en-US" altLang="ko-KR" sz="1800" kern="0" spc="0" dirty="0">
-                <a:solidFill>
-                  <a:srgbClr val="000000"/>
-                </a:solidFill>
-                <a:effectLst/>
-                <a:latin typeface="ADLaM Display" panose="02010000000000000000" pitchFamily="2" charset="0"/>
-                <a:ea typeface="ADLaM Display" panose="02010000000000000000" pitchFamily="2" charset="0"/>
-                <a:cs typeface="ADLaM Display" panose="02010000000000000000" pitchFamily="2" charset="0"/>
-              </a:rPr>
-              <a:t>&lt;</a:t>
-            </a:r>
-            <a:r>
-              <a:rPr lang="ko-KR" altLang="en-US" sz="1800" kern="0" spc="0" dirty="0">
-                <a:solidFill>
-                  <a:srgbClr val="000000"/>
-                </a:solidFill>
-                <a:effectLst/>
-                <a:latin typeface="ADLaM Display" panose="02010000000000000000" pitchFamily="2" charset="0"/>
-                <a:cs typeface="ADLaM Display" panose="02010000000000000000" pitchFamily="2" charset="0"/>
-              </a:rPr>
-              <a:t>코호트 </a:t>
-            </a:r>
-            <a:r>
-              <a:rPr lang="ko-KR" altLang="en-US" sz="1800" kern="0" spc="0" dirty="0" err="1">
-                <a:solidFill>
-                  <a:srgbClr val="000000"/>
-                </a:solidFill>
-                <a:effectLst/>
-                <a:latin typeface="ADLaM Display" panose="02010000000000000000" pitchFamily="2" charset="0"/>
-                <a:cs typeface="ADLaM Display" panose="02010000000000000000" pitchFamily="2" charset="0"/>
-              </a:rPr>
-              <a:t>리텐션</a:t>
-            </a:r>
-            <a:r>
-              <a:rPr lang="en-US" altLang="ko-KR" kern="0" dirty="0">
-                <a:solidFill>
-                  <a:srgbClr val="000000"/>
-                </a:solidFill>
-                <a:latin typeface="ADLaM Display" panose="02010000000000000000" pitchFamily="2" charset="0"/>
-                <a:ea typeface="ADLaM Display" panose="02010000000000000000" pitchFamily="2" charset="0"/>
-                <a:cs typeface="ADLaM Display" panose="02010000000000000000" pitchFamily="2" charset="0"/>
-              </a:rPr>
-              <a:t>&gt;</a:t>
-            </a:r>
-            <a:endParaRPr lang="ko-KR" altLang="en-US" sz="1800" kern="0" spc="0" dirty="0">
-              <a:solidFill>
-                <a:srgbClr val="000000"/>
-              </a:solidFill>
-              <a:effectLst/>
-              <a:latin typeface="ADLaM Display" panose="02010000000000000000" pitchFamily="2" charset="0"/>
-              <a:cs typeface="ADLaM Display" panose="02010000000000000000" pitchFamily="2" charset="0"/>
-            </a:endParaRPr>
-          </a:p>
-          <a:p>
-            <a:pPr algn="just" fontAlgn="base">
-              <a:lnSpc>
-                <a:spcPct val="160000"/>
-              </a:lnSpc>
-            </a:pPr>
-            <a:endParaRPr lang="en-US" altLang="ko-KR" dirty="0"/>
-          </a:p>
-        </p:txBody>
-      </p:sp>
-      <p:pic>
-        <p:nvPicPr>
-          <p:cNvPr id="3" name="그림 2" descr="텍스트, 도표, 라인, 그래프이(가) 표시된 사진&#10;&#10;자동 생성된 설명">
-            <a:extLst>
-              <a:ext uri="{FF2B5EF4-FFF2-40B4-BE49-F238E27FC236}">
-                <a16:creationId xmlns:a16="http://schemas.microsoft.com/office/drawing/2014/main" id="{F85D2529-DBFE-89D0-DD7A-A9C131C91504}"/>
-              </a:ext>
-            </a:extLst>
-          </p:cNvPr>
-          <p:cNvPicPr>
-            <a:picLocks noChangeAspect="1"/>
-          </p:cNvPicPr>
-          <p:nvPr/>
-        </p:nvPicPr>
-        <p:blipFill>
-          <a:blip r:embed="rId2">
-            <a:extLst>
-              <a:ext uri="{28A0092B-C50C-407E-A947-70E740481C1C}">
-                <a14:useLocalDpi xmlns:a14="http://schemas.microsoft.com/office/drawing/2010/main" val="0"/>
-              </a:ext>
-            </a:extLst>
-          </a:blip>
-          <a:stretch>
-            <a:fillRect/>
-          </a:stretch>
-        </p:blipFill>
-        <p:spPr>
-          <a:xfrm>
-            <a:off x="241878" y="1869143"/>
-            <a:ext cx="10027482" cy="2915293"/>
-          </a:xfrm>
-          <a:prstGeom prst="rect">
-            <a:avLst/>
-          </a:prstGeom>
-        </p:spPr>
-      </p:pic>
-      <p:sp>
-        <p:nvSpPr>
-          <p:cNvPr id="6" name="TextBox 5">
-            <a:extLst>
-              <a:ext uri="{FF2B5EF4-FFF2-40B4-BE49-F238E27FC236}">
-                <a16:creationId xmlns:a16="http://schemas.microsoft.com/office/drawing/2014/main" id="{ED6AFD43-3649-A3E9-9C7E-78221197F73E}"/>
-              </a:ext>
-            </a:extLst>
-          </p:cNvPr>
-          <p:cNvSpPr txBox="1"/>
-          <p:nvPr/>
-        </p:nvSpPr>
-        <p:spPr>
-          <a:xfrm>
-            <a:off x="7914088" y="2921168"/>
-            <a:ext cx="3980872" cy="1015663"/>
-          </a:xfrm>
-          <a:prstGeom prst="rect">
-            <a:avLst/>
-          </a:prstGeom>
-          <a:noFill/>
-        </p:spPr>
-        <p:txBody>
-          <a:bodyPr wrap="square" rtlCol="0">
-            <a:spAutoFit/>
-          </a:bodyPr>
-          <a:lstStyle/>
-          <a:p>
-            <a:r>
-              <a:rPr lang="ko-KR" altLang="en-US" sz="1200" dirty="0">
-                <a:latin typeface="ADLaM Display" panose="02010000000000000000" pitchFamily="2" charset="0"/>
-                <a:cs typeface="ADLaM Display" panose="02010000000000000000" pitchFamily="2" charset="0"/>
-              </a:rPr>
-              <a:t>비율 지표 특성상 분자와 분모의 수가 얼마나 되는지도 참고 가능</a:t>
-            </a:r>
-            <a:endParaRPr lang="en-US" altLang="ko-KR" sz="1200" dirty="0">
-              <a:latin typeface="ADLaM Display" panose="02010000000000000000" pitchFamily="2" charset="0"/>
-              <a:ea typeface="ADLaM Display" panose="02010000000000000000" pitchFamily="2" charset="0"/>
-              <a:cs typeface="ADLaM Display" panose="02010000000000000000" pitchFamily="2" charset="0"/>
-            </a:endParaRPr>
-          </a:p>
-          <a:p>
-            <a:endParaRPr lang="en-US" altLang="ko-KR" sz="1200" dirty="0">
-              <a:latin typeface="ADLaM Display" panose="02010000000000000000" pitchFamily="2" charset="0"/>
-              <a:ea typeface="ADLaM Display" panose="02010000000000000000" pitchFamily="2" charset="0"/>
-              <a:cs typeface="ADLaM Display" panose="02010000000000000000" pitchFamily="2" charset="0"/>
-            </a:endParaRPr>
-          </a:p>
-          <a:p>
-            <a:r>
-              <a:rPr lang="ko-KR" altLang="en-US" sz="1200" dirty="0">
-                <a:latin typeface="ADLaM Display" panose="02010000000000000000" pitchFamily="2" charset="0"/>
-                <a:cs typeface="ADLaM Display" panose="02010000000000000000" pitchFamily="2" charset="0"/>
-              </a:rPr>
-              <a:t>비율과 숫자를 모두 보며 파악하기 </a:t>
-            </a:r>
-            <a:r>
-              <a:rPr lang="en-US" altLang="ko-KR" sz="1200" dirty="0">
-                <a:latin typeface="ADLaM Display" panose="02010000000000000000" pitchFamily="2" charset="0"/>
-                <a:ea typeface="ADLaM Display" panose="02010000000000000000" pitchFamily="2" charset="0"/>
-                <a:cs typeface="ADLaM Display" panose="02010000000000000000" pitchFamily="2" charset="0"/>
-              </a:rPr>
-              <a:t>=&gt; </a:t>
-            </a:r>
-            <a:r>
-              <a:rPr lang="ko-KR" altLang="en-US" sz="1200" dirty="0">
-                <a:latin typeface="ADLaM Display" panose="02010000000000000000" pitchFamily="2" charset="0"/>
-                <a:cs typeface="ADLaM Display" panose="02010000000000000000" pitchFamily="2" charset="0"/>
-              </a:rPr>
-              <a:t>너무 작은 데이터인 경우 비율이 높게 나올 수 있음 주의</a:t>
-            </a:r>
-          </a:p>
-        </p:txBody>
-      </p:sp>
-      <p:pic>
-        <p:nvPicPr>
-          <p:cNvPr id="8" name="그림 7" descr="텍스트, 도표, 그래프, 라인이(가) 표시된 사진&#10;&#10;자동 생성된 설명">
-            <a:extLst>
-              <a:ext uri="{FF2B5EF4-FFF2-40B4-BE49-F238E27FC236}">
-                <a16:creationId xmlns:a16="http://schemas.microsoft.com/office/drawing/2014/main" id="{078DFDDF-28D1-FEDE-DE3C-4662E5B293FF}"/>
-              </a:ext>
-            </a:extLst>
-          </p:cNvPr>
-          <p:cNvPicPr>
-            <a:picLocks noChangeAspect="1"/>
-          </p:cNvPicPr>
-          <p:nvPr/>
-        </p:nvPicPr>
-        <p:blipFill>
-          <a:blip r:embed="rId3">
-            <a:extLst>
-              <a:ext uri="{28A0092B-C50C-407E-A947-70E740481C1C}">
-                <a14:useLocalDpi xmlns:a14="http://schemas.microsoft.com/office/drawing/2010/main" val="0"/>
-              </a:ext>
-            </a:extLst>
-          </a:blip>
-          <a:stretch>
-            <a:fillRect/>
-          </a:stretch>
-        </p:blipFill>
-        <p:spPr>
-          <a:xfrm>
-            <a:off x="3352801" y="4187196"/>
-            <a:ext cx="8746836" cy="2521943"/>
-          </a:xfrm>
-          <a:prstGeom prst="rect">
-            <a:avLst/>
-          </a:prstGeom>
-        </p:spPr>
-      </p:pic>
-    </p:spTree>
-    <p:extLst>
-      <p:ext uri="{BB962C8B-B14F-4D97-AF65-F5344CB8AC3E}">
-        <p14:creationId xmlns:p14="http://schemas.microsoft.com/office/powerpoint/2010/main" val="3351374284"/>
       </p:ext>
     </p:extLst>
   </p:cSld>

--- a/앱 로그 데이터 분석.pptx
+++ b/앱 로그 데이터 분석.pptx
@@ -276,7 +276,7 @@
           <a:p>
             <a:fld id="{5D7012CF-30D5-45E8-9C43-19A7D39C36A9}" type="datetimeFigureOut">
               <a:rPr lang="ko-KR" altLang="en-US" smtClean="0"/>
-              <a:t>2024-11-12</a:t>
+              <a:t>2024-11-20</a:t>
             </a:fld>
             <a:endParaRPr lang="ko-KR" altLang="en-US"/>
           </a:p>
@@ -474,7 +474,7 @@
           <a:p>
             <a:fld id="{5D7012CF-30D5-45E8-9C43-19A7D39C36A9}" type="datetimeFigureOut">
               <a:rPr lang="ko-KR" altLang="en-US" smtClean="0"/>
-              <a:t>2024-11-12</a:t>
+              <a:t>2024-11-20</a:t>
             </a:fld>
             <a:endParaRPr lang="ko-KR" altLang="en-US"/>
           </a:p>
@@ -682,7 +682,7 @@
           <a:p>
             <a:fld id="{5D7012CF-30D5-45E8-9C43-19A7D39C36A9}" type="datetimeFigureOut">
               <a:rPr lang="ko-KR" altLang="en-US" smtClean="0"/>
-              <a:t>2024-11-12</a:t>
+              <a:t>2024-11-20</a:t>
             </a:fld>
             <a:endParaRPr lang="ko-KR" altLang="en-US"/>
           </a:p>
@@ -880,7 +880,7 @@
           <a:p>
             <a:fld id="{5D7012CF-30D5-45E8-9C43-19A7D39C36A9}" type="datetimeFigureOut">
               <a:rPr lang="ko-KR" altLang="en-US" smtClean="0"/>
-              <a:t>2024-11-12</a:t>
+              <a:t>2024-11-20</a:t>
             </a:fld>
             <a:endParaRPr lang="ko-KR" altLang="en-US"/>
           </a:p>
@@ -1155,7 +1155,7 @@
           <a:p>
             <a:fld id="{5D7012CF-30D5-45E8-9C43-19A7D39C36A9}" type="datetimeFigureOut">
               <a:rPr lang="ko-KR" altLang="en-US" smtClean="0"/>
-              <a:t>2024-11-12</a:t>
+              <a:t>2024-11-20</a:t>
             </a:fld>
             <a:endParaRPr lang="ko-KR" altLang="en-US"/>
           </a:p>
@@ -1420,7 +1420,7 @@
           <a:p>
             <a:fld id="{5D7012CF-30D5-45E8-9C43-19A7D39C36A9}" type="datetimeFigureOut">
               <a:rPr lang="ko-KR" altLang="en-US" smtClean="0"/>
-              <a:t>2024-11-12</a:t>
+              <a:t>2024-11-20</a:t>
             </a:fld>
             <a:endParaRPr lang="ko-KR" altLang="en-US"/>
           </a:p>
@@ -1832,7 +1832,7 @@
           <a:p>
             <a:fld id="{5D7012CF-30D5-45E8-9C43-19A7D39C36A9}" type="datetimeFigureOut">
               <a:rPr lang="ko-KR" altLang="en-US" smtClean="0"/>
-              <a:t>2024-11-12</a:t>
+              <a:t>2024-11-20</a:t>
             </a:fld>
             <a:endParaRPr lang="ko-KR" altLang="en-US"/>
           </a:p>
@@ -1973,7 +1973,7 @@
           <a:p>
             <a:fld id="{5D7012CF-30D5-45E8-9C43-19A7D39C36A9}" type="datetimeFigureOut">
               <a:rPr lang="ko-KR" altLang="en-US" smtClean="0"/>
-              <a:t>2024-11-12</a:t>
+              <a:t>2024-11-20</a:t>
             </a:fld>
             <a:endParaRPr lang="ko-KR" altLang="en-US"/>
           </a:p>
@@ -2086,7 +2086,7 @@
           <a:p>
             <a:fld id="{5D7012CF-30D5-45E8-9C43-19A7D39C36A9}" type="datetimeFigureOut">
               <a:rPr lang="ko-KR" altLang="en-US" smtClean="0"/>
-              <a:t>2024-11-12</a:t>
+              <a:t>2024-11-20</a:t>
             </a:fld>
             <a:endParaRPr lang="ko-KR" altLang="en-US"/>
           </a:p>
@@ -2397,7 +2397,7 @@
           <a:p>
             <a:fld id="{5D7012CF-30D5-45E8-9C43-19A7D39C36A9}" type="datetimeFigureOut">
               <a:rPr lang="ko-KR" altLang="en-US" smtClean="0"/>
-              <a:t>2024-11-12</a:t>
+              <a:t>2024-11-20</a:t>
             </a:fld>
             <a:endParaRPr lang="ko-KR" altLang="en-US"/>
           </a:p>
@@ -2685,7 +2685,7 @@
           <a:p>
             <a:fld id="{5D7012CF-30D5-45E8-9C43-19A7D39C36A9}" type="datetimeFigureOut">
               <a:rPr lang="ko-KR" altLang="en-US" smtClean="0"/>
-              <a:t>2024-11-12</a:t>
+              <a:t>2024-11-20</a:t>
             </a:fld>
             <a:endParaRPr lang="ko-KR" altLang="en-US"/>
           </a:p>
@@ -2926,7 +2926,7 @@
           <a:p>
             <a:fld id="{5D7012CF-30D5-45E8-9C43-19A7D39C36A9}" type="datetimeFigureOut">
               <a:rPr lang="ko-KR" altLang="en-US" smtClean="0"/>
-              <a:t>2024-11-12</a:t>
+              <a:t>2024-11-20</a:t>
             </a:fld>
             <a:endParaRPr lang="ko-KR" altLang="en-US"/>
           </a:p>

--- a/앱 로그 데이터 분석.pptx
+++ b/앱 로그 데이터 분석.pptx
@@ -276,7 +276,7 @@
           <a:p>
             <a:fld id="{5D7012CF-30D5-45E8-9C43-19A7D39C36A9}" type="datetimeFigureOut">
               <a:rPr lang="ko-KR" altLang="en-US" smtClean="0"/>
-              <a:t>2024-11-20</a:t>
+              <a:t>2024-11-23</a:t>
             </a:fld>
             <a:endParaRPr lang="ko-KR" altLang="en-US"/>
           </a:p>
@@ -474,7 +474,7 @@
           <a:p>
             <a:fld id="{5D7012CF-30D5-45E8-9C43-19A7D39C36A9}" type="datetimeFigureOut">
               <a:rPr lang="ko-KR" altLang="en-US" smtClean="0"/>
-              <a:t>2024-11-20</a:t>
+              <a:t>2024-11-23</a:t>
             </a:fld>
             <a:endParaRPr lang="ko-KR" altLang="en-US"/>
           </a:p>
@@ -682,7 +682,7 @@
           <a:p>
             <a:fld id="{5D7012CF-30D5-45E8-9C43-19A7D39C36A9}" type="datetimeFigureOut">
               <a:rPr lang="ko-KR" altLang="en-US" smtClean="0"/>
-              <a:t>2024-11-20</a:t>
+              <a:t>2024-11-23</a:t>
             </a:fld>
             <a:endParaRPr lang="ko-KR" altLang="en-US"/>
           </a:p>
@@ -880,7 +880,7 @@
           <a:p>
             <a:fld id="{5D7012CF-30D5-45E8-9C43-19A7D39C36A9}" type="datetimeFigureOut">
               <a:rPr lang="ko-KR" altLang="en-US" smtClean="0"/>
-              <a:t>2024-11-20</a:t>
+              <a:t>2024-11-23</a:t>
             </a:fld>
             <a:endParaRPr lang="ko-KR" altLang="en-US"/>
           </a:p>
@@ -1155,7 +1155,7 @@
           <a:p>
             <a:fld id="{5D7012CF-30D5-45E8-9C43-19A7D39C36A9}" type="datetimeFigureOut">
               <a:rPr lang="ko-KR" altLang="en-US" smtClean="0"/>
-              <a:t>2024-11-20</a:t>
+              <a:t>2024-11-23</a:t>
             </a:fld>
             <a:endParaRPr lang="ko-KR" altLang="en-US"/>
           </a:p>
@@ -1420,7 +1420,7 @@
           <a:p>
             <a:fld id="{5D7012CF-30D5-45E8-9C43-19A7D39C36A9}" type="datetimeFigureOut">
               <a:rPr lang="ko-KR" altLang="en-US" smtClean="0"/>
-              <a:t>2024-11-20</a:t>
+              <a:t>2024-11-23</a:t>
             </a:fld>
             <a:endParaRPr lang="ko-KR" altLang="en-US"/>
           </a:p>
@@ -1832,7 +1832,7 @@
           <a:p>
             <a:fld id="{5D7012CF-30D5-45E8-9C43-19A7D39C36A9}" type="datetimeFigureOut">
               <a:rPr lang="ko-KR" altLang="en-US" smtClean="0"/>
-              <a:t>2024-11-20</a:t>
+              <a:t>2024-11-23</a:t>
             </a:fld>
             <a:endParaRPr lang="ko-KR" altLang="en-US"/>
           </a:p>
@@ -1973,7 +1973,7 @@
           <a:p>
             <a:fld id="{5D7012CF-30D5-45E8-9C43-19A7D39C36A9}" type="datetimeFigureOut">
               <a:rPr lang="ko-KR" altLang="en-US" smtClean="0"/>
-              <a:t>2024-11-20</a:t>
+              <a:t>2024-11-23</a:t>
             </a:fld>
             <a:endParaRPr lang="ko-KR" altLang="en-US"/>
           </a:p>
@@ -2086,7 +2086,7 @@
           <a:p>
             <a:fld id="{5D7012CF-30D5-45E8-9C43-19A7D39C36A9}" type="datetimeFigureOut">
               <a:rPr lang="ko-KR" altLang="en-US" smtClean="0"/>
-              <a:t>2024-11-20</a:t>
+              <a:t>2024-11-23</a:t>
             </a:fld>
             <a:endParaRPr lang="ko-KR" altLang="en-US"/>
           </a:p>
@@ -2397,7 +2397,7 @@
           <a:p>
             <a:fld id="{5D7012CF-30D5-45E8-9C43-19A7D39C36A9}" type="datetimeFigureOut">
               <a:rPr lang="ko-KR" altLang="en-US" smtClean="0"/>
-              <a:t>2024-11-20</a:t>
+              <a:t>2024-11-23</a:t>
             </a:fld>
             <a:endParaRPr lang="ko-KR" altLang="en-US"/>
           </a:p>
@@ -2685,7 +2685,7 @@
           <a:p>
             <a:fld id="{5D7012CF-30D5-45E8-9C43-19A7D39C36A9}" type="datetimeFigureOut">
               <a:rPr lang="ko-KR" altLang="en-US" smtClean="0"/>
-              <a:t>2024-11-20</a:t>
+              <a:t>2024-11-23</a:t>
             </a:fld>
             <a:endParaRPr lang="ko-KR" altLang="en-US"/>
           </a:p>
@@ -2926,7 +2926,7 @@
           <a:p>
             <a:fld id="{5D7012CF-30D5-45E8-9C43-19A7D39C36A9}" type="datetimeFigureOut">
               <a:rPr lang="ko-KR" altLang="en-US" smtClean="0"/>
-              <a:t>2024-11-20</a:t>
+              <a:t>2024-11-23</a:t>
             </a:fld>
             <a:endParaRPr lang="ko-KR" altLang="en-US"/>
           </a:p>
